--- a/卒論/卒論スライド.pptx
+++ b/卒論/卒論スライド.pptx
@@ -5,18 +5,19 @@
     <p:sldMasterId id="2147483648" r:id="rId1"/>
   </p:sldMasterIdLst>
   <p:notesMasterIdLst>
-    <p:notesMasterId r:id="rId11"/>
+    <p:notesMasterId r:id="rId12"/>
   </p:notesMasterIdLst>
   <p:sldIdLst>
     <p:sldId id="256" r:id="rId2"/>
     <p:sldId id="258" r:id="rId3"/>
     <p:sldId id="259" r:id="rId4"/>
-    <p:sldId id="260" r:id="rId5"/>
-    <p:sldId id="261" r:id="rId6"/>
-    <p:sldId id="262" r:id="rId7"/>
-    <p:sldId id="263" r:id="rId8"/>
-    <p:sldId id="264" r:id="rId9"/>
-    <p:sldId id="265" r:id="rId10"/>
+    <p:sldId id="264" r:id="rId5"/>
+    <p:sldId id="260" r:id="rId6"/>
+    <p:sldId id="261" r:id="rId7"/>
+    <p:sldId id="266" r:id="rId8"/>
+    <p:sldId id="263" r:id="rId9"/>
+    <p:sldId id="274" r:id="rId10"/>
+    <p:sldId id="272" r:id="rId11"/>
   </p:sldIdLst>
   <p:sldSz cx="12192000" cy="6858000"/>
   <p:notesSz cx="6858000" cy="9144000"/>
@@ -205,7 +206,7 @@
           <a:p>
             <a:fld id="{B9D5E84E-6304-4E6B-B916-631837B59305}" type="datetimeFigureOut">
               <a:rPr kumimoji="1" lang="ja-JP" altLang="en-US" smtClean="0"/>
-              <a:t>2026/9/25</a:t>
+              <a:t>2026/10/2</a:t>
             </a:fld>
             <a:endParaRPr kumimoji="1" lang="ja-JP" altLang="en-US"/>
           </a:p>
@@ -737,7 +738,7 @@
           <a:p>
             <a:fld id="{188CAAE3-EE05-4E90-A13E-E947621726B8}" type="slidenum">
               <a:rPr kumimoji="1" lang="ja-JP" altLang="en-US" smtClean="0"/>
-              <a:t>7</a:t>
+              <a:t>8</a:t>
             </a:fld>
             <a:endParaRPr kumimoji="1" lang="ja-JP" altLang="en-US"/>
           </a:p>
@@ -1287,8 +1288,8 @@
               <a:t>‹#›</a:t>
             </a:fld>
             <a:r>
-              <a:rPr lang="en-US" altLang="ja-JP"/>
-              <a:t> / 99</a:t>
+              <a:rPr lang="en-US" altLang="ja-JP" dirty="0"/>
+              <a:t> / 10</a:t>
             </a:r>
             <a:endParaRPr lang="ja-JP" altLang="en-US" dirty="0"/>
           </a:p>
@@ -1624,7 +1625,7 @@
         </p:nvSpPr>
         <p:spPr>
           <a:xfrm>
-            <a:off x="493691" y="1120104"/>
+            <a:off x="400173" y="569386"/>
             <a:ext cx="11204618" cy="2387600"/>
           </a:xfrm>
           <a:prstGeom prst="rect">
@@ -1637,19 +1638,26 @@
           <a:p>
             <a:r>
               <a:rPr lang="ja-JP" altLang="en-US" dirty="0"/>
-              <a:t>神経細胞シミュレーションの</a:t>
+              <a:t>神経細胞の膜電位応答</a:t>
             </a:r>
             <a:br>
               <a:rPr lang="en-US" altLang="ja-JP" dirty="0"/>
             </a:br>
             <a:r>
               <a:rPr lang="ja-JP" altLang="en-US" dirty="0"/>
-              <a:t>計算コスト削減を目的とした</a:t>
+              <a:t>シミュレーションの</a:t>
             </a:r>
             <a:br>
               <a:rPr lang="en-US" altLang="ja-JP" dirty="0"/>
             </a:br>
             <a:r>
+              <a:rPr lang="ja-JP" altLang="en-US" dirty="0"/>
+              <a:t>計算コスト削減を目的とした</a:t>
+            </a:r>
+            <a:br>
+              <a:rPr lang="en-US" altLang="ja-JP" dirty="0"/>
+            </a:br>
+            <a:r>
               <a:rPr lang="en-US" altLang="ja-JP" dirty="0"/>
               <a:t>RNN</a:t>
             </a:r>
@@ -1665,90 +1673,968 @@
           </a:p>
         </p:txBody>
       </p:sp>
-      <p:pic>
-        <p:nvPicPr>
-          <p:cNvPr id="5" name="図 4">
-            <a:extLst>
-              <a:ext uri="{FF2B5EF4-FFF2-40B4-BE49-F238E27FC236}">
-                <a16:creationId xmlns:a16="http://schemas.microsoft.com/office/drawing/2014/main" id="{0272F10A-C7FC-10E0-0C2A-DAC0FE700451}"/>
-              </a:ext>
-            </a:extLst>
-          </p:cNvPr>
-          <p:cNvPicPr>
-            <a:picLocks noChangeAspect="1"/>
-          </p:cNvPicPr>
-          <p:nvPr/>
-        </p:nvPicPr>
-        <p:blipFill>
-          <a:blip r:embed="rId2"/>
-          <a:stretch>
-            <a:fillRect/>
-          </a:stretch>
-        </p:blipFill>
-        <p:spPr>
-          <a:xfrm>
-            <a:off x="7803632" y="2313904"/>
-            <a:ext cx="6084335" cy="6090432"/>
-          </a:xfrm>
-          <a:prstGeom prst="rect">
-            <a:avLst/>
-          </a:prstGeom>
-        </p:spPr>
-      </p:pic>
-      <p:pic>
-        <p:nvPicPr>
-          <p:cNvPr id="7" name="グラフィックス 6" descr="神経 枠線">
-            <a:extLst>
-              <a:ext uri="{FF2B5EF4-FFF2-40B4-BE49-F238E27FC236}">
-                <a16:creationId xmlns:a16="http://schemas.microsoft.com/office/drawing/2014/main" id="{3650482E-7EF2-D168-9E92-256B7A0FA454}"/>
-              </a:ext>
-            </a:extLst>
-          </p:cNvPr>
-          <p:cNvPicPr>
-            <a:picLocks noChangeAspect="1"/>
-          </p:cNvPicPr>
-          <p:nvPr/>
-        </p:nvPicPr>
-        <p:blipFill>
-          <a:blip>
-            <a:extLst>
-              <a:ext uri="{96DAC541-7B7A-43D3-8B79-37D633B846F1}">
-                <asvg:svgBlip xmlns:asvg="http://schemas.microsoft.com/office/drawing/2016/SVG/main" r:embed="rId3"/>
-              </a:ext>
-            </a:extLst>
-          </a:blip>
-          <a:stretch>
-            <a:fillRect/>
-          </a:stretch>
-        </p:blipFill>
-        <p:spPr>
-          <a:xfrm>
-            <a:off x="-888999" y="-988097"/>
-            <a:ext cx="3403600" cy="3403600"/>
-          </a:xfrm>
-          <a:prstGeom prst="rect">
-            <a:avLst/>
-          </a:prstGeom>
-          <a:effectLst>
-            <a:glow rad="127000">
-              <a:schemeClr val="bg1">
-                <a:alpha val="20000"/>
-              </a:schemeClr>
-            </a:glow>
-            <a:outerShdw blurRad="50800" dist="38100" dir="2700000" algn="tl" rotWithShape="0">
-              <a:schemeClr val="accent1">
-                <a:alpha val="40000"/>
-              </a:schemeClr>
-            </a:outerShdw>
-          </a:effectLst>
-        </p:spPr>
-      </p:pic>
     </p:spTree>
     <p:extLst>
       <p:ext uri="{BB962C8B-B14F-4D97-AF65-F5344CB8AC3E}">
         <p14:creationId xmlns:p14="http://schemas.microsoft.com/office/powerpoint/2010/main" val="1238017729"/>
       </p:ext>
     </p:extLst>
+  </p:cSld>
+  <p:clrMapOvr>
+    <a:masterClrMapping/>
+  </p:clrMapOvr>
+</p:sld>
+</file>
+
+<file path=ppt/slides/slide10.xml><?xml version="1.0" encoding="utf-8"?>
+<p:sld xmlns:a="http://schemas.openxmlformats.org/drawingml/2006/main" xmlns:r="http://schemas.openxmlformats.org/officeDocument/2006/relationships" xmlns:p="http://schemas.openxmlformats.org/presentationml/2006/main">
+  <p:cSld>
+    <p:spTree>
+      <p:nvGrpSpPr>
+        <p:cNvPr id="1" name=""/>
+        <p:cNvGrpSpPr/>
+        <p:nvPr/>
+      </p:nvGrpSpPr>
+      <p:grpSpPr>
+        <a:xfrm>
+          <a:off x="0" y="0"/>
+          <a:ext cx="0" cy="0"/>
+          <a:chOff x="0" y="0"/>
+          <a:chExt cx="0" cy="0"/>
+        </a:xfrm>
+      </p:grpSpPr>
+      <p:sp>
+        <p:nvSpPr>
+          <p:cNvPr id="2" name="Title 1"/>
+          <p:cNvSpPr>
+            <a:spLocks noGrp="1"/>
+          </p:cNvSpPr>
+          <p:nvPr>
+            <p:ph type="title"/>
+          </p:nvPr>
+        </p:nvSpPr>
+        <p:spPr/>
+        <p:txBody>
+          <a:bodyPr/>
+          <a:lstStyle/>
+          <a:p>
+            <a:r>
+              <a:rPr dirty="0" err="1"/>
+              <a:t>今後の予定</a:t>
+            </a:r>
+            <a:endParaRPr dirty="0"/>
+          </a:p>
+        </p:txBody>
+      </p:sp>
+      <p:sp>
+        <p:nvSpPr>
+          <p:cNvPr id="4" name="TextBox 3"/>
+          <p:cNvSpPr txBox="1"/>
+          <p:nvPr/>
+        </p:nvSpPr>
+        <p:spPr>
+          <a:xfrm>
+            <a:off x="685800" y="1143000"/>
+            <a:ext cx="5120640" cy="457200"/>
+          </a:xfrm>
+          <a:prstGeom prst="rect">
+            <a:avLst/>
+          </a:prstGeom>
+          <a:noFill/>
+        </p:spPr>
+        <p:txBody>
+          <a:bodyPr wrap="square" lIns="45720" rIns="45720" anchor="t">
+            <a:spAutoFit/>
+          </a:bodyPr>
+          <a:lstStyle/>
+          <a:p>
+            <a:pPr algn="l">
+              <a:spcAft>
+                <a:spcPts val="600"/>
+              </a:spcAft>
+            </a:pPr>
+            <a:r>
+              <a:rPr sz="2200" b="1">
+                <a:solidFill>
+                  <a:srgbClr val="156082"/>
+                </a:solidFill>
+                <a:latin typeface="+mn-ea"/>
+                <a:ea typeface="+mn-ea"/>
+              </a:rPr>
+              <a:t>スケジュール</a:t>
+            </a:r>
+          </a:p>
+        </p:txBody>
+      </p:sp>
+      <p:sp>
+        <p:nvSpPr>
+          <p:cNvPr id="5" name="Rounded Rectangle 4"/>
+          <p:cNvSpPr/>
+          <p:nvPr/>
+        </p:nvSpPr>
+        <p:spPr>
+          <a:xfrm>
+            <a:off x="731520" y="1828800"/>
+            <a:ext cx="1600200" cy="548640"/>
+          </a:xfrm>
+          <a:prstGeom prst="roundRect">
+            <a:avLst>
+              <a:gd name="adj" fmla="val 50000"/>
+            </a:avLst>
+          </a:prstGeom>
+          <a:solidFill>
+            <a:srgbClr val="156082"/>
+          </a:solidFill>
+          <a:ln w="19050">
+            <a:solidFill>
+              <a:srgbClr val="156082"/>
+            </a:solidFill>
+          </a:ln>
+          <a:effectLst/>
+        </p:spPr>
+        <p:style>
+          <a:lnRef idx="1">
+            <a:schemeClr val="accent1"/>
+          </a:lnRef>
+          <a:fillRef idx="3">
+            <a:schemeClr val="accent1"/>
+          </a:fillRef>
+          <a:effectRef idx="2">
+            <a:schemeClr val="accent1"/>
+          </a:effectRef>
+          <a:fontRef idx="minor">
+            <a:schemeClr val="lt1"/>
+          </a:fontRef>
+        </p:style>
+        <p:txBody>
+          <a:bodyPr lIns="18288" tIns="18288" rIns="18288" bIns="18288" rtlCol="0" anchor="ctr"/>
+          <a:lstStyle/>
+          <a:p>
+            <a:pPr algn="ctr"/>
+            <a:r>
+              <a:rPr lang="ja-JP" altLang="en-US" sz="1500" b="1" dirty="0">
+                <a:solidFill>
+                  <a:srgbClr val="FFFFFF"/>
+                </a:solidFill>
+                <a:latin typeface="+mn-ea"/>
+                <a:ea typeface="+mn-ea"/>
+              </a:rPr>
+              <a:t>～</a:t>
+            </a:r>
+            <a:r>
+              <a:rPr sz="1500" b="1" dirty="0">
+                <a:solidFill>
+                  <a:srgbClr val="FFFFFF"/>
+                </a:solidFill>
+                <a:latin typeface="+mn-ea"/>
+                <a:ea typeface="+mn-ea"/>
+              </a:rPr>
+              <a:t>10月</a:t>
+            </a:r>
+            <a:r>
+              <a:rPr lang="ja-JP" altLang="en-US" sz="1500" b="1" dirty="0">
+                <a:solidFill>
+                  <a:srgbClr val="FFFFFF"/>
+                </a:solidFill>
+                <a:latin typeface="+mn-ea"/>
+                <a:ea typeface="+mn-ea"/>
+              </a:rPr>
+              <a:t>下旬</a:t>
+            </a:r>
+            <a:endParaRPr sz="1500" b="1" dirty="0">
+              <a:solidFill>
+                <a:srgbClr val="FFFFFF"/>
+              </a:solidFill>
+              <a:latin typeface="+mn-ea"/>
+              <a:ea typeface="+mn-ea"/>
+            </a:endParaRPr>
+          </a:p>
+        </p:txBody>
+      </p:sp>
+      <p:sp>
+        <p:nvSpPr>
+          <p:cNvPr id="6" name="TextBox 5"/>
+          <p:cNvSpPr txBox="1"/>
+          <p:nvPr/>
+        </p:nvSpPr>
+        <p:spPr>
+          <a:xfrm>
+            <a:off x="2514600" y="1651829"/>
+            <a:ext cx="7190508" cy="1077218"/>
+          </a:xfrm>
+          <a:prstGeom prst="rect">
+            <a:avLst/>
+          </a:prstGeom>
+          <a:noFill/>
+        </p:spPr>
+        <p:txBody>
+          <a:bodyPr wrap="square" lIns="45720" rIns="45720" anchor="ctr">
+            <a:spAutoFit/>
+          </a:bodyPr>
+          <a:lstStyle/>
+          <a:p>
+            <a:pPr algn="l">
+              <a:spcAft>
+                <a:spcPts val="600"/>
+              </a:spcAft>
+            </a:pPr>
+            <a:r>
+              <a:rPr sz="1800" b="1" dirty="0">
+                <a:solidFill>
+                  <a:srgbClr val="1A1A1A"/>
+                </a:solidFill>
+                <a:latin typeface="+mn-ea"/>
+                <a:ea typeface="+mn-ea"/>
+              </a:rPr>
+              <a:t>HH </a:t>
+            </a:r>
+            <a:r>
+              <a:rPr lang="ja-JP" altLang="en-US" b="1" dirty="0">
+                <a:solidFill>
+                  <a:srgbClr val="1A1A1A"/>
+                </a:solidFill>
+                <a:latin typeface="+mn-ea"/>
+              </a:rPr>
+              <a:t>の教師データを生成</a:t>
+            </a:r>
+            <a:endParaRPr lang="en-US" altLang="ja-JP" b="1" dirty="0">
+              <a:solidFill>
+                <a:srgbClr val="1A1A1A"/>
+              </a:solidFill>
+              <a:latin typeface="+mn-ea"/>
+            </a:endParaRPr>
+          </a:p>
+          <a:p>
+            <a:pPr algn="l">
+              <a:spcAft>
+                <a:spcPts val="600"/>
+              </a:spcAft>
+            </a:pPr>
+            <a:r>
+              <a:rPr sz="1800" b="1" dirty="0">
+                <a:solidFill>
+                  <a:srgbClr val="1A1A1A"/>
+                </a:solidFill>
+                <a:latin typeface="+mn-ea"/>
+                <a:ea typeface="+mn-ea"/>
+              </a:rPr>
+              <a:t>RNN</a:t>
+            </a:r>
+            <a:r>
+              <a:rPr lang="ja-JP" altLang="en-US" sz="1800" b="1" dirty="0">
+                <a:solidFill>
+                  <a:srgbClr val="1A1A1A"/>
+                </a:solidFill>
+                <a:latin typeface="+mn-ea"/>
+                <a:ea typeface="+mn-ea"/>
+              </a:rPr>
+              <a:t>を使って</a:t>
+            </a:r>
+            <a:r>
+              <a:rPr sz="1800" b="1" dirty="0" err="1">
+                <a:solidFill>
+                  <a:srgbClr val="1A1A1A"/>
+                </a:solidFill>
+                <a:latin typeface="+mn-ea"/>
+                <a:ea typeface="+mn-ea"/>
+              </a:rPr>
+              <a:t>学習</a:t>
+            </a:r>
+            <a:r>
+              <a:rPr lang="ja-JP" altLang="en-US" sz="1800" b="1" dirty="0">
+                <a:solidFill>
+                  <a:srgbClr val="1A1A1A"/>
+                </a:solidFill>
+                <a:latin typeface="+mn-ea"/>
+                <a:ea typeface="+mn-ea"/>
+              </a:rPr>
+              <a:t>する　</a:t>
+            </a:r>
+            <a:r>
+              <a:rPr sz="1800" b="1" dirty="0" err="1">
+                <a:solidFill>
+                  <a:srgbClr val="1A1A1A"/>
+                </a:solidFill>
+                <a:latin typeface="+mn-ea"/>
+                <a:ea typeface="+mn-ea"/>
+              </a:rPr>
+              <a:t>評価</a:t>
+            </a:r>
+            <a:r>
+              <a:rPr lang="ja-JP" altLang="en-US" sz="1800" b="1" dirty="0">
+                <a:solidFill>
+                  <a:srgbClr val="1A1A1A"/>
+                </a:solidFill>
+                <a:latin typeface="+mn-ea"/>
+                <a:ea typeface="+mn-ea"/>
+              </a:rPr>
+              <a:t>方法を検討し評価　</a:t>
+            </a:r>
+            <a:r>
+              <a:rPr lang="en-US" altLang="ja-JP" sz="1800" b="1" dirty="0">
+                <a:solidFill>
+                  <a:srgbClr val="1A1A1A"/>
+                </a:solidFill>
+                <a:latin typeface="+mn-ea"/>
+                <a:ea typeface="+mn-ea"/>
+              </a:rPr>
+              <a:t>GPU</a:t>
+            </a:r>
+            <a:r>
+              <a:rPr lang="ja-JP" altLang="en-US" sz="1800" b="1" dirty="0">
+                <a:solidFill>
+                  <a:srgbClr val="1A1A1A"/>
+                </a:solidFill>
+                <a:latin typeface="+mn-ea"/>
+                <a:ea typeface="+mn-ea"/>
+              </a:rPr>
+              <a:t>並列化</a:t>
+            </a:r>
+            <a:endParaRPr lang="en-US" sz="1800" b="1" dirty="0">
+              <a:solidFill>
+                <a:srgbClr val="1A1A1A"/>
+              </a:solidFill>
+              <a:latin typeface="+mn-ea"/>
+              <a:ea typeface="+mn-ea"/>
+            </a:endParaRPr>
+          </a:p>
+          <a:p>
+            <a:pPr algn="l">
+              <a:spcAft>
+                <a:spcPts val="600"/>
+              </a:spcAft>
+            </a:pPr>
+            <a:r>
+              <a:rPr lang="ja-JP" altLang="en-US" sz="1800" b="1" dirty="0">
+                <a:solidFill>
+                  <a:srgbClr val="1A1A1A"/>
+                </a:solidFill>
+                <a:latin typeface="+mn-ea"/>
+                <a:ea typeface="+mn-ea"/>
+              </a:rPr>
+              <a:t>→各ゲート変数に対しても学習を行うことも視野に</a:t>
+            </a:r>
+            <a:endParaRPr sz="1800" b="1" dirty="0">
+              <a:solidFill>
+                <a:srgbClr val="1A1A1A"/>
+              </a:solidFill>
+              <a:latin typeface="+mn-ea"/>
+              <a:ea typeface="+mn-ea"/>
+            </a:endParaRPr>
+          </a:p>
+        </p:txBody>
+      </p:sp>
+      <p:cxnSp>
+        <p:nvCxnSpPr>
+          <p:cNvPr id="7" name="Connector 6"/>
+          <p:cNvCxnSpPr/>
+          <p:nvPr/>
+        </p:nvCxnSpPr>
+        <p:spPr>
+          <a:xfrm>
+            <a:off x="1531620" y="2377440"/>
+            <a:ext cx="0" cy="457200"/>
+          </a:xfrm>
+          <a:prstGeom prst="line">
+            <a:avLst/>
+          </a:prstGeom>
+          <a:ln w="19050">
+            <a:solidFill>
+              <a:srgbClr val="156082"/>
+            </a:solidFill>
+          </a:ln>
+        </p:spPr>
+        <p:style>
+          <a:lnRef idx="2">
+            <a:schemeClr val="accent1"/>
+          </a:lnRef>
+          <a:fillRef idx="0">
+            <a:schemeClr val="accent1"/>
+          </a:fillRef>
+          <a:effectRef idx="1">
+            <a:schemeClr val="accent1"/>
+          </a:effectRef>
+          <a:fontRef idx="minor">
+            <a:schemeClr val="tx1"/>
+          </a:fontRef>
+        </p:style>
+      </p:cxnSp>
+      <p:sp>
+        <p:nvSpPr>
+          <p:cNvPr id="8" name="Rounded Rectangle 7"/>
+          <p:cNvSpPr/>
+          <p:nvPr/>
+        </p:nvSpPr>
+        <p:spPr>
+          <a:xfrm>
+            <a:off x="731520" y="2834640"/>
+            <a:ext cx="1600200" cy="548640"/>
+          </a:xfrm>
+          <a:prstGeom prst="roundRect">
+            <a:avLst>
+              <a:gd name="adj" fmla="val 50000"/>
+            </a:avLst>
+          </a:prstGeom>
+          <a:solidFill>
+            <a:srgbClr val="FFFFFF"/>
+          </a:solidFill>
+          <a:ln w="19050">
+            <a:solidFill>
+              <a:srgbClr val="156082"/>
+            </a:solidFill>
+          </a:ln>
+          <a:effectLst/>
+        </p:spPr>
+        <p:style>
+          <a:lnRef idx="1">
+            <a:schemeClr val="accent1"/>
+          </a:lnRef>
+          <a:fillRef idx="3">
+            <a:schemeClr val="accent1"/>
+          </a:fillRef>
+          <a:effectRef idx="2">
+            <a:schemeClr val="accent1"/>
+          </a:effectRef>
+          <a:fontRef idx="minor">
+            <a:schemeClr val="lt1"/>
+          </a:fontRef>
+        </p:style>
+        <p:txBody>
+          <a:bodyPr lIns="18288" tIns="18288" rIns="18288" bIns="18288" rtlCol="0" anchor="ctr"/>
+          <a:lstStyle/>
+          <a:p>
+            <a:pPr algn="ctr"/>
+            <a:r>
+              <a:rPr sz="1500" b="1" dirty="0">
+                <a:solidFill>
+                  <a:srgbClr val="156082"/>
+                </a:solidFill>
+                <a:latin typeface="+mn-ea"/>
+                <a:ea typeface="+mn-ea"/>
+              </a:rPr>
+              <a:t>〜1</a:t>
+            </a:r>
+            <a:r>
+              <a:rPr lang="en-US" sz="1500" b="1" dirty="0">
+                <a:solidFill>
+                  <a:srgbClr val="156082"/>
+                </a:solidFill>
+                <a:latin typeface="+mn-ea"/>
+                <a:ea typeface="+mn-ea"/>
+              </a:rPr>
+              <a:t>1</a:t>
+            </a:r>
+            <a:r>
+              <a:rPr lang="ja-JP" altLang="en-US" sz="1500" b="1" dirty="0">
+                <a:solidFill>
+                  <a:srgbClr val="156082"/>
+                </a:solidFill>
+                <a:latin typeface="+mn-ea"/>
+                <a:ea typeface="+mn-ea"/>
+              </a:rPr>
+              <a:t>月</a:t>
+            </a:r>
+            <a:r>
+              <a:rPr lang="en-US" altLang="ja-JP" sz="1500" b="1" dirty="0">
+                <a:solidFill>
+                  <a:srgbClr val="156082"/>
+                </a:solidFill>
+                <a:latin typeface="+mn-ea"/>
+                <a:ea typeface="+mn-ea"/>
+              </a:rPr>
+              <a:t>15</a:t>
+            </a:r>
+            <a:r>
+              <a:rPr lang="ja-JP" altLang="en-US" sz="1500" b="1" dirty="0">
+                <a:solidFill>
+                  <a:srgbClr val="156082"/>
+                </a:solidFill>
+                <a:latin typeface="+mn-ea"/>
+                <a:ea typeface="+mn-ea"/>
+              </a:rPr>
+              <a:t>日</a:t>
+            </a:r>
+            <a:endParaRPr sz="1500" b="1" dirty="0">
+              <a:solidFill>
+                <a:srgbClr val="156082"/>
+              </a:solidFill>
+              <a:latin typeface="+mn-ea"/>
+              <a:ea typeface="+mn-ea"/>
+            </a:endParaRPr>
+          </a:p>
+        </p:txBody>
+      </p:sp>
+      <p:sp>
+        <p:nvSpPr>
+          <p:cNvPr id="9" name="TextBox 8"/>
+          <p:cNvSpPr txBox="1"/>
+          <p:nvPr/>
+        </p:nvSpPr>
+        <p:spPr>
+          <a:xfrm>
+            <a:off x="2514600" y="2924294"/>
+            <a:ext cx="3291840" cy="369332"/>
+          </a:xfrm>
+          <a:prstGeom prst="rect">
+            <a:avLst/>
+          </a:prstGeom>
+          <a:noFill/>
+        </p:spPr>
+        <p:txBody>
+          <a:bodyPr wrap="square" lIns="45720" rIns="45720" anchor="ctr">
+            <a:spAutoFit/>
+          </a:bodyPr>
+          <a:lstStyle/>
+          <a:p>
+            <a:pPr>
+              <a:spcAft>
+                <a:spcPts val="600"/>
+              </a:spcAft>
+            </a:pPr>
+            <a:r>
+              <a:rPr sz="1800" b="1" dirty="0">
+                <a:solidFill>
+                  <a:srgbClr val="1A1A1A"/>
+                </a:solidFill>
+                <a:latin typeface="+mn-ea"/>
+                <a:ea typeface="+mn-ea"/>
+              </a:rPr>
+              <a:t>MC </a:t>
+            </a:r>
+            <a:r>
+              <a:rPr sz="1800" b="1" dirty="0" err="1">
+                <a:solidFill>
+                  <a:srgbClr val="1A1A1A"/>
+                </a:solidFill>
+                <a:latin typeface="+mn-ea"/>
+                <a:ea typeface="+mn-ea"/>
+              </a:rPr>
+              <a:t>モデル</a:t>
+            </a:r>
+            <a:r>
+              <a:rPr lang="ja-JP" altLang="en-US" sz="1800" b="1" dirty="0">
+                <a:solidFill>
+                  <a:srgbClr val="1A1A1A"/>
+                </a:solidFill>
+                <a:latin typeface="+mn-ea"/>
+                <a:ea typeface="+mn-ea"/>
+              </a:rPr>
+              <a:t>（</a:t>
+            </a:r>
+            <a:r>
+              <a:rPr lang="ja-JP" altLang="ja-JP" b="1" dirty="0"/>
+              <a:t>Traub</a:t>
+            </a:r>
+            <a:r>
+              <a:rPr lang="ja-JP" altLang="en-US" sz="1800" b="1" dirty="0">
+                <a:solidFill>
+                  <a:srgbClr val="1A1A1A"/>
+                </a:solidFill>
+                <a:latin typeface="+mn-ea"/>
+                <a:ea typeface="+mn-ea"/>
+              </a:rPr>
+              <a:t>）</a:t>
+            </a:r>
+            <a:r>
+              <a:rPr sz="1800" b="1" dirty="0" err="1">
+                <a:solidFill>
+                  <a:srgbClr val="1A1A1A"/>
+                </a:solidFill>
+                <a:latin typeface="+mn-ea"/>
+                <a:ea typeface="+mn-ea"/>
+              </a:rPr>
+              <a:t>実装</a:t>
+            </a:r>
+            <a:endParaRPr sz="1800" b="1" dirty="0">
+              <a:solidFill>
+                <a:srgbClr val="1A1A1A"/>
+              </a:solidFill>
+              <a:latin typeface="+mn-ea"/>
+              <a:ea typeface="+mn-ea"/>
+            </a:endParaRPr>
+          </a:p>
+        </p:txBody>
+      </p:sp>
+      <p:cxnSp>
+        <p:nvCxnSpPr>
+          <p:cNvPr id="10" name="Connector 9"/>
+          <p:cNvCxnSpPr/>
+          <p:nvPr/>
+        </p:nvCxnSpPr>
+        <p:spPr>
+          <a:xfrm>
+            <a:off x="1531620" y="3383280"/>
+            <a:ext cx="0" cy="457200"/>
+          </a:xfrm>
+          <a:prstGeom prst="line">
+            <a:avLst/>
+          </a:prstGeom>
+          <a:ln w="19050">
+            <a:solidFill>
+              <a:srgbClr val="156082"/>
+            </a:solidFill>
+          </a:ln>
+        </p:spPr>
+        <p:style>
+          <a:lnRef idx="2">
+            <a:schemeClr val="accent1"/>
+          </a:lnRef>
+          <a:fillRef idx="0">
+            <a:schemeClr val="accent1"/>
+          </a:fillRef>
+          <a:effectRef idx="1">
+            <a:schemeClr val="accent1"/>
+          </a:effectRef>
+          <a:fontRef idx="minor">
+            <a:schemeClr val="tx1"/>
+          </a:fontRef>
+        </p:style>
+      </p:cxnSp>
+      <p:sp>
+        <p:nvSpPr>
+          <p:cNvPr id="11" name="Rounded Rectangle 10"/>
+          <p:cNvSpPr/>
+          <p:nvPr/>
+        </p:nvSpPr>
+        <p:spPr>
+          <a:xfrm>
+            <a:off x="731520" y="3840480"/>
+            <a:ext cx="1600200" cy="548640"/>
+          </a:xfrm>
+          <a:prstGeom prst="roundRect">
+            <a:avLst>
+              <a:gd name="adj" fmla="val 50000"/>
+            </a:avLst>
+          </a:prstGeom>
+          <a:solidFill>
+            <a:srgbClr val="FFFFFF"/>
+          </a:solidFill>
+          <a:ln w="19050">
+            <a:solidFill>
+              <a:srgbClr val="156082"/>
+            </a:solidFill>
+          </a:ln>
+          <a:effectLst/>
+        </p:spPr>
+        <p:style>
+          <a:lnRef idx="1">
+            <a:schemeClr val="accent1"/>
+          </a:lnRef>
+          <a:fillRef idx="3">
+            <a:schemeClr val="accent1"/>
+          </a:fillRef>
+          <a:effectRef idx="2">
+            <a:schemeClr val="accent1"/>
+          </a:effectRef>
+          <a:fontRef idx="minor">
+            <a:schemeClr val="lt1"/>
+          </a:fontRef>
+        </p:style>
+        <p:txBody>
+          <a:bodyPr lIns="18288" tIns="18288" rIns="18288" bIns="18288" rtlCol="0" anchor="ctr"/>
+          <a:lstStyle/>
+          <a:p>
+            <a:pPr algn="ctr"/>
+            <a:r>
+              <a:rPr sz="1500" b="1">
+                <a:solidFill>
+                  <a:srgbClr val="156082"/>
+                </a:solidFill>
+                <a:latin typeface="+mn-ea"/>
+                <a:ea typeface="+mn-ea"/>
+              </a:rPr>
+              <a:t>〜年末</a:t>
+            </a:r>
+          </a:p>
+        </p:txBody>
+      </p:sp>
+      <p:sp>
+        <p:nvSpPr>
+          <p:cNvPr id="12" name="TextBox 11"/>
+          <p:cNvSpPr txBox="1"/>
+          <p:nvPr/>
+        </p:nvSpPr>
+        <p:spPr>
+          <a:xfrm>
+            <a:off x="2514599" y="3791635"/>
+            <a:ext cx="4384964" cy="646331"/>
+          </a:xfrm>
+          <a:prstGeom prst="rect">
+            <a:avLst/>
+          </a:prstGeom>
+          <a:noFill/>
+        </p:spPr>
+        <p:txBody>
+          <a:bodyPr wrap="square" lIns="45720" rIns="45720" anchor="ctr">
+            <a:spAutoFit/>
+          </a:bodyPr>
+          <a:lstStyle/>
+          <a:p>
+            <a:pPr algn="l">
+              <a:spcAft>
+                <a:spcPts val="600"/>
+              </a:spcAft>
+            </a:pPr>
+            <a:r>
+              <a:rPr sz="1800" b="1" dirty="0">
+                <a:solidFill>
+                  <a:srgbClr val="1A1A1A"/>
+                </a:solidFill>
+                <a:latin typeface="+mn-ea"/>
+                <a:ea typeface="+mn-ea"/>
+              </a:rPr>
+              <a:t>MC</a:t>
+            </a:r>
+            <a:r>
+              <a:rPr lang="ja-JP" altLang="en-US" sz="1800" b="1" dirty="0">
+                <a:solidFill>
+                  <a:srgbClr val="1A1A1A"/>
+                </a:solidFill>
+                <a:latin typeface="+mn-ea"/>
+                <a:ea typeface="+mn-ea"/>
+              </a:rPr>
+              <a:t>モデル（</a:t>
+            </a:r>
+            <a:r>
+              <a:rPr lang="en-US" altLang="ja-JP" sz="1800" b="1" dirty="0">
+                <a:solidFill>
+                  <a:srgbClr val="1A1A1A"/>
+                </a:solidFill>
+                <a:latin typeface="+mn-ea"/>
+                <a:ea typeface="+mn-ea"/>
+              </a:rPr>
+              <a:t>Traub</a:t>
+            </a:r>
+            <a:r>
+              <a:rPr lang="ja-JP" altLang="en-US" sz="1800" b="1" dirty="0">
+                <a:solidFill>
+                  <a:srgbClr val="1A1A1A"/>
+                </a:solidFill>
+                <a:latin typeface="+mn-ea"/>
+                <a:ea typeface="+mn-ea"/>
+              </a:rPr>
+              <a:t>）</a:t>
+            </a:r>
+            <a:r>
+              <a:rPr sz="1800" b="1" dirty="0">
+                <a:solidFill>
+                  <a:srgbClr val="1A1A1A"/>
+                </a:solidFill>
+                <a:latin typeface="+mn-ea"/>
+                <a:ea typeface="+mn-ea"/>
+              </a:rPr>
+              <a:t> </a:t>
+            </a:r>
+            <a:r>
+              <a:rPr lang="ja-JP" altLang="en-US" sz="1800" b="1" dirty="0">
+                <a:solidFill>
+                  <a:srgbClr val="1A1A1A"/>
+                </a:solidFill>
+                <a:latin typeface="+mn-ea"/>
+                <a:ea typeface="+mn-ea"/>
+              </a:rPr>
+              <a:t>の教師データを生成</a:t>
+            </a:r>
+            <a:r>
+              <a:rPr sz="1800" b="1" dirty="0">
+                <a:solidFill>
+                  <a:srgbClr val="1A1A1A"/>
+                </a:solidFill>
+                <a:latin typeface="+mn-ea"/>
+                <a:ea typeface="+mn-ea"/>
+              </a:rPr>
+              <a:t>RNN</a:t>
+            </a:r>
+            <a:r>
+              <a:rPr lang="ja-JP" altLang="en-US" sz="1800" b="1" dirty="0">
+                <a:solidFill>
+                  <a:srgbClr val="1A1A1A"/>
+                </a:solidFill>
+                <a:latin typeface="+mn-ea"/>
+                <a:ea typeface="+mn-ea"/>
+              </a:rPr>
+              <a:t>を使って</a:t>
+            </a:r>
+            <a:r>
+              <a:rPr sz="1800" b="1" dirty="0" err="1">
+                <a:solidFill>
+                  <a:srgbClr val="1A1A1A"/>
+                </a:solidFill>
+                <a:latin typeface="+mn-ea"/>
+                <a:ea typeface="+mn-ea"/>
+              </a:rPr>
+              <a:t>学習・評価</a:t>
+            </a:r>
+            <a:endParaRPr sz="1800" b="1" dirty="0">
+              <a:solidFill>
+                <a:srgbClr val="1A1A1A"/>
+              </a:solidFill>
+              <a:latin typeface="+mn-ea"/>
+              <a:ea typeface="+mn-ea"/>
+            </a:endParaRPr>
+          </a:p>
+        </p:txBody>
+      </p:sp>
+      <p:cxnSp>
+        <p:nvCxnSpPr>
+          <p:cNvPr id="13" name="Connector 12"/>
+          <p:cNvCxnSpPr/>
+          <p:nvPr/>
+        </p:nvCxnSpPr>
+        <p:spPr>
+          <a:xfrm>
+            <a:off x="1531620" y="4389120"/>
+            <a:ext cx="0" cy="457200"/>
+          </a:xfrm>
+          <a:prstGeom prst="line">
+            <a:avLst/>
+          </a:prstGeom>
+          <a:ln w="19050">
+            <a:solidFill>
+              <a:srgbClr val="156082"/>
+            </a:solidFill>
+          </a:ln>
+        </p:spPr>
+        <p:style>
+          <a:lnRef idx="2">
+            <a:schemeClr val="accent1"/>
+          </a:lnRef>
+          <a:fillRef idx="0">
+            <a:schemeClr val="accent1"/>
+          </a:fillRef>
+          <a:effectRef idx="1">
+            <a:schemeClr val="accent1"/>
+          </a:effectRef>
+          <a:fontRef idx="minor">
+            <a:schemeClr val="tx1"/>
+          </a:fontRef>
+        </p:style>
+      </p:cxnSp>
+      <p:sp>
+        <p:nvSpPr>
+          <p:cNvPr id="14" name="Rounded Rectangle 13"/>
+          <p:cNvSpPr/>
+          <p:nvPr/>
+        </p:nvSpPr>
+        <p:spPr>
+          <a:xfrm>
+            <a:off x="731520" y="4846320"/>
+            <a:ext cx="1600200" cy="548640"/>
+          </a:xfrm>
+          <a:prstGeom prst="roundRect">
+            <a:avLst>
+              <a:gd name="adj" fmla="val 50000"/>
+            </a:avLst>
+          </a:prstGeom>
+          <a:solidFill>
+            <a:srgbClr val="FFFFFF"/>
+          </a:solidFill>
+          <a:ln w="19050">
+            <a:solidFill>
+              <a:srgbClr val="156082"/>
+            </a:solidFill>
+          </a:ln>
+          <a:effectLst/>
+        </p:spPr>
+        <p:style>
+          <a:lnRef idx="1">
+            <a:schemeClr val="accent1"/>
+          </a:lnRef>
+          <a:fillRef idx="3">
+            <a:schemeClr val="accent1"/>
+          </a:fillRef>
+          <a:effectRef idx="2">
+            <a:schemeClr val="accent1"/>
+          </a:effectRef>
+          <a:fontRef idx="minor">
+            <a:schemeClr val="lt1"/>
+          </a:fontRef>
+        </p:style>
+        <p:txBody>
+          <a:bodyPr lIns="18288" tIns="18288" rIns="18288" bIns="18288" rtlCol="0" anchor="ctr"/>
+          <a:lstStyle/>
+          <a:p>
+            <a:pPr algn="ctr"/>
+            <a:r>
+              <a:rPr sz="1500" b="1" dirty="0">
+                <a:solidFill>
+                  <a:srgbClr val="156082"/>
+                </a:solidFill>
+                <a:latin typeface="+mn-ea"/>
+                <a:ea typeface="+mn-ea"/>
+              </a:rPr>
+              <a:t>〜2027年</a:t>
+            </a:r>
+            <a:r>
+              <a:rPr lang="en-US" sz="1500" b="1" dirty="0">
+                <a:solidFill>
+                  <a:srgbClr val="156082"/>
+                </a:solidFill>
+                <a:latin typeface="+mn-ea"/>
+              </a:rPr>
+              <a:t>2</a:t>
+            </a:r>
+            <a:r>
+              <a:rPr sz="1500" b="1" dirty="0">
+                <a:solidFill>
+                  <a:srgbClr val="156082"/>
+                </a:solidFill>
+                <a:latin typeface="+mn-ea"/>
+                <a:ea typeface="+mn-ea"/>
+              </a:rPr>
+              <a:t>月</a:t>
+            </a:r>
+          </a:p>
+        </p:txBody>
+      </p:sp>
+      <p:sp>
+        <p:nvSpPr>
+          <p:cNvPr id="15" name="TextBox 14"/>
+          <p:cNvSpPr txBox="1"/>
+          <p:nvPr/>
+        </p:nvSpPr>
+        <p:spPr>
+          <a:xfrm>
+            <a:off x="2514600" y="4935974"/>
+            <a:ext cx="3291840" cy="369332"/>
+          </a:xfrm>
+          <a:prstGeom prst="rect">
+            <a:avLst/>
+          </a:prstGeom>
+          <a:noFill/>
+        </p:spPr>
+        <p:txBody>
+          <a:bodyPr wrap="square" lIns="45720" rIns="45720" anchor="ctr">
+            <a:spAutoFit/>
+          </a:bodyPr>
+          <a:lstStyle/>
+          <a:p>
+            <a:pPr algn="l">
+              <a:spcAft>
+                <a:spcPts val="600"/>
+              </a:spcAft>
+            </a:pPr>
+            <a:r>
+              <a:rPr sz="1800" b="1" dirty="0" err="1">
+                <a:solidFill>
+                  <a:srgbClr val="1A1A1A"/>
+                </a:solidFill>
+                <a:latin typeface="+mn-ea"/>
+                <a:ea typeface="+mn-ea"/>
+              </a:rPr>
+              <a:t>卒論執筆</a:t>
+            </a:r>
+            <a:endParaRPr sz="1800" b="1" dirty="0">
+              <a:solidFill>
+                <a:srgbClr val="1A1A1A"/>
+              </a:solidFill>
+              <a:latin typeface="+mn-ea"/>
+              <a:ea typeface="+mn-ea"/>
+            </a:endParaRPr>
+          </a:p>
+        </p:txBody>
+      </p:sp>
+    </p:spTree>
   </p:cSld>
   <p:clrMapOvr>
     <a:masterClrMapping/>
@@ -1801,44 +2687,8 @@
           </a:p>
         </p:txBody>
       </p:sp>
-      <p:pic>
-        <p:nvPicPr>
-          <p:cNvPr id="5" name="コンテンツ プレースホルダー 4" descr="脳 枠線">
-            <a:extLst>
-              <a:ext uri="{FF2B5EF4-FFF2-40B4-BE49-F238E27FC236}">
-                <a16:creationId xmlns:a16="http://schemas.microsoft.com/office/drawing/2014/main" id="{8712E5BA-B28B-B08D-859B-D80B16E9AE19}"/>
-              </a:ext>
-            </a:extLst>
-          </p:cNvPr>
-          <p:cNvPicPr>
-            <a:picLocks noGrp="1" noChangeAspect="1"/>
-          </p:cNvPicPr>
-          <p:nvPr>
-            <p:ph sz="quarter" idx="10"/>
-          </p:nvPr>
-        </p:nvPicPr>
-        <p:blipFill>
-          <a:blip>
-            <a:alphaModFix amt="20000"/>
-            <a:extLst>
-              <a:ext uri="{96DAC541-7B7A-43D3-8B79-37D633B846F1}">
-                <asvg:svgBlip xmlns:asvg="http://schemas.microsoft.com/office/drawing/2016/SVG/main" r:embed="rId3"/>
-              </a:ext>
-            </a:extLst>
-          </a:blip>
-          <a:stretch>
-            <a:fillRect/>
-          </a:stretch>
-        </p:blipFill>
-        <p:spPr>
-          <a:xfrm>
-            <a:off x="6641615" y="466867"/>
-            <a:ext cx="6089426" cy="6089426"/>
-          </a:xfrm>
-        </p:spPr>
-      </p:pic>
-      <mc:AlternateContent xmlns:mc="http://schemas.openxmlformats.org/markup-compatibility/2006" xmlns:a14="http://schemas.microsoft.com/office/drawing/2010/main">
-        <mc:Choice Requires="a14">
+      <mc:AlternateContent xmlns:mc="http://schemas.openxmlformats.org/markup-compatibility/2006">
+        <mc:Choice xmlns:a14="http://schemas.microsoft.com/office/drawing/2010/main" Requires="a14">
           <p:sp>
             <p:nvSpPr>
               <p:cNvPr id="10" name="テキスト ボックス 9">
@@ -1854,7 +2704,7 @@
             <p:spPr>
               <a:xfrm>
                 <a:off x="218806" y="1262130"/>
-                <a:ext cx="9547101" cy="2307683"/>
+                <a:ext cx="11165236" cy="2307683"/>
               </a:xfrm>
               <a:prstGeom prst="rect">
                 <a:avLst/>
@@ -1977,7 +2827,7 @@
                 </a:r>
                 <a:r>
                   <a:rPr lang="ja-JP" altLang="en-US" sz="2800" b="1" dirty="0"/>
-                  <a:t>細胞間は電気信号によって情報を伝達</a:t>
+                  <a:t>各細胞は入力電流に対して膜電位応答 → 隣の細胞に情報を伝達</a:t>
                 </a:r>
                 <a:endParaRPr lang="en-US" altLang="ja-JP" sz="2800" b="1" dirty="0"/>
               </a:p>
@@ -1990,7 +2840,7 @@
             </p:txBody>
           </p:sp>
         </mc:Choice>
-        <mc:Fallback xmlns="">
+        <mc:Fallback>
           <p:sp>
             <p:nvSpPr>
               <p:cNvPr id="10" name="テキスト ボックス 9">
@@ -2008,15 +2858,15 @@
             <p:spPr>
               <a:xfrm>
                 <a:off x="218806" y="1262130"/>
-                <a:ext cx="9547101" cy="2307683"/>
+                <a:ext cx="11165236" cy="2307683"/>
               </a:xfrm>
               <a:prstGeom prst="rect">
                 <a:avLst/>
               </a:prstGeom>
               <a:blipFill>
-                <a:blip r:embed="rId4"/>
+                <a:blip r:embed="rId3"/>
                 <a:stretch>
-                  <a:fillRect l="-2299" t="-4222"/>
+                  <a:fillRect l="-1966" t="-4222"/>
                 </a:stretch>
               </a:blipFill>
             </p:spPr>
@@ -2053,7 +2903,7 @@
           <a:blip>
             <a:extLst>
               <a:ext uri="{96DAC541-7B7A-43D3-8B79-37D633B846F1}">
-                <asvg:svgBlip xmlns:asvg="http://schemas.microsoft.com/office/drawing/2016/SVG/main" r:embed="rId5"/>
+                <asvg:svgBlip xmlns:asvg="http://schemas.microsoft.com/office/drawing/2016/SVG/main" r:embed="rId4"/>
               </a:ext>
             </a:extLst>
           </a:blip>
@@ -2063,7 +2913,7 @@
         </p:blipFill>
         <p:spPr>
           <a:xfrm>
-            <a:off x="0" y="3484175"/>
+            <a:off x="0" y="3870060"/>
             <a:ext cx="2748195" cy="2748195"/>
           </a:xfrm>
           <a:prstGeom prst="rect">
@@ -2097,7 +2947,7 @@
         </p:nvSpPr>
         <p:spPr>
           <a:xfrm>
-            <a:off x="2749348" y="4519461"/>
+            <a:off x="2749348" y="4905346"/>
             <a:ext cx="3028828" cy="698712"/>
           </a:xfrm>
           <a:prstGeom prst="rightArrow">
@@ -2146,8 +2996,8 @@
         </p:nvSpPr>
         <p:spPr>
           <a:xfrm>
-            <a:off x="2857982" y="3996241"/>
-            <a:ext cx="2095018" cy="523220"/>
+            <a:off x="2817509" y="4518669"/>
+            <a:ext cx="2359548" cy="523220"/>
           </a:xfrm>
           <a:prstGeom prst="rect">
             <a:avLst/>
@@ -2161,10 +3011,9 @@
           <a:lstStyle/>
           <a:p>
             <a:r>
-              <a:rPr lang="ja-JP" altLang="en-US" sz="2800" b="1" dirty="0"/>
-              <a:t>イオン電流</a:t>
-            </a:r>
-            <a:endParaRPr kumimoji="1" lang="ja-JP" altLang="en-US" sz="2800" b="1" dirty="0"/>
+              <a:rPr kumimoji="1" lang="ja-JP" altLang="en-US" sz="2800" b="1" dirty="0"/>
+              <a:t>神経伝達物質</a:t>
+            </a:r>
           </a:p>
         </p:txBody>
       </p:sp>
@@ -2174,91 +3023,6 @@
             <a:extLst>
               <a:ext uri="{FF2B5EF4-FFF2-40B4-BE49-F238E27FC236}">
                 <a16:creationId xmlns:a16="http://schemas.microsoft.com/office/drawing/2014/main" id="{CE31F6DF-A40D-5A85-72BA-A150BF22E1BA}"/>
-              </a:ext>
-            </a:extLst>
-          </p:cNvPr>
-          <p:cNvPicPr>
-            <a:picLocks noChangeAspect="1"/>
-          </p:cNvPicPr>
-          <p:nvPr/>
-        </p:nvPicPr>
-        <p:blipFill>
-          <a:blip>
-            <a:extLst>
-              <a:ext uri="{96DAC541-7B7A-43D3-8B79-37D633B846F1}">
-                <asvg:svgBlip xmlns:asvg="http://schemas.microsoft.com/office/drawing/2016/SVG/main" r:embed="rId6"/>
-              </a:ext>
-            </a:extLst>
-          </a:blip>
-          <a:stretch>
-            <a:fillRect/>
-          </a:stretch>
-        </p:blipFill>
-        <p:spPr>
-          <a:xfrm>
-            <a:off x="4680193" y="3712775"/>
-            <a:ext cx="914400" cy="914400"/>
-          </a:xfrm>
-          <a:prstGeom prst="rect">
-            <a:avLst/>
-          </a:prstGeom>
-        </p:spPr>
-      </p:pic>
-      <p:sp>
-        <p:nvSpPr>
-          <p:cNvPr id="21" name="矢印: 右 20">
-            <a:extLst>
-              <a:ext uri="{FF2B5EF4-FFF2-40B4-BE49-F238E27FC236}">
-                <a16:creationId xmlns:a16="http://schemas.microsoft.com/office/drawing/2014/main" id="{DC6E4A7B-C487-B2C5-3581-92439197279B}"/>
-              </a:ext>
-            </a:extLst>
-          </p:cNvPr>
-          <p:cNvSpPr/>
-          <p:nvPr/>
-        </p:nvSpPr>
-        <p:spPr>
-          <a:xfrm>
-            <a:off x="8246358" y="4508916"/>
-            <a:ext cx="3028828" cy="698712"/>
-          </a:xfrm>
-          <a:prstGeom prst="rightArrow">
-            <a:avLst>
-              <a:gd name="adj1" fmla="val 24688"/>
-              <a:gd name="adj2" fmla="val 76436"/>
-            </a:avLst>
-          </a:prstGeom>
-        </p:spPr>
-        <p:style>
-          <a:lnRef idx="2">
-            <a:schemeClr val="accent1">
-              <a:shade val="15000"/>
-            </a:schemeClr>
-          </a:lnRef>
-          <a:fillRef idx="1">
-            <a:schemeClr val="accent1"/>
-          </a:fillRef>
-          <a:effectRef idx="0">
-            <a:schemeClr val="accent1"/>
-          </a:effectRef>
-          <a:fontRef idx="minor">
-            <a:schemeClr val="lt1"/>
-          </a:fontRef>
-        </p:style>
-        <p:txBody>
-          <a:bodyPr rtlCol="0" anchor="ctr"/>
-          <a:lstStyle/>
-          <a:p>
-            <a:pPr algn="ctr"/>
-            <a:endParaRPr kumimoji="1" lang="ja-JP" altLang="en-US"/>
-          </a:p>
-        </p:txBody>
-      </p:sp>
-      <p:pic>
-        <p:nvPicPr>
-          <p:cNvPr id="23" name="グラフィックス 22" descr="神経 枠線">
-            <a:extLst>
-              <a:ext uri="{FF2B5EF4-FFF2-40B4-BE49-F238E27FC236}">
-                <a16:creationId xmlns:a16="http://schemas.microsoft.com/office/drawing/2014/main" id="{769A8EFA-E59A-DABC-B57A-11D7CF6159B1}"/>
               </a:ext>
             </a:extLst>
           </p:cNvPr>
@@ -2281,7 +3045,92 @@
         </p:blipFill>
         <p:spPr>
           <a:xfrm>
-            <a:off x="5401113" y="3603868"/>
+            <a:off x="5860810" y="3262737"/>
+            <a:ext cx="914400" cy="914400"/>
+          </a:xfrm>
+          <a:prstGeom prst="rect">
+            <a:avLst/>
+          </a:prstGeom>
+        </p:spPr>
+      </p:pic>
+      <p:sp>
+        <p:nvSpPr>
+          <p:cNvPr id="21" name="矢印: 右 20">
+            <a:extLst>
+              <a:ext uri="{FF2B5EF4-FFF2-40B4-BE49-F238E27FC236}">
+                <a16:creationId xmlns:a16="http://schemas.microsoft.com/office/drawing/2014/main" id="{DC6E4A7B-C487-B2C5-3581-92439197279B}"/>
+              </a:ext>
+            </a:extLst>
+          </p:cNvPr>
+          <p:cNvSpPr/>
+          <p:nvPr/>
+        </p:nvSpPr>
+        <p:spPr>
+          <a:xfrm>
+            <a:off x="8246358" y="4894801"/>
+            <a:ext cx="3028828" cy="698712"/>
+          </a:xfrm>
+          <a:prstGeom prst="rightArrow">
+            <a:avLst>
+              <a:gd name="adj1" fmla="val 24688"/>
+              <a:gd name="adj2" fmla="val 76436"/>
+            </a:avLst>
+          </a:prstGeom>
+        </p:spPr>
+        <p:style>
+          <a:lnRef idx="2">
+            <a:schemeClr val="accent1">
+              <a:shade val="15000"/>
+            </a:schemeClr>
+          </a:lnRef>
+          <a:fillRef idx="1">
+            <a:schemeClr val="accent1"/>
+          </a:fillRef>
+          <a:effectRef idx="0">
+            <a:schemeClr val="accent1"/>
+          </a:effectRef>
+          <a:fontRef idx="minor">
+            <a:schemeClr val="lt1"/>
+          </a:fontRef>
+        </p:style>
+        <p:txBody>
+          <a:bodyPr rtlCol="0" anchor="ctr"/>
+          <a:lstStyle/>
+          <a:p>
+            <a:pPr algn="ctr"/>
+            <a:endParaRPr kumimoji="1" lang="ja-JP" altLang="en-US"/>
+          </a:p>
+        </p:txBody>
+      </p:sp>
+      <p:pic>
+        <p:nvPicPr>
+          <p:cNvPr id="23" name="グラフィックス 22" descr="神経 枠線">
+            <a:extLst>
+              <a:ext uri="{FF2B5EF4-FFF2-40B4-BE49-F238E27FC236}">
+                <a16:creationId xmlns:a16="http://schemas.microsoft.com/office/drawing/2014/main" id="{769A8EFA-E59A-DABC-B57A-11D7CF6159B1}"/>
+              </a:ext>
+            </a:extLst>
+          </p:cNvPr>
+          <p:cNvPicPr>
+            <a:picLocks noChangeAspect="1"/>
+          </p:cNvPicPr>
+          <p:nvPr/>
+        </p:nvPicPr>
+        <p:blipFill>
+          <a:blip>
+            <a:extLst>
+              <a:ext uri="{96DAC541-7B7A-43D3-8B79-37D633B846F1}">
+                <asvg:svgBlip xmlns:asvg="http://schemas.microsoft.com/office/drawing/2016/SVG/main" r:embed="rId4"/>
+              </a:ext>
+            </a:extLst>
+          </a:blip>
+          <a:stretch>
+            <a:fillRect/>
+          </a:stretch>
+        </p:blipFill>
+        <p:spPr>
+          <a:xfrm>
+            <a:off x="5401113" y="3989753"/>
             <a:ext cx="2748195" cy="2748195"/>
           </a:xfrm>
           <a:prstGeom prst="rect">
@@ -2315,7 +3164,7 @@
         </p:nvSpPr>
         <p:spPr>
           <a:xfrm>
-            <a:off x="8597421" y="3996241"/>
+            <a:off x="8597421" y="4382126"/>
             <a:ext cx="2095018" cy="523220"/>
           </a:xfrm>
           <a:prstGeom prst="rect">
@@ -2334,6 +3183,41 @@
               <a:t>次の細胞へ</a:t>
             </a:r>
             <a:endParaRPr kumimoji="1" lang="ja-JP" altLang="en-US" sz="2800" b="1" dirty="0"/>
+          </a:p>
+        </p:txBody>
+      </p:sp>
+      <p:sp>
+        <p:nvSpPr>
+          <p:cNvPr id="7" name="テキスト ボックス 6">
+            <a:extLst>
+              <a:ext uri="{FF2B5EF4-FFF2-40B4-BE49-F238E27FC236}">
+                <a16:creationId xmlns:a16="http://schemas.microsoft.com/office/drawing/2014/main" id="{24A1E6FD-E313-4CD4-0169-068EC7323596}"/>
+              </a:ext>
+            </a:extLst>
+          </p:cNvPr>
+          <p:cNvSpPr txBox="1"/>
+          <p:nvPr/>
+        </p:nvSpPr>
+        <p:spPr>
+          <a:xfrm>
+            <a:off x="6591109" y="3366383"/>
+            <a:ext cx="2359548" cy="523220"/>
+          </a:xfrm>
+          <a:prstGeom prst="rect">
+            <a:avLst/>
+          </a:prstGeom>
+          <a:noFill/>
+        </p:spPr>
+        <p:txBody>
+          <a:bodyPr wrap="square" rtlCol="0">
+            <a:spAutoFit/>
+          </a:bodyPr>
+          <a:lstStyle/>
+          <a:p>
+            <a:r>
+              <a:rPr kumimoji="1" lang="ja-JP" altLang="en-US" sz="2800" b="1" dirty="0"/>
+              <a:t>電気刺激</a:t>
+            </a:r>
           </a:p>
         </p:txBody>
       </p:sp>
@@ -2712,6 +3596,420 @@
 </file>
 
 <file path=ppt/slides/slide4.xml><?xml version="1.0" encoding="utf-8"?>
+<p:sld xmlns:a="http://schemas.openxmlformats.org/drawingml/2006/main" xmlns:r="http://schemas.openxmlformats.org/officeDocument/2006/relationships" xmlns:p="http://schemas.openxmlformats.org/presentationml/2006/main">
+  <p:cSld>
+    <p:spTree>
+      <p:nvGrpSpPr>
+        <p:cNvPr id="1" name=""/>
+        <p:cNvGrpSpPr/>
+        <p:nvPr/>
+      </p:nvGrpSpPr>
+      <p:grpSpPr>
+        <a:xfrm>
+          <a:off x="0" y="0"/>
+          <a:ext cx="0" cy="0"/>
+          <a:chOff x="0" y="0"/>
+          <a:chExt cx="0" cy="0"/>
+        </a:xfrm>
+      </p:grpSpPr>
+      <p:sp>
+        <p:nvSpPr>
+          <p:cNvPr id="2" name="タイトル 1">
+            <a:extLst>
+              <a:ext uri="{FF2B5EF4-FFF2-40B4-BE49-F238E27FC236}">
+                <a16:creationId xmlns:a16="http://schemas.microsoft.com/office/drawing/2014/main" id="{A50737B2-F508-9467-631A-304CAEFE21B3}"/>
+              </a:ext>
+            </a:extLst>
+          </p:cNvPr>
+          <p:cNvSpPr>
+            <a:spLocks noGrp="1"/>
+          </p:cNvSpPr>
+          <p:nvPr>
+            <p:ph type="title"/>
+          </p:nvPr>
+        </p:nvSpPr>
+        <p:spPr/>
+        <p:txBody>
+          <a:bodyPr/>
+          <a:lstStyle/>
+          <a:p>
+            <a:r>
+              <a:rPr kumimoji="1" lang="ja-JP" altLang="en-US" dirty="0"/>
+              <a:t>例：</a:t>
+            </a:r>
+            <a:r>
+              <a:rPr kumimoji="1" lang="en-US" altLang="ja-JP" dirty="0"/>
+              <a:t>Hodgkin-Huxley</a:t>
+            </a:r>
+            <a:r>
+              <a:rPr kumimoji="1" lang="ja-JP" altLang="en-US" dirty="0"/>
+              <a:t>モデル</a:t>
+            </a:r>
+          </a:p>
+        </p:txBody>
+      </p:sp>
+      <p:sp>
+        <p:nvSpPr>
+          <p:cNvPr id="3" name="Rounded Rectangle 2"/>
+          <p:cNvSpPr/>
+          <p:nvPr/>
+        </p:nvSpPr>
+        <p:spPr>
+          <a:xfrm>
+            <a:off x="457200" y="914400"/>
+            <a:ext cx="11274552" cy="5074920"/>
+          </a:xfrm>
+          <a:prstGeom prst="roundRect">
+            <a:avLst>
+              <a:gd name="adj" fmla="val 4000"/>
+            </a:avLst>
+          </a:prstGeom>
+          <a:solidFill>
+            <a:srgbClr val="F0F9FF"/>
+          </a:solidFill>
+          <a:ln w="19050">
+            <a:solidFill>
+              <a:srgbClr val="156082"/>
+            </a:solidFill>
+          </a:ln>
+          <a:effectLst/>
+        </p:spPr>
+        <p:style>
+          <a:lnRef idx="1">
+            <a:schemeClr val="accent1"/>
+          </a:lnRef>
+          <a:fillRef idx="3">
+            <a:schemeClr val="accent1"/>
+          </a:fillRef>
+          <a:effectRef idx="2">
+            <a:schemeClr val="accent1"/>
+          </a:effectRef>
+          <a:fontRef idx="minor">
+            <a:schemeClr val="lt1"/>
+          </a:fontRef>
+        </p:style>
+        <p:txBody>
+          <a:bodyPr rtlCol="0" anchor="ctr"/>
+          <a:lstStyle/>
+          <a:p>
+            <a:pPr algn="ctr"/>
+            <a:endParaRPr/>
+          </a:p>
+        </p:txBody>
+      </p:sp>
+      <p:pic>
+        <p:nvPicPr>
+          <p:cNvPr id="4" name="Picture 3" descr="image.png"/>
+          <p:cNvPicPr>
+            <a:picLocks noChangeAspect="1"/>
+          </p:cNvPicPr>
+          <p:nvPr/>
+        </p:nvPicPr>
+        <p:blipFill>
+          <a:blip r:embed="rId2"/>
+          <a:stretch>
+            <a:fillRect/>
+          </a:stretch>
+        </p:blipFill>
+        <p:spPr>
+          <a:xfrm>
+            <a:off x="777240" y="1061862"/>
+            <a:ext cx="9170212" cy="710915"/>
+          </a:xfrm>
+          <a:prstGeom prst="rect">
+            <a:avLst/>
+          </a:prstGeom>
+        </p:spPr>
+      </p:pic>
+      <p:pic>
+        <p:nvPicPr>
+          <p:cNvPr id="5" name="Picture 4" descr="hh3_dm.png"/>
+          <p:cNvPicPr>
+            <a:picLocks noChangeAspect="1"/>
+          </p:cNvPicPr>
+          <p:nvPr/>
+        </p:nvPicPr>
+        <p:blipFill>
+          <a:blip r:embed="rId3"/>
+          <a:stretch>
+            <a:fillRect/>
+          </a:stretch>
+        </p:blipFill>
+        <p:spPr>
+          <a:xfrm>
+            <a:off x="777240" y="2122871"/>
+            <a:ext cx="3057022" cy="509137"/>
+          </a:xfrm>
+          <a:prstGeom prst="rect">
+            <a:avLst/>
+          </a:prstGeom>
+        </p:spPr>
+      </p:pic>
+      <p:pic>
+        <p:nvPicPr>
+          <p:cNvPr id="6" name="Picture 5" descr="hh3_dh.png"/>
+          <p:cNvPicPr>
+            <a:picLocks noChangeAspect="1"/>
+          </p:cNvPicPr>
+          <p:nvPr/>
+        </p:nvPicPr>
+        <p:blipFill>
+          <a:blip r:embed="rId4"/>
+          <a:stretch>
+            <a:fillRect/>
+          </a:stretch>
+        </p:blipFill>
+        <p:spPr>
+          <a:xfrm>
+            <a:off x="4434840" y="2122871"/>
+            <a:ext cx="2765145" cy="509137"/>
+          </a:xfrm>
+          <a:prstGeom prst="rect">
+            <a:avLst/>
+          </a:prstGeom>
+        </p:spPr>
+      </p:pic>
+      <p:pic>
+        <p:nvPicPr>
+          <p:cNvPr id="7" name="Picture 6" descr="hh3_dn.png"/>
+          <p:cNvPicPr>
+            <a:picLocks noChangeAspect="1"/>
+          </p:cNvPicPr>
+          <p:nvPr/>
+        </p:nvPicPr>
+        <p:blipFill>
+          <a:blip r:embed="rId5"/>
+          <a:stretch>
+            <a:fillRect/>
+          </a:stretch>
+        </p:blipFill>
+        <p:spPr>
+          <a:xfrm>
+            <a:off x="8092440" y="2122871"/>
+            <a:ext cx="2789285" cy="509137"/>
+          </a:xfrm>
+          <a:prstGeom prst="rect">
+            <a:avLst/>
+          </a:prstGeom>
+        </p:spPr>
+      </p:pic>
+      <p:cxnSp>
+        <p:nvCxnSpPr>
+          <p:cNvPr id="8" name="Connector 7"/>
+          <p:cNvCxnSpPr/>
+          <p:nvPr/>
+        </p:nvCxnSpPr>
+        <p:spPr>
+          <a:xfrm>
+            <a:off x="777240" y="2926080"/>
+            <a:ext cx="10652760" cy="0"/>
+          </a:xfrm>
+          <a:prstGeom prst="line">
+            <a:avLst/>
+          </a:prstGeom>
+          <a:ln w="9525">
+            <a:solidFill>
+              <a:srgbClr val="BFBFBF"/>
+            </a:solidFill>
+          </a:ln>
+        </p:spPr>
+        <p:style>
+          <a:lnRef idx="2">
+            <a:schemeClr val="accent1"/>
+          </a:lnRef>
+          <a:fillRef idx="0">
+            <a:schemeClr val="accent1"/>
+          </a:fillRef>
+          <a:effectRef idx="1">
+            <a:schemeClr val="accent1"/>
+          </a:effectRef>
+          <a:fontRef idx="minor">
+            <a:schemeClr val="tx1"/>
+          </a:fontRef>
+        </p:style>
+      </p:cxnSp>
+      <p:pic>
+        <p:nvPicPr>
+          <p:cNvPr id="9" name="Picture 8" descr="hh2_am.png"/>
+          <p:cNvPicPr>
+            <a:picLocks noChangeAspect="1"/>
+          </p:cNvPicPr>
+          <p:nvPr/>
+        </p:nvPicPr>
+        <p:blipFill>
+          <a:blip r:embed="rId6"/>
+          <a:stretch>
+            <a:fillRect/>
+          </a:stretch>
+        </p:blipFill>
+        <p:spPr>
+          <a:xfrm>
+            <a:off x="777240" y="3116366"/>
+            <a:ext cx="2196754" cy="625266"/>
+          </a:xfrm>
+          <a:prstGeom prst="rect">
+            <a:avLst/>
+          </a:prstGeom>
+        </p:spPr>
+      </p:pic>
+      <p:pic>
+        <p:nvPicPr>
+          <p:cNvPr id="10" name="Picture 9" descr="hh2_bm.png"/>
+          <p:cNvPicPr>
+            <a:picLocks noChangeAspect="1"/>
+          </p:cNvPicPr>
+          <p:nvPr/>
+        </p:nvPicPr>
+        <p:blipFill>
+          <a:blip r:embed="rId7"/>
+          <a:stretch>
+            <a:fillRect/>
+          </a:stretch>
+        </p:blipFill>
+        <p:spPr>
+          <a:xfrm>
+            <a:off x="6309360" y="3260201"/>
+            <a:ext cx="1909084" cy="337596"/>
+          </a:xfrm>
+          <a:prstGeom prst="rect">
+            <a:avLst/>
+          </a:prstGeom>
+        </p:spPr>
+      </p:pic>
+      <p:pic>
+        <p:nvPicPr>
+          <p:cNvPr id="11" name="Picture 10" descr="hh2_ah.png"/>
+          <p:cNvPicPr>
+            <a:picLocks noChangeAspect="1"/>
+          </p:cNvPicPr>
+          <p:nvPr/>
+        </p:nvPicPr>
+        <p:blipFill>
+          <a:blip r:embed="rId8"/>
+          <a:stretch>
+            <a:fillRect/>
+          </a:stretch>
+        </p:blipFill>
+        <p:spPr>
+          <a:xfrm>
+            <a:off x="777240" y="4037441"/>
+            <a:ext cx="2180112" cy="337596"/>
+          </a:xfrm>
+          <a:prstGeom prst="rect">
+            <a:avLst/>
+          </a:prstGeom>
+        </p:spPr>
+      </p:pic>
+      <p:pic>
+        <p:nvPicPr>
+          <p:cNvPr id="12" name="Picture 11" descr="hh2_bh.png"/>
+          <p:cNvPicPr>
+            <a:picLocks noChangeAspect="1"/>
+          </p:cNvPicPr>
+          <p:nvPr/>
+        </p:nvPicPr>
+        <p:blipFill>
+          <a:blip r:embed="rId9"/>
+          <a:stretch>
+            <a:fillRect/>
+          </a:stretch>
+        </p:blipFill>
+        <p:spPr>
+          <a:xfrm>
+            <a:off x="6309360" y="3899550"/>
+            <a:ext cx="2127808" cy="613379"/>
+          </a:xfrm>
+          <a:prstGeom prst="rect">
+            <a:avLst/>
+          </a:prstGeom>
+        </p:spPr>
+      </p:pic>
+      <p:pic>
+        <p:nvPicPr>
+          <p:cNvPr id="13" name="Picture 12" descr="hh2_an.png"/>
+          <p:cNvPicPr>
+            <a:picLocks noChangeAspect="1"/>
+          </p:cNvPicPr>
+          <p:nvPr/>
+        </p:nvPicPr>
+        <p:blipFill>
+          <a:blip r:embed="rId10"/>
+          <a:stretch>
+            <a:fillRect/>
+          </a:stretch>
+        </p:blipFill>
+        <p:spPr>
+          <a:xfrm>
+            <a:off x="777240" y="4670846"/>
+            <a:ext cx="2149205" cy="625266"/>
+          </a:xfrm>
+          <a:prstGeom prst="rect">
+            <a:avLst/>
+          </a:prstGeom>
+        </p:spPr>
+      </p:pic>
+      <p:pic>
+        <p:nvPicPr>
+          <p:cNvPr id="14" name="Picture 13" descr="hh2_bn.png"/>
+          <p:cNvPicPr>
+            <a:picLocks noChangeAspect="1"/>
+          </p:cNvPicPr>
+          <p:nvPr/>
+        </p:nvPicPr>
+        <p:blipFill>
+          <a:blip r:embed="rId11"/>
+          <a:stretch>
+            <a:fillRect/>
+          </a:stretch>
+        </p:blipFill>
+        <p:spPr>
+          <a:xfrm>
+            <a:off x="6309360" y="4814681"/>
+            <a:ext cx="2284719" cy="337596"/>
+          </a:xfrm>
+          <a:prstGeom prst="rect">
+            <a:avLst/>
+          </a:prstGeom>
+        </p:spPr>
+      </p:pic>
+      <p:pic>
+        <p:nvPicPr>
+          <p:cNvPr id="15" name="Picture 14" descr="hh3_const.png"/>
+          <p:cNvPicPr>
+            <a:picLocks noChangeAspect="1"/>
+          </p:cNvPicPr>
+          <p:nvPr/>
+        </p:nvPicPr>
+        <p:blipFill>
+          <a:blip r:embed="rId12"/>
+          <a:stretch>
+            <a:fillRect/>
+          </a:stretch>
+        </p:blipFill>
+        <p:spPr>
+          <a:xfrm>
+            <a:off x="777240" y="5555894"/>
+            <a:ext cx="6728155" cy="226771"/>
+          </a:xfrm>
+          <a:prstGeom prst="rect">
+            <a:avLst/>
+          </a:prstGeom>
+        </p:spPr>
+      </p:pic>
+    </p:spTree>
+    <p:extLst>
+      <p:ext uri="{BB962C8B-B14F-4D97-AF65-F5344CB8AC3E}">
+        <p14:creationId xmlns:p14="http://schemas.microsoft.com/office/powerpoint/2010/main" val="1584462294"/>
+      </p:ext>
+    </p:extLst>
+  </p:cSld>
+  <p:clrMapOvr>
+    <a:masterClrMapping/>
+  </p:clrMapOvr>
+</p:sld>
+</file>
+
+<file path=ppt/slides/slide5.xml><?xml version="1.0" encoding="utf-8"?>
 <p:sld xmlns:a="http://schemas.openxmlformats.org/drawingml/2006/main" xmlns:r="http://schemas.openxmlformats.org/officeDocument/2006/relationships" xmlns:p="http://schemas.openxmlformats.org/presentationml/2006/main">
   <p:cSld>
     <p:spTree>
@@ -2989,36 +4287,6 @@
           </a:prstGeom>
         </p:spPr>
       </p:pic>
-      <p:pic>
-        <p:nvPicPr>
-          <p:cNvPr id="9" name="図 8">
-            <a:extLst>
-              <a:ext uri="{FF2B5EF4-FFF2-40B4-BE49-F238E27FC236}">
-                <a16:creationId xmlns:a16="http://schemas.microsoft.com/office/drawing/2014/main" id="{DFB684E7-FA95-E02E-C347-32965D687B01}"/>
-              </a:ext>
-            </a:extLst>
-          </p:cNvPr>
-          <p:cNvPicPr>
-            <a:picLocks noChangeAspect="1"/>
-          </p:cNvPicPr>
-          <p:nvPr/>
-        </p:nvPicPr>
-        <p:blipFill>
-          <a:blip r:embed="rId4"/>
-          <a:stretch>
-            <a:fillRect/>
-          </a:stretch>
-        </p:blipFill>
-        <p:spPr>
-          <a:xfrm>
-            <a:off x="6414662" y="4249742"/>
-            <a:ext cx="2136589" cy="2608258"/>
-          </a:xfrm>
-          <a:prstGeom prst="rect">
-            <a:avLst/>
-          </a:prstGeom>
-        </p:spPr>
-      </p:pic>
       <p:sp>
         <p:nvSpPr>
           <p:cNvPr id="12" name="矢印: 右 11">
@@ -3068,370 +4336,12 @@
           </a:p>
         </p:txBody>
       </p:sp>
-    </p:spTree>
-    <p:extLst>
-      <p:ext uri="{BB962C8B-B14F-4D97-AF65-F5344CB8AC3E}">
-        <p14:creationId xmlns:p14="http://schemas.microsoft.com/office/powerpoint/2010/main" val="3611922492"/>
-      </p:ext>
-    </p:extLst>
-  </p:cSld>
-  <p:clrMapOvr>
-    <a:masterClrMapping/>
-  </p:clrMapOvr>
-</p:sld>
-</file>
-
-<file path=ppt/slides/slide5.xml><?xml version="1.0" encoding="utf-8"?>
-<p:sld xmlns:a="http://schemas.openxmlformats.org/drawingml/2006/main" xmlns:r="http://schemas.openxmlformats.org/officeDocument/2006/relationships" xmlns:p="http://schemas.openxmlformats.org/presentationml/2006/main">
-  <p:cSld>
-    <p:spTree>
-      <p:nvGrpSpPr>
-        <p:cNvPr id="1" name=""/>
-        <p:cNvGrpSpPr/>
-        <p:nvPr/>
-      </p:nvGrpSpPr>
-      <p:grpSpPr>
-        <a:xfrm>
-          <a:off x="0" y="0"/>
-          <a:ext cx="0" cy="0"/>
-          <a:chOff x="0" y="0"/>
-          <a:chExt cx="0" cy="0"/>
-        </a:xfrm>
-      </p:grpSpPr>
-      <p:sp>
-        <p:nvSpPr>
-          <p:cNvPr id="2" name="タイトル 1">
+      <p:sp>
+        <p:nvSpPr>
+          <p:cNvPr id="5" name="テキスト ボックス 4">
             <a:extLst>
               <a:ext uri="{FF2B5EF4-FFF2-40B4-BE49-F238E27FC236}">
-                <a16:creationId xmlns:a16="http://schemas.microsoft.com/office/drawing/2014/main" id="{DA4F2C29-A209-A97F-BB9B-88952F2E4B90}"/>
-              </a:ext>
-            </a:extLst>
-          </p:cNvPr>
-          <p:cNvSpPr>
-            <a:spLocks noGrp="1"/>
-          </p:cNvSpPr>
-          <p:nvPr>
-            <p:ph type="title"/>
-          </p:nvPr>
-        </p:nvSpPr>
-        <p:spPr/>
-        <p:txBody>
-          <a:bodyPr/>
-          <a:lstStyle/>
-          <a:p>
-            <a:r>
-              <a:rPr kumimoji="1" lang="en-US" altLang="ja-JP" dirty="0"/>
-              <a:t>RNN</a:t>
-            </a:r>
-            <a:r>
-              <a:rPr kumimoji="1" lang="ja-JP" altLang="en-US" dirty="0"/>
-              <a:t>代理モデル</a:t>
-            </a:r>
-          </a:p>
-        </p:txBody>
-      </p:sp>
-      <p:sp>
-        <p:nvSpPr>
-          <p:cNvPr id="13" name="Rounded Rectangle 3">
-            <a:extLst>
-              <a:ext uri="{FF2B5EF4-FFF2-40B4-BE49-F238E27FC236}">
-                <a16:creationId xmlns:a16="http://schemas.microsoft.com/office/drawing/2014/main" id="{3CD9DF73-5FB7-19B1-FC49-445A4CD9F957}"/>
-              </a:ext>
-            </a:extLst>
-          </p:cNvPr>
-          <p:cNvSpPr/>
-          <p:nvPr/>
-        </p:nvSpPr>
-        <p:spPr>
-          <a:xfrm>
-            <a:off x="6173586" y="1080247"/>
-            <a:ext cx="5741894" cy="5181600"/>
-          </a:xfrm>
-          <a:prstGeom prst="roundRect">
-            <a:avLst>
-              <a:gd name="adj" fmla="val 2205"/>
-            </a:avLst>
-          </a:prstGeom>
-          <a:solidFill>
-            <a:srgbClr val="F0F9FF"/>
-          </a:solidFill>
-          <a:ln w="19050">
-            <a:solidFill>
-              <a:schemeClr val="accent1"/>
-            </a:solidFill>
-          </a:ln>
-          <a:effectLst/>
-        </p:spPr>
-        <p:style>
-          <a:lnRef idx="1">
-            <a:schemeClr val="accent1"/>
-          </a:lnRef>
-          <a:fillRef idx="3">
-            <a:schemeClr val="accent1"/>
-          </a:fillRef>
-          <a:effectRef idx="2">
-            <a:schemeClr val="accent1"/>
-          </a:effectRef>
-          <a:fontRef idx="minor">
-            <a:schemeClr val="lt1"/>
-          </a:fontRef>
-        </p:style>
-        <p:txBody>
-          <a:bodyPr rtlCol="0" anchor="ctr"/>
-          <a:lstStyle>
-            <a:defPPr>
-              <a:defRPr lang="en-US"/>
-            </a:defPPr>
-            <a:lvl1pPr marL="0" algn="l" defTabSz="457200" rtl="0" eaLnBrk="1" latinLnBrk="0" hangingPunct="1">
-              <a:defRPr sz="1800" kern="1200">
-                <a:solidFill>
-                  <a:schemeClr val="lt1"/>
-                </a:solidFill>
-                <a:latin typeface="+mn-lt"/>
-                <a:ea typeface="+mn-ea"/>
-                <a:cs typeface="+mn-cs"/>
-              </a:defRPr>
-            </a:lvl1pPr>
-            <a:lvl2pPr marL="457200" algn="l" defTabSz="457200" rtl="0" eaLnBrk="1" latinLnBrk="0" hangingPunct="1">
-              <a:defRPr sz="1800" kern="1200">
-                <a:solidFill>
-                  <a:schemeClr val="lt1"/>
-                </a:solidFill>
-                <a:latin typeface="+mn-lt"/>
-                <a:ea typeface="+mn-ea"/>
-                <a:cs typeface="+mn-cs"/>
-              </a:defRPr>
-            </a:lvl2pPr>
-            <a:lvl3pPr marL="914400" algn="l" defTabSz="457200" rtl="0" eaLnBrk="1" latinLnBrk="0" hangingPunct="1">
-              <a:defRPr sz="1800" kern="1200">
-                <a:solidFill>
-                  <a:schemeClr val="lt1"/>
-                </a:solidFill>
-                <a:latin typeface="+mn-lt"/>
-                <a:ea typeface="+mn-ea"/>
-                <a:cs typeface="+mn-cs"/>
-              </a:defRPr>
-            </a:lvl3pPr>
-            <a:lvl4pPr marL="1371600" algn="l" defTabSz="457200" rtl="0" eaLnBrk="1" latinLnBrk="0" hangingPunct="1">
-              <a:defRPr sz="1800" kern="1200">
-                <a:solidFill>
-                  <a:schemeClr val="lt1"/>
-                </a:solidFill>
-                <a:latin typeface="+mn-lt"/>
-                <a:ea typeface="+mn-ea"/>
-                <a:cs typeface="+mn-cs"/>
-              </a:defRPr>
-            </a:lvl4pPr>
-            <a:lvl5pPr marL="1828800" algn="l" defTabSz="457200" rtl="0" eaLnBrk="1" latinLnBrk="0" hangingPunct="1">
-              <a:defRPr sz="1800" kern="1200">
-                <a:solidFill>
-                  <a:schemeClr val="lt1"/>
-                </a:solidFill>
-                <a:latin typeface="+mn-lt"/>
-                <a:ea typeface="+mn-ea"/>
-                <a:cs typeface="+mn-cs"/>
-              </a:defRPr>
-            </a:lvl5pPr>
-            <a:lvl6pPr marL="2286000" algn="l" defTabSz="457200" rtl="0" eaLnBrk="1" latinLnBrk="0" hangingPunct="1">
-              <a:defRPr sz="1800" kern="1200">
-                <a:solidFill>
-                  <a:schemeClr val="lt1"/>
-                </a:solidFill>
-                <a:latin typeface="+mn-lt"/>
-                <a:ea typeface="+mn-ea"/>
-                <a:cs typeface="+mn-cs"/>
-              </a:defRPr>
-            </a:lvl6pPr>
-            <a:lvl7pPr marL="2743200" algn="l" defTabSz="457200" rtl="0" eaLnBrk="1" latinLnBrk="0" hangingPunct="1">
-              <a:defRPr sz="1800" kern="1200">
-                <a:solidFill>
-                  <a:schemeClr val="lt1"/>
-                </a:solidFill>
-                <a:latin typeface="+mn-lt"/>
-                <a:ea typeface="+mn-ea"/>
-                <a:cs typeface="+mn-cs"/>
-              </a:defRPr>
-            </a:lvl7pPr>
-            <a:lvl8pPr marL="3200400" algn="l" defTabSz="457200" rtl="0" eaLnBrk="1" latinLnBrk="0" hangingPunct="1">
-              <a:defRPr sz="1800" kern="1200">
-                <a:solidFill>
-                  <a:schemeClr val="lt1"/>
-                </a:solidFill>
-                <a:latin typeface="+mn-lt"/>
-                <a:ea typeface="+mn-ea"/>
-                <a:cs typeface="+mn-cs"/>
-              </a:defRPr>
-            </a:lvl8pPr>
-            <a:lvl9pPr marL="3657600" algn="l" defTabSz="457200" rtl="0" eaLnBrk="1" latinLnBrk="0" hangingPunct="1">
-              <a:defRPr sz="1800" kern="1200">
-                <a:solidFill>
-                  <a:schemeClr val="lt1"/>
-                </a:solidFill>
-                <a:latin typeface="+mn-lt"/>
-                <a:ea typeface="+mn-ea"/>
-                <a:cs typeface="+mn-cs"/>
-              </a:defRPr>
-            </a:lvl9pPr>
-          </a:lstStyle>
-          <a:p>
-            <a:pPr algn="ctr"/>
-            <a:endParaRPr dirty="0"/>
-          </a:p>
-        </p:txBody>
-      </p:sp>
-      <p:sp>
-        <p:nvSpPr>
-          <p:cNvPr id="14" name="Rounded Rectangle 3">
-            <a:extLst>
-              <a:ext uri="{FF2B5EF4-FFF2-40B4-BE49-F238E27FC236}">
-                <a16:creationId xmlns:a16="http://schemas.microsoft.com/office/drawing/2014/main" id="{61DC9ABF-5FD3-8766-2A06-DB2A0866A118}"/>
-              </a:ext>
-            </a:extLst>
-          </p:cNvPr>
-          <p:cNvSpPr/>
-          <p:nvPr/>
-        </p:nvSpPr>
-        <p:spPr>
-          <a:xfrm>
-            <a:off x="218806" y="1080247"/>
-            <a:ext cx="5741894" cy="5181600"/>
-          </a:xfrm>
-          <a:prstGeom prst="roundRect">
-            <a:avLst>
-              <a:gd name="adj" fmla="val 2205"/>
-            </a:avLst>
-          </a:prstGeom>
-          <a:noFill/>
-          <a:ln w="19050">
-            <a:solidFill>
-              <a:schemeClr val="accent1"/>
-            </a:solidFill>
-          </a:ln>
-          <a:effectLst/>
-        </p:spPr>
-        <p:style>
-          <a:lnRef idx="1">
-            <a:schemeClr val="accent1"/>
-          </a:lnRef>
-          <a:fillRef idx="3">
-            <a:schemeClr val="accent1"/>
-          </a:fillRef>
-          <a:effectRef idx="2">
-            <a:schemeClr val="accent1"/>
-          </a:effectRef>
-          <a:fontRef idx="minor">
-            <a:schemeClr val="lt1"/>
-          </a:fontRef>
-        </p:style>
-        <p:txBody>
-          <a:bodyPr rtlCol="0" anchor="ctr"/>
-          <a:lstStyle>
-            <a:defPPr>
-              <a:defRPr lang="en-US"/>
-            </a:defPPr>
-            <a:lvl1pPr marL="0" algn="l" defTabSz="457200" rtl="0" eaLnBrk="1" latinLnBrk="0" hangingPunct="1">
-              <a:defRPr sz="1800" kern="1200">
-                <a:solidFill>
-                  <a:schemeClr val="lt1"/>
-                </a:solidFill>
-                <a:latin typeface="+mn-lt"/>
-                <a:ea typeface="+mn-ea"/>
-                <a:cs typeface="+mn-cs"/>
-              </a:defRPr>
-            </a:lvl1pPr>
-            <a:lvl2pPr marL="457200" algn="l" defTabSz="457200" rtl="0" eaLnBrk="1" latinLnBrk="0" hangingPunct="1">
-              <a:defRPr sz="1800" kern="1200">
-                <a:solidFill>
-                  <a:schemeClr val="lt1"/>
-                </a:solidFill>
-                <a:latin typeface="+mn-lt"/>
-                <a:ea typeface="+mn-ea"/>
-                <a:cs typeface="+mn-cs"/>
-              </a:defRPr>
-            </a:lvl2pPr>
-            <a:lvl3pPr marL="914400" algn="l" defTabSz="457200" rtl="0" eaLnBrk="1" latinLnBrk="0" hangingPunct="1">
-              <a:defRPr sz="1800" kern="1200">
-                <a:solidFill>
-                  <a:schemeClr val="lt1"/>
-                </a:solidFill>
-                <a:latin typeface="+mn-lt"/>
-                <a:ea typeface="+mn-ea"/>
-                <a:cs typeface="+mn-cs"/>
-              </a:defRPr>
-            </a:lvl3pPr>
-            <a:lvl4pPr marL="1371600" algn="l" defTabSz="457200" rtl="0" eaLnBrk="1" latinLnBrk="0" hangingPunct="1">
-              <a:defRPr sz="1800" kern="1200">
-                <a:solidFill>
-                  <a:schemeClr val="lt1"/>
-                </a:solidFill>
-                <a:latin typeface="+mn-lt"/>
-                <a:ea typeface="+mn-ea"/>
-                <a:cs typeface="+mn-cs"/>
-              </a:defRPr>
-            </a:lvl4pPr>
-            <a:lvl5pPr marL="1828800" algn="l" defTabSz="457200" rtl="0" eaLnBrk="1" latinLnBrk="0" hangingPunct="1">
-              <a:defRPr sz="1800" kern="1200">
-                <a:solidFill>
-                  <a:schemeClr val="lt1"/>
-                </a:solidFill>
-                <a:latin typeface="+mn-lt"/>
-                <a:ea typeface="+mn-ea"/>
-                <a:cs typeface="+mn-cs"/>
-              </a:defRPr>
-            </a:lvl5pPr>
-            <a:lvl6pPr marL="2286000" algn="l" defTabSz="457200" rtl="0" eaLnBrk="1" latinLnBrk="0" hangingPunct="1">
-              <a:defRPr sz="1800" kern="1200">
-                <a:solidFill>
-                  <a:schemeClr val="lt1"/>
-                </a:solidFill>
-                <a:latin typeface="+mn-lt"/>
-                <a:ea typeface="+mn-ea"/>
-                <a:cs typeface="+mn-cs"/>
-              </a:defRPr>
-            </a:lvl6pPr>
-            <a:lvl7pPr marL="2743200" algn="l" defTabSz="457200" rtl="0" eaLnBrk="1" latinLnBrk="0" hangingPunct="1">
-              <a:defRPr sz="1800" kern="1200">
-                <a:solidFill>
-                  <a:schemeClr val="lt1"/>
-                </a:solidFill>
-                <a:latin typeface="+mn-lt"/>
-                <a:ea typeface="+mn-ea"/>
-                <a:cs typeface="+mn-cs"/>
-              </a:defRPr>
-            </a:lvl7pPr>
-            <a:lvl8pPr marL="3200400" algn="l" defTabSz="457200" rtl="0" eaLnBrk="1" latinLnBrk="0" hangingPunct="1">
-              <a:defRPr sz="1800" kern="1200">
-                <a:solidFill>
-                  <a:schemeClr val="lt1"/>
-                </a:solidFill>
-                <a:latin typeface="+mn-lt"/>
-                <a:ea typeface="+mn-ea"/>
-                <a:cs typeface="+mn-cs"/>
-              </a:defRPr>
-            </a:lvl8pPr>
-            <a:lvl9pPr marL="3657600" algn="l" defTabSz="457200" rtl="0" eaLnBrk="1" latinLnBrk="0" hangingPunct="1">
-              <a:defRPr sz="1800" kern="1200">
-                <a:solidFill>
-                  <a:schemeClr val="lt1"/>
-                </a:solidFill>
-                <a:latin typeface="+mn-lt"/>
-                <a:ea typeface="+mn-ea"/>
-                <a:cs typeface="+mn-cs"/>
-              </a:defRPr>
-            </a:lvl9pPr>
-          </a:lstStyle>
-          <a:p>
-            <a:pPr algn="ctr"/>
-            <a:endParaRPr/>
-          </a:p>
-        </p:txBody>
-      </p:sp>
-      <p:sp>
-        <p:nvSpPr>
-          <p:cNvPr id="17" name="テキスト ボックス 16">
-            <a:extLst>
-              <a:ext uri="{FF2B5EF4-FFF2-40B4-BE49-F238E27FC236}">
-                <a16:creationId xmlns:a16="http://schemas.microsoft.com/office/drawing/2014/main" id="{FB3F9375-3FB2-885E-86AA-697F8C035F39}"/>
+                <a16:creationId xmlns:a16="http://schemas.microsoft.com/office/drawing/2014/main" id="{EA5759EA-1596-E4D0-8961-B3F10EFB829B}"/>
               </a:ext>
             </a:extLst>
           </p:cNvPr>
@@ -3440,8 +4350,8 @@
         </p:nvSpPr>
         <p:spPr>
           <a:xfrm>
-            <a:off x="608199" y="1250577"/>
-            <a:ext cx="2646878" cy="584775"/>
+            <a:off x="8134215" y="4506759"/>
+            <a:ext cx="6115050" cy="369332"/>
           </a:xfrm>
           <a:prstGeom prst="rect">
             <a:avLst/>
@@ -3449,522 +4359,23 @@
           <a:noFill/>
         </p:spPr>
         <p:txBody>
-          <a:bodyPr wrap="none" rtlCol="0">
+          <a:bodyPr wrap="square">
             <a:spAutoFit/>
           </a:bodyPr>
           <a:lstStyle/>
           <a:p>
             <a:r>
-              <a:rPr lang="ja-JP" altLang="en-US" sz="3200" b="1" dirty="0"/>
-              <a:t>従来のモデル</a:t>
-            </a:r>
-            <a:endParaRPr kumimoji="1" lang="ja-JP" altLang="en-US" sz="3200" b="1" dirty="0"/>
-          </a:p>
-        </p:txBody>
-      </p:sp>
-      <p:sp>
-        <p:nvSpPr>
-          <p:cNvPr id="19" name="テキスト ボックス 18">
-            <a:extLst>
-              <a:ext uri="{FF2B5EF4-FFF2-40B4-BE49-F238E27FC236}">
-                <a16:creationId xmlns:a16="http://schemas.microsoft.com/office/drawing/2014/main" id="{FB3FB20B-2B0A-339C-4D5D-B8F2D9EB49DA}"/>
-              </a:ext>
-            </a:extLst>
-          </p:cNvPr>
-          <p:cNvSpPr txBox="1"/>
-          <p:nvPr/>
-        </p:nvSpPr>
-        <p:spPr>
-          <a:xfrm>
-            <a:off x="6341128" y="1250577"/>
-            <a:ext cx="4320413" cy="584775"/>
-          </a:xfrm>
-          <a:prstGeom prst="rect">
-            <a:avLst/>
-          </a:prstGeom>
-          <a:noFill/>
-        </p:spPr>
-        <p:txBody>
-          <a:bodyPr wrap="none" rtlCol="0">
-            <a:spAutoFit/>
-          </a:bodyPr>
-          <a:lstStyle/>
-          <a:p>
-            <a:r>
-              <a:rPr lang="en-US" altLang="ja-JP" sz="3200" b="1" dirty="0"/>
-              <a:t>RNN</a:t>
-            </a:r>
-            <a:r>
-              <a:rPr lang="ja-JP" altLang="en-US" sz="3200" b="1" dirty="0"/>
-              <a:t>による代理モデル</a:t>
-            </a:r>
-            <a:endParaRPr kumimoji="1" lang="ja-JP" altLang="en-US" sz="3200" b="1" dirty="0"/>
-          </a:p>
-        </p:txBody>
-      </p:sp>
-      <p:sp>
-        <p:nvSpPr>
-          <p:cNvPr id="21" name="テキスト ボックス 20">
-            <a:extLst>
-              <a:ext uri="{FF2B5EF4-FFF2-40B4-BE49-F238E27FC236}">
-                <a16:creationId xmlns:a16="http://schemas.microsoft.com/office/drawing/2014/main" id="{FFDA4A43-24CB-6786-B926-6629A4D316B9}"/>
-              </a:ext>
-            </a:extLst>
-          </p:cNvPr>
-          <p:cNvSpPr txBox="1"/>
-          <p:nvPr/>
-        </p:nvSpPr>
-        <p:spPr>
-          <a:xfrm>
-            <a:off x="460282" y="2331582"/>
-            <a:ext cx="11455198" cy="523220"/>
-          </a:xfrm>
-          <a:prstGeom prst="rect">
-            <a:avLst/>
-          </a:prstGeom>
-          <a:noFill/>
-        </p:spPr>
-        <p:txBody>
-          <a:bodyPr wrap="square" rtlCol="0">
-            <a:spAutoFit/>
-          </a:bodyPr>
-          <a:lstStyle/>
-          <a:p>
-            <a:r>
-              <a:rPr kumimoji="1" lang="ja-JP" altLang="en-US" sz="2800" b="1" dirty="0"/>
-              <a:t>電流 </a:t>
-            </a:r>
-            <a:r>
-              <a:rPr kumimoji="1" lang="en-US" altLang="ja-JP" sz="2800" b="1" dirty="0">
-                <a:latin typeface="Times New Roman" panose="02020603050405020304" pitchFamily="18" charset="0"/>
-                <a:cs typeface="Times New Roman" panose="02020603050405020304" pitchFamily="18" charset="0"/>
-              </a:rPr>
-              <a:t> </a:t>
-            </a:r>
-            <a:r>
-              <a:rPr kumimoji="1" lang="ja-JP" altLang="en-US" sz="2800" b="1" dirty="0">
-                <a:latin typeface="Times New Roman" panose="02020603050405020304" pitchFamily="18" charset="0"/>
-                <a:cs typeface="Times New Roman" panose="02020603050405020304" pitchFamily="18" charset="0"/>
-              </a:rPr>
-              <a:t>→　　　　　　    </a:t>
-            </a:r>
-            <a:r>
-              <a:rPr lang="ja-JP" altLang="en-US" sz="2800" b="1" dirty="0">
-                <a:latin typeface="Times New Roman" panose="02020603050405020304" pitchFamily="18" charset="0"/>
-                <a:cs typeface="Times New Roman" panose="02020603050405020304" pitchFamily="18" charset="0"/>
-              </a:rPr>
-              <a:t>→ 膜電位</a:t>
-            </a:r>
-            <a:r>
-              <a:rPr kumimoji="1" lang="ja-JP" altLang="en-US" sz="2800" b="1" dirty="0">
-                <a:latin typeface="Times New Roman" panose="02020603050405020304" pitchFamily="18" charset="0"/>
-                <a:cs typeface="Times New Roman" panose="02020603050405020304" pitchFamily="18" charset="0"/>
-              </a:rPr>
-              <a:t>　  </a:t>
-            </a:r>
-            <a:r>
-              <a:rPr lang="ja-JP" altLang="en-US" sz="2800" b="1" dirty="0">
-                <a:latin typeface="Times New Roman" panose="02020603050405020304" pitchFamily="18" charset="0"/>
-                <a:cs typeface="Times New Roman" panose="02020603050405020304" pitchFamily="18" charset="0"/>
-              </a:rPr>
-              <a:t>電流 </a:t>
-            </a:r>
-            <a:r>
-              <a:rPr lang="en-US" altLang="ja-JP" sz="2800" b="1" dirty="0">
-                <a:latin typeface="Times New Roman" panose="02020603050405020304" pitchFamily="18" charset="0"/>
-                <a:cs typeface="Times New Roman" panose="02020603050405020304" pitchFamily="18" charset="0"/>
-              </a:rPr>
-              <a:t> </a:t>
-            </a:r>
-            <a:r>
-              <a:rPr lang="ja-JP" altLang="en-US" sz="2800" b="1" dirty="0">
-                <a:latin typeface="Times New Roman" panose="02020603050405020304" pitchFamily="18" charset="0"/>
-                <a:cs typeface="Times New Roman" panose="02020603050405020304" pitchFamily="18" charset="0"/>
-              </a:rPr>
-              <a:t>→     　　　　　   → 膜電位　 </a:t>
-            </a:r>
-            <a:endParaRPr kumimoji="1" lang="ja-JP" altLang="en-US" sz="2800" b="1" dirty="0">
-              <a:latin typeface="Times New Roman" panose="02020603050405020304" pitchFamily="18" charset="0"/>
-              <a:cs typeface="Times New Roman" panose="02020603050405020304" pitchFamily="18" charset="0"/>
-            </a:endParaRPr>
-          </a:p>
-        </p:txBody>
-      </p:sp>
-      <p:sp>
-        <p:nvSpPr>
-          <p:cNvPr id="22" name="四角形: 角を丸くする 21">
-            <a:extLst>
-              <a:ext uri="{FF2B5EF4-FFF2-40B4-BE49-F238E27FC236}">
-                <a16:creationId xmlns:a16="http://schemas.microsoft.com/office/drawing/2014/main" id="{A919E61B-E6BB-5893-6983-24FE0DECF467}"/>
-              </a:ext>
-            </a:extLst>
-          </p:cNvPr>
-          <p:cNvSpPr/>
-          <p:nvPr/>
-        </p:nvSpPr>
-        <p:spPr>
-          <a:xfrm>
-            <a:off x="1931638" y="2005682"/>
-            <a:ext cx="2219326" cy="1190625"/>
-          </a:xfrm>
-          <a:prstGeom prst="roundRect">
-            <a:avLst/>
-          </a:prstGeom>
-        </p:spPr>
-        <p:style>
-          <a:lnRef idx="2">
-            <a:schemeClr val="accent1">
-              <a:shade val="15000"/>
-            </a:schemeClr>
-          </a:lnRef>
-          <a:fillRef idx="1">
-            <a:schemeClr val="accent1"/>
-          </a:fillRef>
-          <a:effectRef idx="0">
-            <a:schemeClr val="accent1"/>
-          </a:effectRef>
-          <a:fontRef idx="minor">
-            <a:schemeClr val="lt1"/>
-          </a:fontRef>
-        </p:style>
-        <p:txBody>
-          <a:bodyPr rtlCol="0" anchor="ctr"/>
-          <a:lstStyle/>
-          <a:p>
-            <a:pPr algn="ctr"/>
-            <a:r>
-              <a:rPr lang="ja-JP" altLang="en-US" sz="2800" b="1" dirty="0"/>
-              <a:t>連立</a:t>
-            </a:r>
-            <a:endParaRPr lang="en-US" altLang="ja-JP" sz="2800" b="1" dirty="0"/>
-          </a:p>
-          <a:p>
-            <a:pPr algn="ctr"/>
-            <a:r>
-              <a:rPr kumimoji="1" lang="ja-JP" altLang="en-US" sz="2800" b="1" dirty="0"/>
-              <a:t>微分方程式</a:t>
-            </a:r>
-          </a:p>
-        </p:txBody>
-      </p:sp>
-      <p:sp>
-        <p:nvSpPr>
-          <p:cNvPr id="26" name="四角形: 角を丸くする 25">
-            <a:extLst>
-              <a:ext uri="{FF2B5EF4-FFF2-40B4-BE49-F238E27FC236}">
-                <a16:creationId xmlns:a16="http://schemas.microsoft.com/office/drawing/2014/main" id="{C4C2D95D-C5F1-DB69-19C1-2DE5100B57E5}"/>
-              </a:ext>
-            </a:extLst>
-          </p:cNvPr>
-          <p:cNvSpPr/>
-          <p:nvPr/>
-        </p:nvSpPr>
-        <p:spPr>
-          <a:xfrm>
-            <a:off x="7665249" y="2005681"/>
-            <a:ext cx="2219326" cy="1190625"/>
-          </a:xfrm>
-          <a:prstGeom prst="roundRect">
-            <a:avLst/>
-          </a:prstGeom>
-        </p:spPr>
-        <p:style>
-          <a:lnRef idx="2">
-            <a:schemeClr val="accent1">
-              <a:shade val="15000"/>
-            </a:schemeClr>
-          </a:lnRef>
-          <a:fillRef idx="1">
-            <a:schemeClr val="accent1"/>
-          </a:fillRef>
-          <a:effectRef idx="0">
-            <a:schemeClr val="accent1"/>
-          </a:effectRef>
-          <a:fontRef idx="minor">
-            <a:schemeClr val="lt1"/>
-          </a:fontRef>
-        </p:style>
-        <p:txBody>
-          <a:bodyPr rtlCol="0" anchor="ctr"/>
-          <a:lstStyle/>
-          <a:p>
-            <a:pPr algn="ctr"/>
-            <a:r>
-              <a:rPr lang="en-US" altLang="ja-JP" sz="2800" b="1" dirty="0"/>
-              <a:t>RNN</a:t>
-            </a:r>
-          </a:p>
-        </p:txBody>
-      </p:sp>
-      <p:sp>
-        <p:nvSpPr>
-          <p:cNvPr id="33" name="矢印: 環状 32">
-            <a:extLst>
-              <a:ext uri="{FF2B5EF4-FFF2-40B4-BE49-F238E27FC236}">
-                <a16:creationId xmlns:a16="http://schemas.microsoft.com/office/drawing/2014/main" id="{416F0E48-7C6E-3674-0C98-A7C92DBF7DDA}"/>
-              </a:ext>
-            </a:extLst>
-          </p:cNvPr>
-          <p:cNvSpPr/>
-          <p:nvPr/>
-        </p:nvSpPr>
-        <p:spPr>
-          <a:xfrm rot="10800000">
-            <a:off x="8300567" y="2914947"/>
-            <a:ext cx="948690" cy="1190625"/>
-          </a:xfrm>
-          <a:prstGeom prst="circularArrow">
-            <a:avLst>
-              <a:gd name="adj1" fmla="val 2901"/>
-              <a:gd name="adj2" fmla="val 1142319"/>
-              <a:gd name="adj3" fmla="val 20552564"/>
-              <a:gd name="adj4" fmla="val 10800000"/>
-              <a:gd name="adj5" fmla="val 12500"/>
-            </a:avLst>
-          </a:prstGeom>
-        </p:spPr>
-        <p:style>
-          <a:lnRef idx="2">
-            <a:schemeClr val="accent1">
-              <a:shade val="15000"/>
-            </a:schemeClr>
-          </a:lnRef>
-          <a:fillRef idx="1">
-            <a:schemeClr val="accent1"/>
-          </a:fillRef>
-          <a:effectRef idx="0">
-            <a:schemeClr val="accent1"/>
-          </a:effectRef>
-          <a:fontRef idx="minor">
-            <a:schemeClr val="lt1"/>
-          </a:fontRef>
-        </p:style>
-        <p:txBody>
-          <a:bodyPr rtlCol="0" anchor="ctr"/>
-          <a:lstStyle/>
-          <a:p>
-            <a:pPr algn="ctr"/>
-            <a:endParaRPr kumimoji="1" lang="ja-JP" altLang="en-US">
-              <a:solidFill>
-                <a:schemeClr val="tx1"/>
-              </a:solidFill>
-            </a:endParaRPr>
-          </a:p>
-        </p:txBody>
-      </p:sp>
-      <p:sp>
-        <p:nvSpPr>
-          <p:cNvPr id="42" name="矢印: 環状 41">
-            <a:extLst>
-              <a:ext uri="{FF2B5EF4-FFF2-40B4-BE49-F238E27FC236}">
-                <a16:creationId xmlns:a16="http://schemas.microsoft.com/office/drawing/2014/main" id="{9DF3C6E1-DC15-E801-C5C6-8A8938DE54AD}"/>
-              </a:ext>
-            </a:extLst>
-          </p:cNvPr>
-          <p:cNvSpPr/>
-          <p:nvPr/>
-        </p:nvSpPr>
-        <p:spPr>
-          <a:xfrm rot="10800000">
-            <a:off x="2468398" y="2967963"/>
-            <a:ext cx="948690" cy="1190625"/>
-          </a:xfrm>
-          <a:prstGeom prst="circularArrow">
-            <a:avLst>
-              <a:gd name="adj1" fmla="val 2901"/>
-              <a:gd name="adj2" fmla="val 1142319"/>
-              <a:gd name="adj3" fmla="val 20552564"/>
-              <a:gd name="adj4" fmla="val 10800000"/>
-              <a:gd name="adj5" fmla="val 12500"/>
-            </a:avLst>
-          </a:prstGeom>
-        </p:spPr>
-        <p:style>
-          <a:lnRef idx="2">
-            <a:schemeClr val="accent1">
-              <a:shade val="15000"/>
-            </a:schemeClr>
-          </a:lnRef>
-          <a:fillRef idx="1">
-            <a:schemeClr val="accent1"/>
-          </a:fillRef>
-          <a:effectRef idx="0">
-            <a:schemeClr val="accent1"/>
-          </a:effectRef>
-          <a:fontRef idx="minor">
-            <a:schemeClr val="lt1"/>
-          </a:fontRef>
-        </p:style>
-        <p:txBody>
-          <a:bodyPr rtlCol="0" anchor="ctr"/>
-          <a:lstStyle/>
-          <a:p>
-            <a:pPr algn="ctr"/>
-            <a:endParaRPr kumimoji="1" lang="ja-JP" altLang="en-US">
-              <a:solidFill>
-                <a:schemeClr val="tx1"/>
-              </a:solidFill>
-            </a:endParaRPr>
-          </a:p>
-        </p:txBody>
-      </p:sp>
-      <p:sp>
-        <p:nvSpPr>
-          <p:cNvPr id="43" name="テキスト ボックス 42">
-            <a:extLst>
-              <a:ext uri="{FF2B5EF4-FFF2-40B4-BE49-F238E27FC236}">
-                <a16:creationId xmlns:a16="http://schemas.microsoft.com/office/drawing/2014/main" id="{373DE6E5-52FA-A96D-7C59-57487062D438}"/>
-              </a:ext>
-            </a:extLst>
-          </p:cNvPr>
-          <p:cNvSpPr txBox="1"/>
-          <p:nvPr/>
-        </p:nvSpPr>
-        <p:spPr>
-          <a:xfrm>
-            <a:off x="8024842" y="3832306"/>
-            <a:ext cx="2764465" cy="2677656"/>
-          </a:xfrm>
-          <a:prstGeom prst="rect">
-            <a:avLst/>
-          </a:prstGeom>
-          <a:noFill/>
-        </p:spPr>
-        <p:txBody>
-          <a:bodyPr wrap="square" rtlCol="0">
-            <a:spAutoFit/>
-          </a:bodyPr>
-          <a:lstStyle/>
-          <a:p>
-            <a:pPr algn="ctr"/>
-            <a:endParaRPr kumimoji="1" lang="en-US" altLang="ja-JP" sz="2800" b="1" dirty="0">
-              <a:latin typeface="+mn-ea"/>
-              <a:cs typeface="Times New Roman" panose="02020603050405020304" pitchFamily="18" charset="0"/>
-            </a:endParaRPr>
-          </a:p>
-          <a:p>
-            <a:r>
-              <a:rPr lang="ja-JP" altLang="en-US" sz="2800" b="1" dirty="0">
-                <a:latin typeface="+mn-ea"/>
-                <a:cs typeface="Times New Roman" panose="02020603050405020304" pitchFamily="18" charset="0"/>
-              </a:rPr>
-              <a:t>隠れ状態</a:t>
-            </a:r>
-            <a:endParaRPr kumimoji="1" lang="en-US" altLang="ja-JP" sz="2800" b="1" dirty="0">
-              <a:latin typeface="+mn-ea"/>
-              <a:cs typeface="Times New Roman" panose="02020603050405020304" pitchFamily="18" charset="0"/>
-            </a:endParaRPr>
-          </a:p>
-          <a:p>
-            <a:endParaRPr kumimoji="1" lang="en-US" altLang="ja-JP" sz="2800" dirty="0">
-              <a:latin typeface="Times New Roman" panose="02020603050405020304" pitchFamily="18" charset="0"/>
-              <a:cs typeface="Times New Roman" panose="02020603050405020304" pitchFamily="18" charset="0"/>
-            </a:endParaRPr>
-          </a:p>
-          <a:p>
-            <a:endParaRPr kumimoji="1" lang="en-US" altLang="ja-JP" sz="2800" dirty="0">
-              <a:latin typeface="Times New Roman" panose="02020603050405020304" pitchFamily="18" charset="0"/>
-              <a:cs typeface="Times New Roman" panose="02020603050405020304" pitchFamily="18" charset="0"/>
-            </a:endParaRPr>
-          </a:p>
-          <a:p>
-            <a:endParaRPr lang="en-US" altLang="ja-JP" sz="2800" dirty="0">
-              <a:latin typeface="Times New Roman" panose="02020603050405020304" pitchFamily="18" charset="0"/>
-              <a:cs typeface="Times New Roman" panose="02020603050405020304" pitchFamily="18" charset="0"/>
-            </a:endParaRPr>
-          </a:p>
-          <a:p>
-            <a:endParaRPr kumimoji="1" lang="ja-JP" altLang="en-US" sz="2800" dirty="0">
-              <a:latin typeface="Times New Roman" panose="02020603050405020304" pitchFamily="18" charset="0"/>
-              <a:cs typeface="Times New Roman" panose="02020603050405020304" pitchFamily="18" charset="0"/>
-            </a:endParaRPr>
-          </a:p>
-        </p:txBody>
-      </p:sp>
-      <p:sp>
-        <p:nvSpPr>
-          <p:cNvPr id="45" name="テキスト ボックス 44">
-            <a:extLst>
-              <a:ext uri="{FF2B5EF4-FFF2-40B4-BE49-F238E27FC236}">
-                <a16:creationId xmlns:a16="http://schemas.microsoft.com/office/drawing/2014/main" id="{457098D8-FA26-AFAC-039F-047A965FE8DB}"/>
-              </a:ext>
-            </a:extLst>
-          </p:cNvPr>
-          <p:cNvSpPr txBox="1"/>
-          <p:nvPr/>
-        </p:nvSpPr>
-        <p:spPr>
-          <a:xfrm>
-            <a:off x="2187255" y="3907343"/>
-            <a:ext cx="2764465" cy="2677656"/>
-          </a:xfrm>
-          <a:prstGeom prst="rect">
-            <a:avLst/>
-          </a:prstGeom>
-          <a:noFill/>
-        </p:spPr>
-        <p:txBody>
-          <a:bodyPr wrap="square" rtlCol="0">
-            <a:spAutoFit/>
-          </a:bodyPr>
-          <a:lstStyle/>
-          <a:p>
-            <a:pPr algn="ctr"/>
-            <a:endParaRPr kumimoji="1" lang="en-US" altLang="ja-JP" sz="2800" b="1" dirty="0">
-              <a:latin typeface="+mn-ea"/>
-              <a:cs typeface="Times New Roman" panose="02020603050405020304" pitchFamily="18" charset="0"/>
-            </a:endParaRPr>
-          </a:p>
-          <a:p>
-            <a:r>
-              <a:rPr lang="ja-JP" altLang="en-US" sz="2800" b="1" dirty="0">
-                <a:latin typeface="+mn-ea"/>
-                <a:cs typeface="Times New Roman" panose="02020603050405020304" pitchFamily="18" charset="0"/>
-              </a:rPr>
-              <a:t>状態</a:t>
-            </a:r>
-            <a:r>
-              <a:rPr kumimoji="1" lang="ja-JP" altLang="en-US" sz="2800" b="1" dirty="0">
-                <a:latin typeface="+mn-ea"/>
-                <a:cs typeface="Times New Roman" panose="02020603050405020304" pitchFamily="18" charset="0"/>
-              </a:rPr>
-              <a:t>変数</a:t>
-            </a:r>
-            <a:endParaRPr kumimoji="1" lang="en-US" altLang="ja-JP" sz="2800" b="1" dirty="0">
-              <a:latin typeface="+mn-ea"/>
-              <a:cs typeface="Times New Roman" panose="02020603050405020304" pitchFamily="18" charset="0"/>
-            </a:endParaRPr>
-          </a:p>
-          <a:p>
-            <a:endParaRPr kumimoji="1" lang="en-US" altLang="ja-JP" sz="2800" dirty="0">
-              <a:latin typeface="Times New Roman" panose="02020603050405020304" pitchFamily="18" charset="0"/>
-              <a:cs typeface="Times New Roman" panose="02020603050405020304" pitchFamily="18" charset="0"/>
-            </a:endParaRPr>
-          </a:p>
-          <a:p>
-            <a:endParaRPr kumimoji="1" lang="en-US" altLang="ja-JP" sz="2800" dirty="0">
-              <a:latin typeface="Times New Roman" panose="02020603050405020304" pitchFamily="18" charset="0"/>
-              <a:cs typeface="Times New Roman" panose="02020603050405020304" pitchFamily="18" charset="0"/>
-            </a:endParaRPr>
-          </a:p>
-          <a:p>
-            <a:endParaRPr lang="en-US" altLang="ja-JP" sz="2800" dirty="0">
-              <a:latin typeface="Times New Roman" panose="02020603050405020304" pitchFamily="18" charset="0"/>
-              <a:cs typeface="Times New Roman" panose="02020603050405020304" pitchFamily="18" charset="0"/>
-            </a:endParaRPr>
-          </a:p>
-          <a:p>
-            <a:endParaRPr kumimoji="1" lang="ja-JP" altLang="en-US" sz="2800" dirty="0">
-              <a:latin typeface="Times New Roman" panose="02020603050405020304" pitchFamily="18" charset="0"/>
-              <a:cs typeface="Times New Roman" panose="02020603050405020304" pitchFamily="18" charset="0"/>
-            </a:endParaRPr>
+              <a:rPr lang="ja-JP" altLang="ja-JP" b="1" dirty="0"/>
+              <a:t>Kuniyoshi et al.2023</a:t>
+            </a:r>
+            <a:endParaRPr lang="ja-JP" altLang="en-US" b="1" dirty="0"/>
           </a:p>
         </p:txBody>
       </p:sp>
     </p:spTree>
     <p:extLst>
       <p:ext uri="{BB962C8B-B14F-4D97-AF65-F5344CB8AC3E}">
-        <p14:creationId xmlns:p14="http://schemas.microsoft.com/office/powerpoint/2010/main" val="2403056092"/>
+        <p14:creationId xmlns:p14="http://schemas.microsoft.com/office/powerpoint/2010/main" val="3611922492"/>
       </p:ext>
     </p:extLst>
   </p:cSld>
@@ -3996,7 +4407,7 @@
           <p:cNvPr id="2" name="タイトル 1">
             <a:extLst>
               <a:ext uri="{FF2B5EF4-FFF2-40B4-BE49-F238E27FC236}">
-                <a16:creationId xmlns:a16="http://schemas.microsoft.com/office/drawing/2014/main" id="{48F62566-BE55-5AA4-3F85-AAF7F6D339D9}"/>
+                <a16:creationId xmlns:a16="http://schemas.microsoft.com/office/drawing/2014/main" id="{DA4F2C29-A209-A97F-BB9B-88952F2E4B90}"/>
               </a:ext>
             </a:extLst>
           </p:cNvPr>
@@ -4013,409 +4424,22 @@
           <a:lstStyle/>
           <a:p>
             <a:r>
-              <a:rPr kumimoji="1" lang="ja-JP" altLang="en-US" dirty="0"/>
-              <a:t>なぜ</a:t>
-            </a:r>
-            <a:r>
               <a:rPr kumimoji="1" lang="en-US" altLang="ja-JP" dirty="0"/>
               <a:t>RNN</a:t>
             </a:r>
             <a:r>
-              <a:rPr lang="ja-JP" altLang="en-US" dirty="0"/>
-              <a:t>？</a:t>
-            </a:r>
-            <a:endParaRPr kumimoji="1" lang="ja-JP" altLang="en-US" dirty="0"/>
-          </a:p>
-        </p:txBody>
-      </p:sp>
-      <p:grpSp>
-        <p:nvGrpSpPr>
-          <p:cNvPr id="26" name="グループ化 25">
+              <a:rPr kumimoji="1" lang="ja-JP" altLang="en-US" dirty="0"/>
+              <a:t>代理モデル</a:t>
+            </a:r>
+          </a:p>
+        </p:txBody>
+      </p:sp>
+      <p:sp>
+        <p:nvSpPr>
+          <p:cNvPr id="13" name="Rounded Rectangle 3">
             <a:extLst>
               <a:ext uri="{FF2B5EF4-FFF2-40B4-BE49-F238E27FC236}">
-                <a16:creationId xmlns:a16="http://schemas.microsoft.com/office/drawing/2014/main" id="{1639DE3D-02C4-1DD6-E979-03C5B96ACD18}"/>
-              </a:ext>
-            </a:extLst>
-          </p:cNvPr>
-          <p:cNvGrpSpPr/>
-          <p:nvPr/>
-        </p:nvGrpSpPr>
-        <p:grpSpPr>
-          <a:xfrm>
-            <a:off x="609533" y="1179766"/>
-            <a:ext cx="10972934" cy="5072180"/>
-            <a:chOff x="218806" y="1094705"/>
-            <a:chExt cx="10972934" cy="5072180"/>
-          </a:xfrm>
-        </p:grpSpPr>
-        <p:sp>
-          <p:nvSpPr>
-            <p:cNvPr id="4" name="四角形: 角を丸くする 3">
-              <a:extLst>
-                <a:ext uri="{FF2B5EF4-FFF2-40B4-BE49-F238E27FC236}">
-                  <a16:creationId xmlns:a16="http://schemas.microsoft.com/office/drawing/2014/main" id="{479F0667-DFF8-51F8-E55F-1465391C353A}"/>
-                </a:ext>
-              </a:extLst>
-            </p:cNvPr>
-            <p:cNvSpPr/>
-            <p:nvPr/>
-          </p:nvSpPr>
-          <p:spPr>
-            <a:xfrm>
-              <a:off x="218806" y="1094705"/>
-              <a:ext cx="3427093" cy="5072180"/>
-            </a:xfrm>
-            <a:prstGeom prst="roundRect">
-              <a:avLst/>
-            </a:prstGeom>
-          </p:spPr>
-          <p:style>
-            <a:lnRef idx="2">
-              <a:schemeClr val="accent1"/>
-            </a:lnRef>
-            <a:fillRef idx="1">
-              <a:schemeClr val="lt1"/>
-            </a:fillRef>
-            <a:effectRef idx="0">
-              <a:schemeClr val="accent1"/>
-            </a:effectRef>
-            <a:fontRef idx="minor">
-              <a:schemeClr val="dk1"/>
-            </a:fontRef>
-          </p:style>
-          <p:txBody>
-            <a:bodyPr rtlCol="0" anchor="t"/>
-            <a:lstStyle/>
-            <a:p>
-              <a:pPr>
-                <a:lnSpc>
-                  <a:spcPct val="120000"/>
-                </a:lnSpc>
-              </a:pPr>
-              <a:r>
-                <a:rPr kumimoji="1" lang="ja-JP" altLang="en-US" sz="2800" b="1" dirty="0"/>
-                <a:t>内部データの保持</a:t>
-              </a:r>
-              <a:endParaRPr kumimoji="1" lang="en-US" altLang="ja-JP" sz="2800" b="1" dirty="0"/>
-            </a:p>
-            <a:p>
-              <a:pPr>
-                <a:lnSpc>
-                  <a:spcPct val="120000"/>
-                </a:lnSpc>
-              </a:pPr>
-              <a:endParaRPr lang="en-US" altLang="ja-JP" sz="2800" b="1" dirty="0"/>
-            </a:p>
-            <a:p>
-              <a:pPr>
-                <a:lnSpc>
-                  <a:spcPct val="120000"/>
-                </a:lnSpc>
-              </a:pPr>
-              <a:endParaRPr kumimoji="1" lang="en-US" altLang="ja-JP" sz="2400" b="1" dirty="0"/>
-            </a:p>
-            <a:p>
-              <a:pPr>
-                <a:lnSpc>
-                  <a:spcPct val="120000"/>
-                </a:lnSpc>
-              </a:pPr>
-              <a:r>
-                <a:rPr kumimoji="1" lang="ja-JP" altLang="en-US" sz="2400" b="1" dirty="0"/>
-                <a:t>過去の膜電位や状態変化を、隠れ状態</a:t>
-              </a:r>
-              <a:r>
-                <a:rPr kumimoji="1" lang="en-US" altLang="ja-JP" sz="2400" b="1" dirty="0"/>
-                <a:t>(h)</a:t>
-              </a:r>
-              <a:r>
-                <a:rPr kumimoji="1" lang="ja-JP" altLang="en-US" sz="2400" b="1" dirty="0"/>
-                <a:t>に保持</a:t>
-              </a:r>
-              <a:endParaRPr kumimoji="1" lang="en-US" altLang="ja-JP" sz="2400" b="1" dirty="0"/>
-            </a:p>
-            <a:p>
-              <a:pPr>
-                <a:lnSpc>
-                  <a:spcPct val="120000"/>
-                </a:lnSpc>
-              </a:pPr>
-              <a:r>
-                <a:rPr kumimoji="1" lang="ja-JP" altLang="en-US" sz="2400" b="1" dirty="0"/>
-                <a:t>→  微分方程式による</a:t>
-              </a:r>
-              <a:endParaRPr kumimoji="1" lang="en-US" altLang="ja-JP" sz="2400" b="1" dirty="0"/>
-            </a:p>
-            <a:p>
-              <a:pPr>
-                <a:lnSpc>
-                  <a:spcPct val="120000"/>
-                </a:lnSpc>
-              </a:pPr>
-              <a:r>
-                <a:rPr lang="ja-JP" altLang="en-US" sz="2400" b="1" dirty="0"/>
-                <a:t>　モデルとの類似性</a:t>
-              </a:r>
-              <a:endParaRPr kumimoji="1" lang="en-US" altLang="ja-JP" sz="2400" b="1" dirty="0"/>
-            </a:p>
-            <a:p>
-              <a:endParaRPr lang="en-US" altLang="ja-JP" sz="2400" b="1" dirty="0"/>
-            </a:p>
-            <a:p>
-              <a:endParaRPr kumimoji="1" lang="en-US" altLang="ja-JP" sz="2400" b="1" dirty="0"/>
-            </a:p>
-          </p:txBody>
-        </p:sp>
-        <p:sp>
-          <p:nvSpPr>
-            <p:cNvPr id="23" name="四角形: 角を丸くする 22">
-              <a:extLst>
-                <a:ext uri="{FF2B5EF4-FFF2-40B4-BE49-F238E27FC236}">
-                  <a16:creationId xmlns:a16="http://schemas.microsoft.com/office/drawing/2014/main" id="{D84A48B7-E8F8-1AB5-CE7F-138B9CF9F2D1}"/>
-                </a:ext>
-              </a:extLst>
-            </p:cNvPr>
-            <p:cNvSpPr/>
-            <p:nvPr/>
-          </p:nvSpPr>
-          <p:spPr>
-            <a:xfrm>
-              <a:off x="3991726" y="1094705"/>
-              <a:ext cx="3427093" cy="5072180"/>
-            </a:xfrm>
-            <a:prstGeom prst="roundRect">
-              <a:avLst/>
-            </a:prstGeom>
-          </p:spPr>
-          <p:style>
-            <a:lnRef idx="2">
-              <a:schemeClr val="accent1"/>
-            </a:lnRef>
-            <a:fillRef idx="1">
-              <a:schemeClr val="lt1"/>
-            </a:fillRef>
-            <a:effectRef idx="0">
-              <a:schemeClr val="accent1"/>
-            </a:effectRef>
-            <a:fontRef idx="minor">
-              <a:schemeClr val="dk1"/>
-            </a:fontRef>
-          </p:style>
-          <p:txBody>
-            <a:bodyPr rtlCol="0" anchor="t"/>
-            <a:lstStyle/>
-            <a:p>
-              <a:pPr>
-                <a:lnSpc>
-                  <a:spcPct val="120000"/>
-                </a:lnSpc>
-              </a:pPr>
-              <a:r>
-                <a:rPr lang="ja-JP" altLang="en-US" sz="2800" b="1" dirty="0"/>
-                <a:t>時系列データとの</a:t>
-              </a:r>
-              <a:endParaRPr lang="en-US" altLang="ja-JP" sz="2800" b="1" dirty="0"/>
-            </a:p>
-            <a:p>
-              <a:pPr>
-                <a:lnSpc>
-                  <a:spcPct val="120000"/>
-                </a:lnSpc>
-              </a:pPr>
-              <a:r>
-                <a:rPr kumimoji="1" lang="ja-JP" altLang="en-US" sz="2800" b="1" dirty="0"/>
-                <a:t>親和性</a:t>
-              </a:r>
-              <a:endParaRPr kumimoji="1" lang="en-US" altLang="ja-JP" sz="2800" b="1" dirty="0"/>
-            </a:p>
-            <a:p>
-              <a:pPr>
-                <a:lnSpc>
-                  <a:spcPct val="120000"/>
-                </a:lnSpc>
-              </a:pPr>
-              <a:endParaRPr kumimoji="1" lang="en-US" altLang="ja-JP" sz="2400" b="1" dirty="0"/>
-            </a:p>
-            <a:p>
-              <a:pPr>
-                <a:lnSpc>
-                  <a:spcPct val="120000"/>
-                </a:lnSpc>
-              </a:pPr>
-              <a:r>
-                <a:rPr kumimoji="1" lang="ja-JP" altLang="en-US" sz="2400" b="1" dirty="0"/>
-                <a:t>時間的に変化する入力刺激と膜電位の時間相関をそのまま効率的に学習</a:t>
-              </a:r>
-              <a:endParaRPr kumimoji="1" lang="en-US" altLang="ja-JP" sz="2400" b="1" dirty="0"/>
-            </a:p>
-            <a:p>
-              <a:endParaRPr lang="en-US" altLang="ja-JP" sz="2400" b="1" dirty="0"/>
-            </a:p>
-            <a:p>
-              <a:endParaRPr kumimoji="1" lang="en-US" altLang="ja-JP" sz="2400" b="1" dirty="0"/>
-            </a:p>
-          </p:txBody>
-        </p:sp>
-        <p:sp>
-          <p:nvSpPr>
-            <p:cNvPr id="25" name="四角形: 角を丸くする 24">
-              <a:extLst>
-                <a:ext uri="{FF2B5EF4-FFF2-40B4-BE49-F238E27FC236}">
-                  <a16:creationId xmlns:a16="http://schemas.microsoft.com/office/drawing/2014/main" id="{A33A0146-67D4-E89A-D16D-E87244AEB637}"/>
-                </a:ext>
-              </a:extLst>
-            </p:cNvPr>
-            <p:cNvSpPr/>
-            <p:nvPr/>
-          </p:nvSpPr>
-          <p:spPr>
-            <a:xfrm>
-              <a:off x="7764647" y="1094705"/>
-              <a:ext cx="3427093" cy="5072180"/>
-            </a:xfrm>
-            <a:prstGeom prst="roundRect">
-              <a:avLst/>
-            </a:prstGeom>
-          </p:spPr>
-          <p:style>
-            <a:lnRef idx="2">
-              <a:schemeClr val="accent1"/>
-            </a:lnRef>
-            <a:fillRef idx="1">
-              <a:schemeClr val="lt1"/>
-            </a:fillRef>
-            <a:effectRef idx="0">
-              <a:schemeClr val="accent1"/>
-            </a:effectRef>
-            <a:fontRef idx="minor">
-              <a:schemeClr val="dk1"/>
-            </a:fontRef>
-          </p:style>
-          <p:txBody>
-            <a:bodyPr rtlCol="0" anchor="t"/>
-            <a:lstStyle/>
-            <a:p>
-              <a:pPr>
-                <a:lnSpc>
-                  <a:spcPct val="120000"/>
-                </a:lnSpc>
-              </a:pPr>
-              <a:r>
-                <a:rPr lang="en-US" altLang="ja-JP" sz="2800" b="1" dirty="0"/>
-                <a:t>GPU</a:t>
-              </a:r>
-              <a:r>
-                <a:rPr lang="ja-JP" altLang="en-US" sz="2800" b="1" dirty="0"/>
-                <a:t>並列化による</a:t>
-              </a:r>
-              <a:endParaRPr lang="en-US" altLang="ja-JP" sz="2800" b="1" dirty="0"/>
-            </a:p>
-            <a:p>
-              <a:pPr>
-                <a:lnSpc>
-                  <a:spcPct val="120000"/>
-                </a:lnSpc>
-              </a:pPr>
-              <a:r>
-                <a:rPr kumimoji="1" lang="ja-JP" altLang="en-US" sz="2800" b="1" dirty="0"/>
-                <a:t>高速化</a:t>
-              </a:r>
-              <a:endParaRPr kumimoji="1" lang="en-US" altLang="ja-JP" sz="2800" b="1" dirty="0"/>
-            </a:p>
-            <a:p>
-              <a:pPr>
-                <a:lnSpc>
-                  <a:spcPct val="120000"/>
-                </a:lnSpc>
-              </a:pPr>
-              <a:endParaRPr kumimoji="1" lang="en-US" altLang="ja-JP" sz="2400" b="1" dirty="0"/>
-            </a:p>
-            <a:p>
-              <a:pPr algn="ctr">
-                <a:lnSpc>
-                  <a:spcPct val="120000"/>
-                </a:lnSpc>
-              </a:pPr>
-              <a:r>
-                <a:rPr kumimoji="1" lang="ja-JP" altLang="en-US" sz="2400" b="1" dirty="0"/>
-                <a:t>微分方程式の</a:t>
-              </a:r>
-              <a:endParaRPr kumimoji="1" lang="en-US" altLang="ja-JP" sz="2400" b="1" dirty="0"/>
-            </a:p>
-            <a:p>
-              <a:pPr algn="ctr">
-                <a:lnSpc>
-                  <a:spcPct val="120000"/>
-                </a:lnSpc>
-              </a:pPr>
-              <a:r>
-                <a:rPr kumimoji="1" lang="ja-JP" altLang="en-US" sz="2400" b="1" dirty="0"/>
-                <a:t>逐次数値積分</a:t>
-              </a:r>
-              <a:endParaRPr kumimoji="1" lang="en-US" altLang="ja-JP" sz="2400" b="1" dirty="0"/>
-            </a:p>
-            <a:p>
-              <a:pPr algn="ctr">
-                <a:lnSpc>
-                  <a:spcPct val="120000"/>
-                </a:lnSpc>
-              </a:pPr>
-              <a:endParaRPr kumimoji="1" lang="en-US" altLang="ja-JP" sz="2400" b="1" dirty="0"/>
-            </a:p>
-            <a:p>
-              <a:pPr algn="ctr">
-                <a:lnSpc>
-                  <a:spcPct val="120000"/>
-                </a:lnSpc>
-              </a:pPr>
-              <a:r>
-                <a:rPr lang="en-US" altLang="ja-JP" sz="2400" b="1" dirty="0"/>
-                <a:t>RNN</a:t>
-              </a:r>
-              <a:r>
-                <a:rPr lang="ja-JP" altLang="en-US" sz="2400" b="1" dirty="0"/>
-                <a:t>の</a:t>
-              </a:r>
-              <a:r>
-                <a:rPr kumimoji="1" lang="ja-JP" altLang="en-US" sz="2400" b="1" dirty="0"/>
-                <a:t>行列積計算</a:t>
-              </a:r>
-              <a:endParaRPr kumimoji="1" lang="en-US" altLang="ja-JP" sz="2400" b="1" dirty="0"/>
-            </a:p>
-            <a:p>
-              <a:pPr>
-                <a:lnSpc>
-                  <a:spcPct val="120000"/>
-                </a:lnSpc>
-              </a:pPr>
-              <a:endParaRPr kumimoji="1" lang="en-US" altLang="ja-JP" sz="2400" b="1" dirty="0"/>
-            </a:p>
-            <a:p>
-              <a:pPr>
-                <a:lnSpc>
-                  <a:spcPct val="120000"/>
-                </a:lnSpc>
-              </a:pPr>
-              <a:r>
-                <a:rPr kumimoji="1" lang="ja-JP" altLang="en-US" sz="2400" b="1" dirty="0"/>
-                <a:t>著しい時間短縮が期待される</a:t>
-              </a:r>
-            </a:p>
-            <a:p>
-              <a:endParaRPr lang="en-US" altLang="ja-JP" sz="2400" b="1" dirty="0"/>
-            </a:p>
-            <a:p>
-              <a:endParaRPr kumimoji="1" lang="en-US" altLang="ja-JP" sz="2400" b="1" dirty="0"/>
-            </a:p>
-          </p:txBody>
-        </p:sp>
-      </p:grpSp>
-      <p:sp>
-        <p:nvSpPr>
-          <p:cNvPr id="29" name="矢印: 下 28">
-            <a:extLst>
-              <a:ext uri="{FF2B5EF4-FFF2-40B4-BE49-F238E27FC236}">
-                <a16:creationId xmlns:a16="http://schemas.microsoft.com/office/drawing/2014/main" id="{AC5EDA2B-167B-A050-DF93-E90C6250379A}"/>
+                <a16:creationId xmlns:a16="http://schemas.microsoft.com/office/drawing/2014/main" id="{3CD9DF73-5FB7-19B1-FC49-445A4CD9F957}"/>
               </a:ext>
             </a:extLst>
           </p:cNvPr>
@@ -4424,14 +4448,471 @@
         </p:nvSpPr>
         <p:spPr>
           <a:xfrm>
-            <a:off x="9789397" y="3857256"/>
-            <a:ext cx="260887" cy="287079"/>
-          </a:xfrm>
-          <a:prstGeom prst="downArrow">
+            <a:off x="6173586" y="1080247"/>
+            <a:ext cx="5741894" cy="5181600"/>
+          </a:xfrm>
+          <a:prstGeom prst="roundRect">
             <a:avLst>
-              <a:gd name="adj1" fmla="val 31334"/>
-              <a:gd name="adj2" fmla="val 50000"/>
+              <a:gd name="adj" fmla="val 2205"/>
             </a:avLst>
+          </a:prstGeom>
+          <a:solidFill>
+            <a:srgbClr val="F0F9FF"/>
+          </a:solidFill>
+          <a:ln w="19050">
+            <a:solidFill>
+              <a:schemeClr val="accent1"/>
+            </a:solidFill>
+          </a:ln>
+          <a:effectLst/>
+        </p:spPr>
+        <p:style>
+          <a:lnRef idx="1">
+            <a:schemeClr val="accent1"/>
+          </a:lnRef>
+          <a:fillRef idx="3">
+            <a:schemeClr val="accent1"/>
+          </a:fillRef>
+          <a:effectRef idx="2">
+            <a:schemeClr val="accent1"/>
+          </a:effectRef>
+          <a:fontRef idx="minor">
+            <a:schemeClr val="lt1"/>
+          </a:fontRef>
+        </p:style>
+        <p:txBody>
+          <a:bodyPr rtlCol="0" anchor="ctr"/>
+          <a:lstStyle>
+            <a:defPPr>
+              <a:defRPr lang="en-US"/>
+            </a:defPPr>
+            <a:lvl1pPr marL="0" algn="l" defTabSz="457200" rtl="0" eaLnBrk="1" latinLnBrk="0" hangingPunct="1">
+              <a:defRPr sz="1800" kern="1200">
+                <a:solidFill>
+                  <a:schemeClr val="lt1"/>
+                </a:solidFill>
+                <a:latin typeface="+mn-lt"/>
+                <a:ea typeface="+mn-ea"/>
+                <a:cs typeface="+mn-cs"/>
+              </a:defRPr>
+            </a:lvl1pPr>
+            <a:lvl2pPr marL="457200" algn="l" defTabSz="457200" rtl="0" eaLnBrk="1" latinLnBrk="0" hangingPunct="1">
+              <a:defRPr sz="1800" kern="1200">
+                <a:solidFill>
+                  <a:schemeClr val="lt1"/>
+                </a:solidFill>
+                <a:latin typeface="+mn-lt"/>
+                <a:ea typeface="+mn-ea"/>
+                <a:cs typeface="+mn-cs"/>
+              </a:defRPr>
+            </a:lvl2pPr>
+            <a:lvl3pPr marL="914400" algn="l" defTabSz="457200" rtl="0" eaLnBrk="1" latinLnBrk="0" hangingPunct="1">
+              <a:defRPr sz="1800" kern="1200">
+                <a:solidFill>
+                  <a:schemeClr val="lt1"/>
+                </a:solidFill>
+                <a:latin typeface="+mn-lt"/>
+                <a:ea typeface="+mn-ea"/>
+                <a:cs typeface="+mn-cs"/>
+              </a:defRPr>
+            </a:lvl3pPr>
+            <a:lvl4pPr marL="1371600" algn="l" defTabSz="457200" rtl="0" eaLnBrk="1" latinLnBrk="0" hangingPunct="1">
+              <a:defRPr sz="1800" kern="1200">
+                <a:solidFill>
+                  <a:schemeClr val="lt1"/>
+                </a:solidFill>
+                <a:latin typeface="+mn-lt"/>
+                <a:ea typeface="+mn-ea"/>
+                <a:cs typeface="+mn-cs"/>
+              </a:defRPr>
+            </a:lvl4pPr>
+            <a:lvl5pPr marL="1828800" algn="l" defTabSz="457200" rtl="0" eaLnBrk="1" latinLnBrk="0" hangingPunct="1">
+              <a:defRPr sz="1800" kern="1200">
+                <a:solidFill>
+                  <a:schemeClr val="lt1"/>
+                </a:solidFill>
+                <a:latin typeface="+mn-lt"/>
+                <a:ea typeface="+mn-ea"/>
+                <a:cs typeface="+mn-cs"/>
+              </a:defRPr>
+            </a:lvl5pPr>
+            <a:lvl6pPr marL="2286000" algn="l" defTabSz="457200" rtl="0" eaLnBrk="1" latinLnBrk="0" hangingPunct="1">
+              <a:defRPr sz="1800" kern="1200">
+                <a:solidFill>
+                  <a:schemeClr val="lt1"/>
+                </a:solidFill>
+                <a:latin typeface="+mn-lt"/>
+                <a:ea typeface="+mn-ea"/>
+                <a:cs typeface="+mn-cs"/>
+              </a:defRPr>
+            </a:lvl6pPr>
+            <a:lvl7pPr marL="2743200" algn="l" defTabSz="457200" rtl="0" eaLnBrk="1" latinLnBrk="0" hangingPunct="1">
+              <a:defRPr sz="1800" kern="1200">
+                <a:solidFill>
+                  <a:schemeClr val="lt1"/>
+                </a:solidFill>
+                <a:latin typeface="+mn-lt"/>
+                <a:ea typeface="+mn-ea"/>
+                <a:cs typeface="+mn-cs"/>
+              </a:defRPr>
+            </a:lvl7pPr>
+            <a:lvl8pPr marL="3200400" algn="l" defTabSz="457200" rtl="0" eaLnBrk="1" latinLnBrk="0" hangingPunct="1">
+              <a:defRPr sz="1800" kern="1200">
+                <a:solidFill>
+                  <a:schemeClr val="lt1"/>
+                </a:solidFill>
+                <a:latin typeface="+mn-lt"/>
+                <a:ea typeface="+mn-ea"/>
+                <a:cs typeface="+mn-cs"/>
+              </a:defRPr>
+            </a:lvl8pPr>
+            <a:lvl9pPr marL="3657600" algn="l" defTabSz="457200" rtl="0" eaLnBrk="1" latinLnBrk="0" hangingPunct="1">
+              <a:defRPr sz="1800" kern="1200">
+                <a:solidFill>
+                  <a:schemeClr val="lt1"/>
+                </a:solidFill>
+                <a:latin typeface="+mn-lt"/>
+                <a:ea typeface="+mn-ea"/>
+                <a:cs typeface="+mn-cs"/>
+              </a:defRPr>
+            </a:lvl9pPr>
+          </a:lstStyle>
+          <a:p>
+            <a:pPr algn="ctr"/>
+            <a:endParaRPr dirty="0"/>
+          </a:p>
+        </p:txBody>
+      </p:sp>
+      <p:sp>
+        <p:nvSpPr>
+          <p:cNvPr id="14" name="Rounded Rectangle 3">
+            <a:extLst>
+              <a:ext uri="{FF2B5EF4-FFF2-40B4-BE49-F238E27FC236}">
+                <a16:creationId xmlns:a16="http://schemas.microsoft.com/office/drawing/2014/main" id="{61DC9ABF-5FD3-8766-2A06-DB2A0866A118}"/>
+              </a:ext>
+            </a:extLst>
+          </p:cNvPr>
+          <p:cNvSpPr/>
+          <p:nvPr/>
+        </p:nvSpPr>
+        <p:spPr>
+          <a:xfrm>
+            <a:off x="218806" y="1080247"/>
+            <a:ext cx="5741894" cy="5181600"/>
+          </a:xfrm>
+          <a:prstGeom prst="roundRect">
+            <a:avLst>
+              <a:gd name="adj" fmla="val 2205"/>
+            </a:avLst>
+          </a:prstGeom>
+          <a:noFill/>
+          <a:ln w="19050">
+            <a:solidFill>
+              <a:schemeClr val="accent1"/>
+            </a:solidFill>
+          </a:ln>
+          <a:effectLst/>
+        </p:spPr>
+        <p:style>
+          <a:lnRef idx="1">
+            <a:schemeClr val="accent1"/>
+          </a:lnRef>
+          <a:fillRef idx="3">
+            <a:schemeClr val="accent1"/>
+          </a:fillRef>
+          <a:effectRef idx="2">
+            <a:schemeClr val="accent1"/>
+          </a:effectRef>
+          <a:fontRef idx="minor">
+            <a:schemeClr val="lt1"/>
+          </a:fontRef>
+        </p:style>
+        <p:txBody>
+          <a:bodyPr rtlCol="0" anchor="ctr"/>
+          <a:lstStyle>
+            <a:defPPr>
+              <a:defRPr lang="en-US"/>
+            </a:defPPr>
+            <a:lvl1pPr marL="0" algn="l" defTabSz="457200" rtl="0" eaLnBrk="1" latinLnBrk="0" hangingPunct="1">
+              <a:defRPr sz="1800" kern="1200">
+                <a:solidFill>
+                  <a:schemeClr val="lt1"/>
+                </a:solidFill>
+                <a:latin typeface="+mn-lt"/>
+                <a:ea typeface="+mn-ea"/>
+                <a:cs typeface="+mn-cs"/>
+              </a:defRPr>
+            </a:lvl1pPr>
+            <a:lvl2pPr marL="457200" algn="l" defTabSz="457200" rtl="0" eaLnBrk="1" latinLnBrk="0" hangingPunct="1">
+              <a:defRPr sz="1800" kern="1200">
+                <a:solidFill>
+                  <a:schemeClr val="lt1"/>
+                </a:solidFill>
+                <a:latin typeface="+mn-lt"/>
+                <a:ea typeface="+mn-ea"/>
+                <a:cs typeface="+mn-cs"/>
+              </a:defRPr>
+            </a:lvl2pPr>
+            <a:lvl3pPr marL="914400" algn="l" defTabSz="457200" rtl="0" eaLnBrk="1" latinLnBrk="0" hangingPunct="1">
+              <a:defRPr sz="1800" kern="1200">
+                <a:solidFill>
+                  <a:schemeClr val="lt1"/>
+                </a:solidFill>
+                <a:latin typeface="+mn-lt"/>
+                <a:ea typeface="+mn-ea"/>
+                <a:cs typeface="+mn-cs"/>
+              </a:defRPr>
+            </a:lvl3pPr>
+            <a:lvl4pPr marL="1371600" algn="l" defTabSz="457200" rtl="0" eaLnBrk="1" latinLnBrk="0" hangingPunct="1">
+              <a:defRPr sz="1800" kern="1200">
+                <a:solidFill>
+                  <a:schemeClr val="lt1"/>
+                </a:solidFill>
+                <a:latin typeface="+mn-lt"/>
+                <a:ea typeface="+mn-ea"/>
+                <a:cs typeface="+mn-cs"/>
+              </a:defRPr>
+            </a:lvl4pPr>
+            <a:lvl5pPr marL="1828800" algn="l" defTabSz="457200" rtl="0" eaLnBrk="1" latinLnBrk="0" hangingPunct="1">
+              <a:defRPr sz="1800" kern="1200">
+                <a:solidFill>
+                  <a:schemeClr val="lt1"/>
+                </a:solidFill>
+                <a:latin typeface="+mn-lt"/>
+                <a:ea typeface="+mn-ea"/>
+                <a:cs typeface="+mn-cs"/>
+              </a:defRPr>
+            </a:lvl5pPr>
+            <a:lvl6pPr marL="2286000" algn="l" defTabSz="457200" rtl="0" eaLnBrk="1" latinLnBrk="0" hangingPunct="1">
+              <a:defRPr sz="1800" kern="1200">
+                <a:solidFill>
+                  <a:schemeClr val="lt1"/>
+                </a:solidFill>
+                <a:latin typeface="+mn-lt"/>
+                <a:ea typeface="+mn-ea"/>
+                <a:cs typeface="+mn-cs"/>
+              </a:defRPr>
+            </a:lvl6pPr>
+            <a:lvl7pPr marL="2743200" algn="l" defTabSz="457200" rtl="0" eaLnBrk="1" latinLnBrk="0" hangingPunct="1">
+              <a:defRPr sz="1800" kern="1200">
+                <a:solidFill>
+                  <a:schemeClr val="lt1"/>
+                </a:solidFill>
+                <a:latin typeface="+mn-lt"/>
+                <a:ea typeface="+mn-ea"/>
+                <a:cs typeface="+mn-cs"/>
+              </a:defRPr>
+            </a:lvl7pPr>
+            <a:lvl8pPr marL="3200400" algn="l" defTabSz="457200" rtl="0" eaLnBrk="1" latinLnBrk="0" hangingPunct="1">
+              <a:defRPr sz="1800" kern="1200">
+                <a:solidFill>
+                  <a:schemeClr val="lt1"/>
+                </a:solidFill>
+                <a:latin typeface="+mn-lt"/>
+                <a:ea typeface="+mn-ea"/>
+                <a:cs typeface="+mn-cs"/>
+              </a:defRPr>
+            </a:lvl8pPr>
+            <a:lvl9pPr marL="3657600" algn="l" defTabSz="457200" rtl="0" eaLnBrk="1" latinLnBrk="0" hangingPunct="1">
+              <a:defRPr sz="1800" kern="1200">
+                <a:solidFill>
+                  <a:schemeClr val="lt1"/>
+                </a:solidFill>
+                <a:latin typeface="+mn-lt"/>
+                <a:ea typeface="+mn-ea"/>
+                <a:cs typeface="+mn-cs"/>
+              </a:defRPr>
+            </a:lvl9pPr>
+          </a:lstStyle>
+          <a:p>
+            <a:pPr algn="ctr"/>
+            <a:endParaRPr/>
+          </a:p>
+        </p:txBody>
+      </p:sp>
+      <p:sp>
+        <p:nvSpPr>
+          <p:cNvPr id="17" name="テキスト ボックス 16">
+            <a:extLst>
+              <a:ext uri="{FF2B5EF4-FFF2-40B4-BE49-F238E27FC236}">
+                <a16:creationId xmlns:a16="http://schemas.microsoft.com/office/drawing/2014/main" id="{FB3F9375-3FB2-885E-86AA-697F8C035F39}"/>
+              </a:ext>
+            </a:extLst>
+          </p:cNvPr>
+          <p:cNvSpPr txBox="1"/>
+          <p:nvPr/>
+        </p:nvSpPr>
+        <p:spPr>
+          <a:xfrm>
+            <a:off x="608199" y="1250577"/>
+            <a:ext cx="2646878" cy="584775"/>
+          </a:xfrm>
+          <a:prstGeom prst="rect">
+            <a:avLst/>
+          </a:prstGeom>
+          <a:noFill/>
+        </p:spPr>
+        <p:txBody>
+          <a:bodyPr wrap="none" rtlCol="0">
+            <a:spAutoFit/>
+          </a:bodyPr>
+          <a:lstStyle/>
+          <a:p>
+            <a:r>
+              <a:rPr lang="ja-JP" altLang="en-US" sz="3200" b="1" dirty="0"/>
+              <a:t>従来のモデル</a:t>
+            </a:r>
+            <a:endParaRPr kumimoji="1" lang="ja-JP" altLang="en-US" sz="3200" b="1" dirty="0"/>
+          </a:p>
+        </p:txBody>
+      </p:sp>
+      <p:sp>
+        <p:nvSpPr>
+          <p:cNvPr id="19" name="テキスト ボックス 18">
+            <a:extLst>
+              <a:ext uri="{FF2B5EF4-FFF2-40B4-BE49-F238E27FC236}">
+                <a16:creationId xmlns:a16="http://schemas.microsoft.com/office/drawing/2014/main" id="{FB3FB20B-2B0A-339C-4D5D-B8F2D9EB49DA}"/>
+              </a:ext>
+            </a:extLst>
+          </p:cNvPr>
+          <p:cNvSpPr txBox="1"/>
+          <p:nvPr/>
+        </p:nvSpPr>
+        <p:spPr>
+          <a:xfrm>
+            <a:off x="6341128" y="1250577"/>
+            <a:ext cx="4320413" cy="584775"/>
+          </a:xfrm>
+          <a:prstGeom prst="rect">
+            <a:avLst/>
+          </a:prstGeom>
+          <a:noFill/>
+        </p:spPr>
+        <p:txBody>
+          <a:bodyPr wrap="none" rtlCol="0">
+            <a:spAutoFit/>
+          </a:bodyPr>
+          <a:lstStyle/>
+          <a:p>
+            <a:r>
+              <a:rPr lang="en-US" altLang="ja-JP" sz="3200" b="1" dirty="0"/>
+              <a:t>RNN</a:t>
+            </a:r>
+            <a:r>
+              <a:rPr lang="ja-JP" altLang="en-US" sz="3200" b="1" dirty="0"/>
+              <a:t>による代理モデル</a:t>
+            </a:r>
+            <a:endParaRPr kumimoji="1" lang="ja-JP" altLang="en-US" sz="3200" b="1" dirty="0"/>
+          </a:p>
+        </p:txBody>
+      </p:sp>
+      <p:sp>
+        <p:nvSpPr>
+          <p:cNvPr id="21" name="テキスト ボックス 20">
+            <a:extLst>
+              <a:ext uri="{FF2B5EF4-FFF2-40B4-BE49-F238E27FC236}">
+                <a16:creationId xmlns:a16="http://schemas.microsoft.com/office/drawing/2014/main" id="{FFDA4A43-24CB-6786-B926-6629A4D316B9}"/>
+              </a:ext>
+            </a:extLst>
+          </p:cNvPr>
+          <p:cNvSpPr txBox="1"/>
+          <p:nvPr/>
+        </p:nvSpPr>
+        <p:spPr>
+          <a:xfrm>
+            <a:off x="460282" y="2331582"/>
+            <a:ext cx="11455198" cy="523220"/>
+          </a:xfrm>
+          <a:prstGeom prst="rect">
+            <a:avLst/>
+          </a:prstGeom>
+          <a:noFill/>
+        </p:spPr>
+        <p:txBody>
+          <a:bodyPr wrap="square" rtlCol="0">
+            <a:spAutoFit/>
+          </a:bodyPr>
+          <a:lstStyle/>
+          <a:p>
+            <a:r>
+              <a:rPr kumimoji="1" lang="ja-JP" altLang="en-US" sz="2800" b="1" dirty="0"/>
+              <a:t>電流 </a:t>
+            </a:r>
+            <a:r>
+              <a:rPr kumimoji="1" lang="en-US" altLang="ja-JP" sz="2800" b="1" dirty="0">
+                <a:latin typeface="Times New Roman" panose="02020603050405020304" pitchFamily="18" charset="0"/>
+                <a:cs typeface="Times New Roman" panose="02020603050405020304" pitchFamily="18" charset="0"/>
+              </a:rPr>
+              <a:t> </a:t>
+            </a:r>
+            <a:r>
+              <a:rPr kumimoji="1" lang="ja-JP" altLang="en-US" sz="2800" b="1" dirty="0">
+                <a:latin typeface="Times New Roman" panose="02020603050405020304" pitchFamily="18" charset="0"/>
+                <a:cs typeface="Times New Roman" panose="02020603050405020304" pitchFamily="18" charset="0"/>
+              </a:rPr>
+              <a:t>→　　　　　　    </a:t>
+            </a:r>
+            <a:r>
+              <a:rPr lang="ja-JP" altLang="en-US" sz="2800" b="1" dirty="0">
+                <a:latin typeface="Times New Roman" panose="02020603050405020304" pitchFamily="18" charset="0"/>
+                <a:cs typeface="Times New Roman" panose="02020603050405020304" pitchFamily="18" charset="0"/>
+              </a:rPr>
+              <a:t>→ 膜電位</a:t>
+            </a:r>
+            <a:r>
+              <a:rPr kumimoji="1" lang="ja-JP" altLang="en-US" sz="2800" b="1" dirty="0">
+                <a:latin typeface="Times New Roman" panose="02020603050405020304" pitchFamily="18" charset="0"/>
+                <a:cs typeface="Times New Roman" panose="02020603050405020304" pitchFamily="18" charset="0"/>
+              </a:rPr>
+              <a:t>　  </a:t>
+            </a:r>
+            <a:r>
+              <a:rPr lang="ja-JP" altLang="en-US" sz="2800" b="1" dirty="0">
+                <a:latin typeface="Times New Roman" panose="02020603050405020304" pitchFamily="18" charset="0"/>
+                <a:cs typeface="Times New Roman" panose="02020603050405020304" pitchFamily="18" charset="0"/>
+              </a:rPr>
+              <a:t>電流 </a:t>
+            </a:r>
+            <a:r>
+              <a:rPr lang="en-US" altLang="ja-JP" sz="2800" b="1" dirty="0">
+                <a:latin typeface="Times New Roman" panose="02020603050405020304" pitchFamily="18" charset="0"/>
+                <a:cs typeface="Times New Roman" panose="02020603050405020304" pitchFamily="18" charset="0"/>
+              </a:rPr>
+              <a:t> </a:t>
+            </a:r>
+            <a:r>
+              <a:rPr lang="ja-JP" altLang="en-US" sz="2800" b="1" dirty="0">
+                <a:latin typeface="Times New Roman" panose="02020603050405020304" pitchFamily="18" charset="0"/>
+                <a:cs typeface="Times New Roman" panose="02020603050405020304" pitchFamily="18" charset="0"/>
+              </a:rPr>
+              <a:t>→     　　　　　   → 膜電位　 </a:t>
+            </a:r>
+            <a:endParaRPr kumimoji="1" lang="ja-JP" altLang="en-US" sz="2800" b="1" dirty="0">
+              <a:latin typeface="Times New Roman" panose="02020603050405020304" pitchFamily="18" charset="0"/>
+              <a:cs typeface="Times New Roman" panose="02020603050405020304" pitchFamily="18" charset="0"/>
+            </a:endParaRPr>
+          </a:p>
+        </p:txBody>
+      </p:sp>
+      <p:sp>
+        <p:nvSpPr>
+          <p:cNvPr id="22" name="四角形: 角を丸くする 21">
+            <a:extLst>
+              <a:ext uri="{FF2B5EF4-FFF2-40B4-BE49-F238E27FC236}">
+                <a16:creationId xmlns:a16="http://schemas.microsoft.com/office/drawing/2014/main" id="{A919E61B-E6BB-5893-6983-24FE0DECF467}"/>
+              </a:ext>
+            </a:extLst>
+          </p:cNvPr>
+          <p:cNvSpPr/>
+          <p:nvPr/>
+        </p:nvSpPr>
+        <p:spPr>
+          <a:xfrm>
+            <a:off x="1931638" y="2005682"/>
+            <a:ext cx="2219326" cy="1190625"/>
+          </a:xfrm>
+          <a:prstGeom prst="roundRect">
+            <a:avLst/>
           </a:prstGeom>
         </p:spPr>
         <p:style>
@@ -4455,14 +4936,339 @@
           <a:lstStyle/>
           <a:p>
             <a:pPr algn="ctr"/>
-            <a:endParaRPr kumimoji="1" lang="ja-JP" altLang="en-US"/>
+            <a:r>
+              <a:rPr lang="ja-JP" altLang="en-US" sz="2800" b="1" dirty="0"/>
+              <a:t>連立</a:t>
+            </a:r>
+            <a:endParaRPr lang="en-US" altLang="ja-JP" sz="2800" b="1" dirty="0"/>
+          </a:p>
+          <a:p>
+            <a:pPr algn="ctr"/>
+            <a:r>
+              <a:rPr kumimoji="1" lang="ja-JP" altLang="en-US" sz="2800" b="1" dirty="0"/>
+              <a:t>微分方程式</a:t>
+            </a:r>
+          </a:p>
+        </p:txBody>
+      </p:sp>
+      <p:sp>
+        <p:nvSpPr>
+          <p:cNvPr id="26" name="四角形: 角を丸くする 25">
+            <a:extLst>
+              <a:ext uri="{FF2B5EF4-FFF2-40B4-BE49-F238E27FC236}">
+                <a16:creationId xmlns:a16="http://schemas.microsoft.com/office/drawing/2014/main" id="{C4C2D95D-C5F1-DB69-19C1-2DE5100B57E5}"/>
+              </a:ext>
+            </a:extLst>
+          </p:cNvPr>
+          <p:cNvSpPr/>
+          <p:nvPr/>
+        </p:nvSpPr>
+        <p:spPr>
+          <a:xfrm>
+            <a:off x="7665249" y="2005681"/>
+            <a:ext cx="2219326" cy="1190625"/>
+          </a:xfrm>
+          <a:prstGeom prst="roundRect">
+            <a:avLst/>
+          </a:prstGeom>
+        </p:spPr>
+        <p:style>
+          <a:lnRef idx="2">
+            <a:schemeClr val="accent1">
+              <a:shade val="15000"/>
+            </a:schemeClr>
+          </a:lnRef>
+          <a:fillRef idx="1">
+            <a:schemeClr val="accent1"/>
+          </a:fillRef>
+          <a:effectRef idx="0">
+            <a:schemeClr val="accent1"/>
+          </a:effectRef>
+          <a:fontRef idx="minor">
+            <a:schemeClr val="lt1"/>
+          </a:fontRef>
+        </p:style>
+        <p:txBody>
+          <a:bodyPr rtlCol="0" anchor="ctr"/>
+          <a:lstStyle/>
+          <a:p>
+            <a:pPr algn="ctr"/>
+            <a:r>
+              <a:rPr lang="en-US" altLang="ja-JP" sz="2800" b="1" dirty="0"/>
+              <a:t>RNN</a:t>
+            </a:r>
+          </a:p>
+        </p:txBody>
+      </p:sp>
+      <p:sp>
+        <p:nvSpPr>
+          <p:cNvPr id="33" name="矢印: 環状 32">
+            <a:extLst>
+              <a:ext uri="{FF2B5EF4-FFF2-40B4-BE49-F238E27FC236}">
+                <a16:creationId xmlns:a16="http://schemas.microsoft.com/office/drawing/2014/main" id="{416F0E48-7C6E-3674-0C98-A7C92DBF7DDA}"/>
+              </a:ext>
+            </a:extLst>
+          </p:cNvPr>
+          <p:cNvSpPr/>
+          <p:nvPr/>
+        </p:nvSpPr>
+        <p:spPr>
+          <a:xfrm rot="10800000">
+            <a:off x="8300567" y="2914947"/>
+            <a:ext cx="948690" cy="1190625"/>
+          </a:xfrm>
+          <a:prstGeom prst="circularArrow">
+            <a:avLst>
+              <a:gd name="adj1" fmla="val 2901"/>
+              <a:gd name="adj2" fmla="val 1142319"/>
+              <a:gd name="adj3" fmla="val 20552564"/>
+              <a:gd name="adj4" fmla="val 10800000"/>
+              <a:gd name="adj5" fmla="val 12500"/>
+            </a:avLst>
+          </a:prstGeom>
+        </p:spPr>
+        <p:style>
+          <a:lnRef idx="2">
+            <a:schemeClr val="accent1">
+              <a:shade val="15000"/>
+            </a:schemeClr>
+          </a:lnRef>
+          <a:fillRef idx="1">
+            <a:schemeClr val="accent1"/>
+          </a:fillRef>
+          <a:effectRef idx="0">
+            <a:schemeClr val="accent1"/>
+          </a:effectRef>
+          <a:fontRef idx="minor">
+            <a:schemeClr val="lt1"/>
+          </a:fontRef>
+        </p:style>
+        <p:txBody>
+          <a:bodyPr rtlCol="0" anchor="ctr"/>
+          <a:lstStyle/>
+          <a:p>
+            <a:pPr algn="ctr"/>
+            <a:endParaRPr kumimoji="1" lang="ja-JP" altLang="en-US">
+              <a:solidFill>
+                <a:schemeClr val="tx1"/>
+              </a:solidFill>
+            </a:endParaRPr>
+          </a:p>
+        </p:txBody>
+      </p:sp>
+      <p:sp>
+        <p:nvSpPr>
+          <p:cNvPr id="42" name="矢印: 環状 41">
+            <a:extLst>
+              <a:ext uri="{FF2B5EF4-FFF2-40B4-BE49-F238E27FC236}">
+                <a16:creationId xmlns:a16="http://schemas.microsoft.com/office/drawing/2014/main" id="{9DF3C6E1-DC15-E801-C5C6-8A8938DE54AD}"/>
+              </a:ext>
+            </a:extLst>
+          </p:cNvPr>
+          <p:cNvSpPr/>
+          <p:nvPr/>
+        </p:nvSpPr>
+        <p:spPr>
+          <a:xfrm rot="10800000">
+            <a:off x="2468398" y="2967963"/>
+            <a:ext cx="948690" cy="1190625"/>
+          </a:xfrm>
+          <a:prstGeom prst="circularArrow">
+            <a:avLst>
+              <a:gd name="adj1" fmla="val 2901"/>
+              <a:gd name="adj2" fmla="val 1142319"/>
+              <a:gd name="adj3" fmla="val 20552564"/>
+              <a:gd name="adj4" fmla="val 10800000"/>
+              <a:gd name="adj5" fmla="val 12500"/>
+            </a:avLst>
+          </a:prstGeom>
+        </p:spPr>
+        <p:style>
+          <a:lnRef idx="2">
+            <a:schemeClr val="accent1">
+              <a:shade val="15000"/>
+            </a:schemeClr>
+          </a:lnRef>
+          <a:fillRef idx="1">
+            <a:schemeClr val="accent1"/>
+          </a:fillRef>
+          <a:effectRef idx="0">
+            <a:schemeClr val="accent1"/>
+          </a:effectRef>
+          <a:fontRef idx="minor">
+            <a:schemeClr val="lt1"/>
+          </a:fontRef>
+        </p:style>
+        <p:txBody>
+          <a:bodyPr rtlCol="0" anchor="ctr"/>
+          <a:lstStyle/>
+          <a:p>
+            <a:pPr algn="ctr"/>
+            <a:endParaRPr kumimoji="1" lang="ja-JP" altLang="en-US">
+              <a:solidFill>
+                <a:schemeClr val="tx1"/>
+              </a:solidFill>
+            </a:endParaRPr>
+          </a:p>
+        </p:txBody>
+      </p:sp>
+      <p:sp>
+        <p:nvSpPr>
+          <p:cNvPr id="43" name="テキスト ボックス 42">
+            <a:extLst>
+              <a:ext uri="{FF2B5EF4-FFF2-40B4-BE49-F238E27FC236}">
+                <a16:creationId xmlns:a16="http://schemas.microsoft.com/office/drawing/2014/main" id="{373DE6E5-52FA-A96D-7C59-57487062D438}"/>
+              </a:ext>
+            </a:extLst>
+          </p:cNvPr>
+          <p:cNvSpPr txBox="1"/>
+          <p:nvPr/>
+        </p:nvSpPr>
+        <p:spPr>
+          <a:xfrm>
+            <a:off x="8024842" y="3832306"/>
+            <a:ext cx="2764465" cy="2677656"/>
+          </a:xfrm>
+          <a:prstGeom prst="rect">
+            <a:avLst/>
+          </a:prstGeom>
+          <a:noFill/>
+        </p:spPr>
+        <p:txBody>
+          <a:bodyPr wrap="square" rtlCol="0">
+            <a:spAutoFit/>
+          </a:bodyPr>
+          <a:lstStyle/>
+          <a:p>
+            <a:pPr algn="ctr"/>
+            <a:endParaRPr kumimoji="1" lang="en-US" altLang="ja-JP" sz="2800" b="1" dirty="0">
+              <a:latin typeface="+mn-ea"/>
+              <a:cs typeface="Times New Roman" panose="02020603050405020304" pitchFamily="18" charset="0"/>
+            </a:endParaRPr>
+          </a:p>
+          <a:p>
+            <a:r>
+              <a:rPr lang="ja-JP" altLang="en-US" sz="2800" b="1" dirty="0">
+                <a:latin typeface="+mn-ea"/>
+                <a:cs typeface="Times New Roman" panose="02020603050405020304" pitchFamily="18" charset="0"/>
+              </a:rPr>
+              <a:t>隠れ状態</a:t>
+            </a:r>
+            <a:endParaRPr kumimoji="1" lang="en-US" altLang="ja-JP" sz="2800" b="1" dirty="0">
+              <a:latin typeface="+mn-ea"/>
+              <a:cs typeface="Times New Roman" panose="02020603050405020304" pitchFamily="18" charset="0"/>
+            </a:endParaRPr>
+          </a:p>
+          <a:p>
+            <a:endParaRPr kumimoji="1" lang="en-US" altLang="ja-JP" sz="2800" dirty="0">
+              <a:latin typeface="Times New Roman" panose="02020603050405020304" pitchFamily="18" charset="0"/>
+              <a:cs typeface="Times New Roman" panose="02020603050405020304" pitchFamily="18" charset="0"/>
+            </a:endParaRPr>
+          </a:p>
+          <a:p>
+            <a:endParaRPr kumimoji="1" lang="en-US" altLang="ja-JP" sz="2800" dirty="0">
+              <a:latin typeface="Times New Roman" panose="02020603050405020304" pitchFamily="18" charset="0"/>
+              <a:cs typeface="Times New Roman" panose="02020603050405020304" pitchFamily="18" charset="0"/>
+            </a:endParaRPr>
+          </a:p>
+          <a:p>
+            <a:endParaRPr lang="en-US" altLang="ja-JP" sz="2800" dirty="0">
+              <a:latin typeface="Times New Roman" panose="02020603050405020304" pitchFamily="18" charset="0"/>
+              <a:cs typeface="Times New Roman" panose="02020603050405020304" pitchFamily="18" charset="0"/>
+            </a:endParaRPr>
+          </a:p>
+          <a:p>
+            <a:endParaRPr kumimoji="1" lang="ja-JP" altLang="en-US" sz="2800" dirty="0">
+              <a:latin typeface="Times New Roman" panose="02020603050405020304" pitchFamily="18" charset="0"/>
+              <a:cs typeface="Times New Roman" panose="02020603050405020304" pitchFamily="18" charset="0"/>
+            </a:endParaRPr>
+          </a:p>
+        </p:txBody>
+      </p:sp>
+      <p:sp>
+        <p:nvSpPr>
+          <p:cNvPr id="45" name="テキスト ボックス 44">
+            <a:extLst>
+              <a:ext uri="{FF2B5EF4-FFF2-40B4-BE49-F238E27FC236}">
+                <a16:creationId xmlns:a16="http://schemas.microsoft.com/office/drawing/2014/main" id="{457098D8-FA26-AFAC-039F-047A965FE8DB}"/>
+              </a:ext>
+            </a:extLst>
+          </p:cNvPr>
+          <p:cNvSpPr txBox="1"/>
+          <p:nvPr/>
+        </p:nvSpPr>
+        <p:spPr>
+          <a:xfrm>
+            <a:off x="2187255" y="3907343"/>
+            <a:ext cx="2764465" cy="2677656"/>
+          </a:xfrm>
+          <a:prstGeom prst="rect">
+            <a:avLst/>
+          </a:prstGeom>
+          <a:noFill/>
+        </p:spPr>
+        <p:txBody>
+          <a:bodyPr wrap="square" rtlCol="0">
+            <a:spAutoFit/>
+          </a:bodyPr>
+          <a:lstStyle/>
+          <a:p>
+            <a:pPr algn="ctr"/>
+            <a:endParaRPr kumimoji="1" lang="en-US" altLang="ja-JP" sz="2800" b="1" dirty="0">
+              <a:latin typeface="+mn-ea"/>
+              <a:cs typeface="Times New Roman" panose="02020603050405020304" pitchFamily="18" charset="0"/>
+            </a:endParaRPr>
+          </a:p>
+          <a:p>
+            <a:r>
+              <a:rPr lang="ja-JP" altLang="en-US" sz="2800" b="1" dirty="0">
+                <a:latin typeface="+mn-ea"/>
+                <a:cs typeface="Times New Roman" panose="02020603050405020304" pitchFamily="18" charset="0"/>
+              </a:rPr>
+              <a:t>状態</a:t>
+            </a:r>
+            <a:r>
+              <a:rPr kumimoji="1" lang="ja-JP" altLang="en-US" sz="2800" b="1" dirty="0">
+                <a:latin typeface="+mn-ea"/>
+                <a:cs typeface="Times New Roman" panose="02020603050405020304" pitchFamily="18" charset="0"/>
+              </a:rPr>
+              <a:t>変数</a:t>
+            </a:r>
+            <a:endParaRPr kumimoji="1" lang="en-US" altLang="ja-JP" sz="2800" b="1" dirty="0">
+              <a:latin typeface="+mn-ea"/>
+              <a:cs typeface="Times New Roman" panose="02020603050405020304" pitchFamily="18" charset="0"/>
+            </a:endParaRPr>
+          </a:p>
+          <a:p>
+            <a:endParaRPr kumimoji="1" lang="en-US" altLang="ja-JP" sz="2800" dirty="0">
+              <a:latin typeface="Times New Roman" panose="02020603050405020304" pitchFamily="18" charset="0"/>
+              <a:cs typeface="Times New Roman" panose="02020603050405020304" pitchFamily="18" charset="0"/>
+            </a:endParaRPr>
+          </a:p>
+          <a:p>
+            <a:endParaRPr kumimoji="1" lang="en-US" altLang="ja-JP" sz="2800" dirty="0">
+              <a:latin typeface="Times New Roman" panose="02020603050405020304" pitchFamily="18" charset="0"/>
+              <a:cs typeface="Times New Roman" panose="02020603050405020304" pitchFamily="18" charset="0"/>
+            </a:endParaRPr>
+          </a:p>
+          <a:p>
+            <a:endParaRPr lang="en-US" altLang="ja-JP" sz="2800" dirty="0">
+              <a:latin typeface="Times New Roman" panose="02020603050405020304" pitchFamily="18" charset="0"/>
+              <a:cs typeface="Times New Roman" panose="02020603050405020304" pitchFamily="18" charset="0"/>
+            </a:endParaRPr>
+          </a:p>
+          <a:p>
+            <a:endParaRPr kumimoji="1" lang="ja-JP" altLang="en-US" sz="2800" dirty="0">
+              <a:latin typeface="Times New Roman" panose="02020603050405020304" pitchFamily="18" charset="0"/>
+              <a:cs typeface="Times New Roman" panose="02020603050405020304" pitchFamily="18" charset="0"/>
+            </a:endParaRPr>
           </a:p>
         </p:txBody>
       </p:sp>
     </p:spTree>
     <p:extLst>
       <p:ext uri="{BB962C8B-B14F-4D97-AF65-F5344CB8AC3E}">
-        <p14:creationId xmlns:p14="http://schemas.microsoft.com/office/powerpoint/2010/main" val="3133935785"/>
+        <p14:creationId xmlns:p14="http://schemas.microsoft.com/office/powerpoint/2010/main" val="2403056092"/>
       </p:ext>
     </p:extLst>
   </p:cSld>
@@ -4494,7 +5300,7 @@
           <p:cNvPr id="2" name="タイトル 1">
             <a:extLst>
               <a:ext uri="{FF2B5EF4-FFF2-40B4-BE49-F238E27FC236}">
-                <a16:creationId xmlns:a16="http://schemas.microsoft.com/office/drawing/2014/main" id="{F1D0F3C7-78AA-9462-A6F8-8B4CCCE68229}"/>
+                <a16:creationId xmlns:a16="http://schemas.microsoft.com/office/drawing/2014/main" id="{48F62566-BE55-5AA4-3F85-AAF7F6D339D9}"/>
               </a:ext>
             </a:extLst>
           </p:cNvPr>
@@ -4511,8 +5317,16 @@
           <a:lstStyle/>
           <a:p>
             <a:r>
+              <a:rPr kumimoji="1" lang="ja-JP" altLang="en-US" dirty="0"/>
+              <a:t>なぜ</a:t>
+            </a:r>
+            <a:r>
+              <a:rPr kumimoji="1" lang="en-US" altLang="ja-JP" dirty="0"/>
+              <a:t>RNN</a:t>
+            </a:r>
+            <a:r>
               <a:rPr lang="ja-JP" altLang="en-US" dirty="0"/>
-              <a:t>基になる数理モデル</a:t>
+              <a:t>？</a:t>
             </a:r>
             <a:endParaRPr kumimoji="1" lang="ja-JP" altLang="en-US" dirty="0"/>
           </a:p>
@@ -4520,32 +5334,26 @@
       </p:sp>
       <p:sp>
         <p:nvSpPr>
-          <p:cNvPr id="75" name="Rounded Rectangle 3">
-            <a:extLst>
-              <a:ext uri="{FF2B5EF4-FFF2-40B4-BE49-F238E27FC236}">
-                <a16:creationId xmlns:a16="http://schemas.microsoft.com/office/drawing/2014/main" id="{2DAE8BD0-0FAD-D7AF-E0C3-EDD94975E3D3}"/>
-              </a:ext>
-            </a:extLst>
-          </p:cNvPr>
+          <p:cNvPr id="3" name="Rounded Rectangle 2"/>
           <p:cNvSpPr/>
           <p:nvPr/>
         </p:nvSpPr>
         <p:spPr>
           <a:xfrm>
-            <a:off x="6173586" y="1080247"/>
-            <a:ext cx="5741894" cy="5181600"/>
+            <a:off x="457200" y="1005840"/>
+            <a:ext cx="5532120" cy="4823460"/>
           </a:xfrm>
           <a:prstGeom prst="roundRect">
             <a:avLst>
-              <a:gd name="adj" fmla="val 2205"/>
+              <a:gd name="adj" fmla="val 4000"/>
             </a:avLst>
           </a:prstGeom>
           <a:solidFill>
-            <a:srgbClr val="F0F9FF"/>
+            <a:schemeClr val="bg1"/>
           </a:solidFill>
           <a:ln w="19050">
             <a:solidFill>
-              <a:schemeClr val="accent1"/>
+              <a:srgbClr val="156082"/>
             </a:solidFill>
           </a:ln>
           <a:effectLst/>
@@ -4566,133 +5374,443 @@
         </p:style>
         <p:txBody>
           <a:bodyPr rtlCol="0" anchor="ctr"/>
-          <a:lstStyle>
-            <a:defPPr>
-              <a:defRPr lang="en-US"/>
-            </a:defPPr>
-            <a:lvl1pPr marL="0" algn="l" defTabSz="457200" rtl="0" eaLnBrk="1" latinLnBrk="0" hangingPunct="1">
-              <a:defRPr sz="1800" kern="1200">
-                <a:solidFill>
-                  <a:schemeClr val="lt1"/>
-                </a:solidFill>
-                <a:latin typeface="+mn-lt"/>
-                <a:ea typeface="+mn-ea"/>
-                <a:cs typeface="+mn-cs"/>
-              </a:defRPr>
-            </a:lvl1pPr>
-            <a:lvl2pPr marL="457200" algn="l" defTabSz="457200" rtl="0" eaLnBrk="1" latinLnBrk="0" hangingPunct="1">
-              <a:defRPr sz="1800" kern="1200">
-                <a:solidFill>
-                  <a:schemeClr val="lt1"/>
-                </a:solidFill>
-                <a:latin typeface="+mn-lt"/>
-                <a:ea typeface="+mn-ea"/>
-                <a:cs typeface="+mn-cs"/>
-              </a:defRPr>
-            </a:lvl2pPr>
-            <a:lvl3pPr marL="914400" algn="l" defTabSz="457200" rtl="0" eaLnBrk="1" latinLnBrk="0" hangingPunct="1">
-              <a:defRPr sz="1800" kern="1200">
-                <a:solidFill>
-                  <a:schemeClr val="lt1"/>
-                </a:solidFill>
-                <a:latin typeface="+mn-lt"/>
-                <a:ea typeface="+mn-ea"/>
-                <a:cs typeface="+mn-cs"/>
-              </a:defRPr>
-            </a:lvl3pPr>
-            <a:lvl4pPr marL="1371600" algn="l" defTabSz="457200" rtl="0" eaLnBrk="1" latinLnBrk="0" hangingPunct="1">
-              <a:defRPr sz="1800" kern="1200">
-                <a:solidFill>
-                  <a:schemeClr val="lt1"/>
-                </a:solidFill>
-                <a:latin typeface="+mn-lt"/>
-                <a:ea typeface="+mn-ea"/>
-                <a:cs typeface="+mn-cs"/>
-              </a:defRPr>
-            </a:lvl4pPr>
-            <a:lvl5pPr marL="1828800" algn="l" defTabSz="457200" rtl="0" eaLnBrk="1" latinLnBrk="0" hangingPunct="1">
-              <a:defRPr sz="1800" kern="1200">
-                <a:solidFill>
-                  <a:schemeClr val="lt1"/>
-                </a:solidFill>
-                <a:latin typeface="+mn-lt"/>
-                <a:ea typeface="+mn-ea"/>
-                <a:cs typeface="+mn-cs"/>
-              </a:defRPr>
-            </a:lvl5pPr>
-            <a:lvl6pPr marL="2286000" algn="l" defTabSz="457200" rtl="0" eaLnBrk="1" latinLnBrk="0" hangingPunct="1">
-              <a:defRPr sz="1800" kern="1200">
-                <a:solidFill>
-                  <a:schemeClr val="lt1"/>
-                </a:solidFill>
-                <a:latin typeface="+mn-lt"/>
-                <a:ea typeface="+mn-ea"/>
-                <a:cs typeface="+mn-cs"/>
-              </a:defRPr>
-            </a:lvl6pPr>
-            <a:lvl7pPr marL="2743200" algn="l" defTabSz="457200" rtl="0" eaLnBrk="1" latinLnBrk="0" hangingPunct="1">
-              <a:defRPr sz="1800" kern="1200">
-                <a:solidFill>
-                  <a:schemeClr val="lt1"/>
-                </a:solidFill>
-                <a:latin typeface="+mn-lt"/>
-                <a:ea typeface="+mn-ea"/>
-                <a:cs typeface="+mn-cs"/>
-              </a:defRPr>
-            </a:lvl7pPr>
-            <a:lvl8pPr marL="3200400" algn="l" defTabSz="457200" rtl="0" eaLnBrk="1" latinLnBrk="0" hangingPunct="1">
-              <a:defRPr sz="1800" kern="1200">
-                <a:solidFill>
-                  <a:schemeClr val="lt1"/>
-                </a:solidFill>
-                <a:latin typeface="+mn-lt"/>
-                <a:ea typeface="+mn-ea"/>
-                <a:cs typeface="+mn-cs"/>
-              </a:defRPr>
-            </a:lvl8pPr>
-            <a:lvl9pPr marL="3657600" algn="l" defTabSz="457200" rtl="0" eaLnBrk="1" latinLnBrk="0" hangingPunct="1">
-              <a:defRPr sz="1800" kern="1200">
-                <a:solidFill>
-                  <a:schemeClr val="lt1"/>
-                </a:solidFill>
-                <a:latin typeface="+mn-lt"/>
-                <a:ea typeface="+mn-ea"/>
-                <a:cs typeface="+mn-cs"/>
-              </a:defRPr>
-            </a:lvl9pPr>
-          </a:lstStyle>
+          <a:lstStyle/>
           <a:p>
             <a:pPr algn="ctr"/>
-            <a:endParaRPr dirty="0"/>
-          </a:p>
-        </p:txBody>
-      </p:sp>
-      <p:sp>
-        <p:nvSpPr>
-          <p:cNvPr id="77" name="Rounded Rectangle 3">
-            <a:extLst>
-              <a:ext uri="{FF2B5EF4-FFF2-40B4-BE49-F238E27FC236}">
-                <a16:creationId xmlns:a16="http://schemas.microsoft.com/office/drawing/2014/main" id="{4916DD34-FC39-3F73-8607-B7C380D38404}"/>
-              </a:ext>
-            </a:extLst>
-          </p:cNvPr>
+            <a:endParaRPr/>
+          </a:p>
+        </p:txBody>
+      </p:sp>
+      <p:sp>
+        <p:nvSpPr>
+          <p:cNvPr id="5" name="TextBox 4"/>
+          <p:cNvSpPr txBox="1"/>
+          <p:nvPr/>
+        </p:nvSpPr>
+        <p:spPr>
+          <a:xfrm>
+            <a:off x="685800" y="1165684"/>
+            <a:ext cx="4526279" cy="523220"/>
+          </a:xfrm>
+          <a:prstGeom prst="rect">
+            <a:avLst/>
+          </a:prstGeom>
+          <a:noFill/>
+        </p:spPr>
+        <p:txBody>
+          <a:bodyPr wrap="square" lIns="45720" rIns="45720" anchor="ctr">
+            <a:spAutoFit/>
+          </a:bodyPr>
+          <a:lstStyle/>
+          <a:p>
+            <a:pPr algn="l">
+              <a:spcAft>
+                <a:spcPts val="600"/>
+              </a:spcAft>
+            </a:pPr>
+            <a:r>
+              <a:rPr lang="ja-JP" altLang="en-US" sz="2800" b="1" dirty="0">
+                <a:latin typeface="+mn-ea"/>
+              </a:rPr>
+              <a:t>どちらも内部状態を保持</a:t>
+            </a:r>
+            <a:endParaRPr sz="2800" b="1" dirty="0">
+              <a:latin typeface="+mn-ea"/>
+              <a:ea typeface="+mn-ea"/>
+            </a:endParaRPr>
+          </a:p>
+        </p:txBody>
+      </p:sp>
+      <p:sp>
+        <p:nvSpPr>
+          <p:cNvPr id="6" name="TextBox 5"/>
+          <p:cNvSpPr txBox="1"/>
+          <p:nvPr/>
+        </p:nvSpPr>
+        <p:spPr>
+          <a:xfrm>
+            <a:off x="685800" y="1874519"/>
+            <a:ext cx="5120640" cy="820738"/>
+          </a:xfrm>
+          <a:prstGeom prst="rect">
+            <a:avLst/>
+          </a:prstGeom>
+          <a:noFill/>
+        </p:spPr>
+        <p:txBody>
+          <a:bodyPr wrap="square" lIns="45720" rIns="45720" anchor="t">
+            <a:spAutoFit/>
+          </a:bodyPr>
+          <a:lstStyle/>
+          <a:p>
+            <a:pPr algn="l">
+              <a:spcAft>
+                <a:spcPts val="400"/>
+              </a:spcAft>
+            </a:pPr>
+            <a:r>
+              <a:rPr sz="2400" b="1" dirty="0" err="1">
+                <a:solidFill>
+                  <a:srgbClr val="1A1A1A"/>
+                </a:solidFill>
+                <a:latin typeface="+mn-ea"/>
+                <a:ea typeface="+mn-ea"/>
+              </a:rPr>
+              <a:t>膜電位は入力の履歴に依存する</a:t>
+            </a:r>
+            <a:endParaRPr sz="2400" b="1" dirty="0">
+              <a:solidFill>
+                <a:srgbClr val="1A1A1A"/>
+              </a:solidFill>
+              <a:latin typeface="+mn-ea"/>
+              <a:ea typeface="+mn-ea"/>
+            </a:endParaRPr>
+          </a:p>
+          <a:p>
+            <a:pPr algn="l">
+              <a:spcAft>
+                <a:spcPts val="400"/>
+              </a:spcAft>
+            </a:pPr>
+            <a:r>
+              <a:rPr sz="2000" b="1" dirty="0" err="1">
+                <a:solidFill>
+                  <a:srgbClr val="595959"/>
+                </a:solidFill>
+                <a:latin typeface="+mn-ea"/>
+                <a:ea typeface="+mn-ea"/>
+              </a:rPr>
+              <a:t>例：不応期，閾値下での電位の蓄積</a:t>
+            </a:r>
+            <a:endParaRPr sz="2000" b="1" dirty="0">
+              <a:solidFill>
+                <a:srgbClr val="595959"/>
+              </a:solidFill>
+              <a:latin typeface="+mn-ea"/>
+              <a:ea typeface="+mn-ea"/>
+            </a:endParaRPr>
+          </a:p>
+        </p:txBody>
+      </p:sp>
+      <p:sp>
+        <p:nvSpPr>
+          <p:cNvPr id="7" name="TextBox 6"/>
+          <p:cNvSpPr txBox="1"/>
+          <p:nvPr/>
+        </p:nvSpPr>
+        <p:spPr>
+          <a:xfrm>
+            <a:off x="685800" y="2697480"/>
+            <a:ext cx="5120640" cy="1938992"/>
+          </a:xfrm>
+          <a:prstGeom prst="rect">
+            <a:avLst/>
+          </a:prstGeom>
+          <a:noFill/>
+        </p:spPr>
+        <p:txBody>
+          <a:bodyPr wrap="square" lIns="45720" rIns="45720" anchor="t">
+            <a:spAutoFit/>
+          </a:bodyPr>
+          <a:lstStyle/>
+          <a:p>
+            <a:pPr algn="l">
+              <a:spcAft>
+                <a:spcPts val="0"/>
+              </a:spcAft>
+            </a:pPr>
+            <a:r>
+              <a:rPr sz="2400" b="1" dirty="0">
+                <a:latin typeface="+mn-ea"/>
+                <a:ea typeface="+mn-ea"/>
+              </a:rPr>
+              <a:t>→ </a:t>
+            </a:r>
+            <a:r>
+              <a:rPr lang="ja-JP" altLang="en-US" sz="2400" b="1" dirty="0">
+                <a:latin typeface="+mn-ea"/>
+                <a:ea typeface="+mn-ea"/>
+              </a:rPr>
+              <a:t>微分</a:t>
+            </a:r>
+            <a:r>
+              <a:rPr lang="en-US" altLang="ja-JP" sz="2400" b="1" dirty="0">
+                <a:latin typeface="+mn-ea"/>
+                <a:ea typeface="+mn-ea"/>
+              </a:rPr>
+              <a:t>eq</a:t>
+            </a:r>
+            <a:r>
+              <a:rPr sz="2400" b="1" dirty="0">
+                <a:latin typeface="+mn-ea"/>
+                <a:ea typeface="+mn-ea"/>
+              </a:rPr>
+              <a:t> </a:t>
+            </a:r>
+            <a:r>
+              <a:rPr lang="ja-JP" altLang="en-US" sz="2400" b="1" dirty="0">
+                <a:latin typeface="+mn-ea"/>
+                <a:ea typeface="+mn-ea"/>
+              </a:rPr>
+              <a:t>による積分</a:t>
+            </a:r>
+            <a:r>
+              <a:rPr sz="2400" b="1" dirty="0">
+                <a:latin typeface="+mn-ea"/>
+                <a:ea typeface="+mn-ea"/>
+              </a:rPr>
+              <a:t>も RNN も</a:t>
+            </a:r>
+            <a:endParaRPr lang="en-US" sz="2400" b="1" dirty="0">
+              <a:latin typeface="+mn-ea"/>
+              <a:ea typeface="+mn-ea"/>
+            </a:endParaRPr>
+          </a:p>
+          <a:p>
+            <a:pPr algn="l">
+              <a:spcAft>
+                <a:spcPts val="0"/>
+              </a:spcAft>
+            </a:pPr>
+            <a:r>
+              <a:rPr lang="ja-JP" altLang="en-US" sz="2400" b="1" dirty="0">
+                <a:latin typeface="+mn-ea"/>
+              </a:rPr>
+              <a:t>　内部状態を保持</a:t>
+            </a:r>
+            <a:r>
+              <a:rPr sz="2400" b="1" dirty="0">
+                <a:latin typeface="+mn-ea"/>
+                <a:ea typeface="+mn-ea"/>
+              </a:rPr>
+              <a:t>，1 </a:t>
+            </a:r>
+            <a:r>
+              <a:rPr sz="2400" b="1" dirty="0" err="1">
+                <a:latin typeface="+mn-ea"/>
+                <a:ea typeface="+mn-ea"/>
+              </a:rPr>
+              <a:t>ステップず</a:t>
+            </a:r>
+            <a:r>
+              <a:rPr lang="ja-JP" altLang="en-US" sz="2400" b="1" dirty="0">
+                <a:latin typeface="+mn-ea"/>
+                <a:ea typeface="+mn-ea"/>
+              </a:rPr>
+              <a:t>つ</a:t>
+            </a:r>
+            <a:endParaRPr lang="en-US" sz="2400" b="1" dirty="0">
+              <a:latin typeface="+mn-ea"/>
+              <a:ea typeface="+mn-ea"/>
+            </a:endParaRPr>
+          </a:p>
+          <a:p>
+            <a:pPr algn="l">
+              <a:spcAft>
+                <a:spcPts val="0"/>
+              </a:spcAft>
+            </a:pPr>
+            <a:r>
+              <a:rPr lang="ja-JP" altLang="en-US" sz="2400" b="1" dirty="0">
+                <a:latin typeface="+mn-ea"/>
+              </a:rPr>
+              <a:t>　</a:t>
+            </a:r>
+            <a:r>
+              <a:rPr sz="2400" b="1" dirty="0" err="1">
+                <a:latin typeface="+mn-ea"/>
+                <a:ea typeface="+mn-ea"/>
+              </a:rPr>
+              <a:t>更新する</a:t>
+            </a:r>
+            <a:endParaRPr lang="en-US" sz="2400" b="1" dirty="0">
+              <a:latin typeface="+mn-ea"/>
+              <a:ea typeface="+mn-ea"/>
+            </a:endParaRPr>
+          </a:p>
+          <a:p>
+            <a:pPr algn="l">
+              <a:spcAft>
+                <a:spcPts val="0"/>
+              </a:spcAft>
+            </a:pPr>
+            <a:endParaRPr lang="en-US" sz="2400" b="1" dirty="0">
+              <a:latin typeface="+mn-ea"/>
+              <a:ea typeface="+mn-ea"/>
+            </a:endParaRPr>
+          </a:p>
+          <a:p>
+            <a:pPr algn="l">
+              <a:spcAft>
+                <a:spcPts val="0"/>
+              </a:spcAft>
+            </a:pPr>
+            <a:r>
+              <a:rPr lang="ja-JP" altLang="en-US" sz="2400" b="1" dirty="0">
+                <a:latin typeface="+mn-ea"/>
+              </a:rPr>
+              <a:t>内部状態</a:t>
+            </a:r>
+            <a:endParaRPr sz="2400" b="1" dirty="0">
+              <a:latin typeface="+mn-ea"/>
+              <a:ea typeface="+mn-ea"/>
+            </a:endParaRPr>
+          </a:p>
+        </p:txBody>
+      </p:sp>
+      <p:sp>
+        <p:nvSpPr>
+          <p:cNvPr id="8" name="TextBox 7"/>
+          <p:cNvSpPr txBox="1"/>
+          <p:nvPr/>
+        </p:nvSpPr>
+        <p:spPr>
+          <a:xfrm>
+            <a:off x="779318" y="4591813"/>
+            <a:ext cx="914400" cy="369332"/>
+          </a:xfrm>
+          <a:prstGeom prst="rect">
+            <a:avLst/>
+          </a:prstGeom>
+          <a:noFill/>
+        </p:spPr>
+        <p:txBody>
+          <a:bodyPr wrap="square" lIns="45720" rIns="45720" anchor="ctr">
+            <a:spAutoFit/>
+          </a:bodyPr>
+          <a:lstStyle/>
+          <a:p>
+            <a:pPr algn="l">
+              <a:spcAft>
+                <a:spcPts val="600"/>
+              </a:spcAft>
+            </a:pPr>
+            <a:r>
+              <a:rPr lang="ja-JP" altLang="en-US" sz="1600" b="1" dirty="0">
+                <a:latin typeface="+mn-ea"/>
+                <a:ea typeface="+mn-ea"/>
+              </a:rPr>
+              <a:t>微分</a:t>
+            </a:r>
+            <a:r>
+              <a:rPr lang="en-US" altLang="ja-JP" b="1" dirty="0">
+                <a:latin typeface="+mn-ea"/>
+                <a:ea typeface="+mn-ea"/>
+              </a:rPr>
+              <a:t>eq</a:t>
+            </a:r>
+            <a:endParaRPr sz="1600" b="1" dirty="0">
+              <a:latin typeface="+mn-ea"/>
+              <a:ea typeface="+mn-ea"/>
+            </a:endParaRPr>
+          </a:p>
+        </p:txBody>
+      </p:sp>
+      <p:pic>
+        <p:nvPicPr>
+          <p:cNvPr id="9" name="Picture 8" descr="eq_why_hh.png"/>
+          <p:cNvPicPr>
+            <a:picLocks noChangeAspect="1"/>
+          </p:cNvPicPr>
+          <p:nvPr/>
+        </p:nvPicPr>
+        <p:blipFill>
+          <a:blip r:embed="rId2"/>
+          <a:stretch>
+            <a:fillRect/>
+          </a:stretch>
+        </p:blipFill>
+        <p:spPr>
+          <a:xfrm>
+            <a:off x="1667860" y="4563064"/>
+            <a:ext cx="3297836" cy="476926"/>
+          </a:xfrm>
+          <a:prstGeom prst="rect">
+            <a:avLst/>
+          </a:prstGeom>
+        </p:spPr>
+      </p:pic>
+      <p:sp>
+        <p:nvSpPr>
+          <p:cNvPr id="10" name="TextBox 9"/>
+          <p:cNvSpPr txBox="1"/>
+          <p:nvPr/>
+        </p:nvSpPr>
+        <p:spPr>
+          <a:xfrm>
+            <a:off x="779318" y="5247282"/>
+            <a:ext cx="685800" cy="338554"/>
+          </a:xfrm>
+          <a:prstGeom prst="rect">
+            <a:avLst/>
+          </a:prstGeom>
+          <a:noFill/>
+        </p:spPr>
+        <p:txBody>
+          <a:bodyPr wrap="square" lIns="45720" rIns="45720" anchor="ctr">
+            <a:spAutoFit/>
+          </a:bodyPr>
+          <a:lstStyle/>
+          <a:p>
+            <a:pPr algn="l">
+              <a:spcAft>
+                <a:spcPts val="600"/>
+              </a:spcAft>
+            </a:pPr>
+            <a:r>
+              <a:rPr sz="1600" b="1" dirty="0">
+                <a:latin typeface="+mn-ea"/>
+                <a:ea typeface="+mn-ea"/>
+              </a:rPr>
+              <a:t>RNN</a:t>
+            </a:r>
+          </a:p>
+        </p:txBody>
+      </p:sp>
+      <p:pic>
+        <p:nvPicPr>
+          <p:cNvPr id="11" name="Picture 10" descr="eq_why_rnn.png"/>
+          <p:cNvPicPr>
+            <a:picLocks noChangeAspect="1"/>
+          </p:cNvPicPr>
+          <p:nvPr/>
+        </p:nvPicPr>
+        <p:blipFill>
+          <a:blip r:embed="rId3"/>
+          <a:stretch>
+            <a:fillRect/>
+          </a:stretch>
+        </p:blipFill>
+        <p:spPr>
+          <a:xfrm>
+            <a:off x="1667860" y="5215390"/>
+            <a:ext cx="3248369" cy="476926"/>
+          </a:xfrm>
+          <a:prstGeom prst="rect">
+            <a:avLst/>
+          </a:prstGeom>
+        </p:spPr>
+      </p:pic>
+      <p:sp>
+        <p:nvSpPr>
+          <p:cNvPr id="12" name="Rounded Rectangle 11"/>
           <p:cNvSpPr/>
           <p:nvPr/>
         </p:nvSpPr>
         <p:spPr>
           <a:xfrm>
-            <a:off x="218806" y="1080247"/>
-            <a:ext cx="5741894" cy="5181600"/>
+            <a:off x="6217920" y="1005840"/>
+            <a:ext cx="5532120" cy="4823460"/>
           </a:xfrm>
           <a:prstGeom prst="roundRect">
             <a:avLst>
-              <a:gd name="adj" fmla="val 2205"/>
+              <a:gd name="adj" fmla="val 4000"/>
             </a:avLst>
           </a:prstGeom>
           <a:noFill/>
           <a:ln w="19050">
             <a:solidFill>
-              <a:schemeClr val="accent1"/>
+              <a:srgbClr val="156082"/>
             </a:solidFill>
           </a:ln>
           <a:effectLst/>
@@ -4713,101 +5831,7 @@
         </p:style>
         <p:txBody>
           <a:bodyPr rtlCol="0" anchor="ctr"/>
-          <a:lstStyle>
-            <a:defPPr>
-              <a:defRPr lang="en-US"/>
-            </a:defPPr>
-            <a:lvl1pPr marL="0" algn="l" defTabSz="457200" rtl="0" eaLnBrk="1" latinLnBrk="0" hangingPunct="1">
-              <a:defRPr sz="1800" kern="1200">
-                <a:solidFill>
-                  <a:schemeClr val="lt1"/>
-                </a:solidFill>
-                <a:latin typeface="+mn-lt"/>
-                <a:ea typeface="+mn-ea"/>
-                <a:cs typeface="+mn-cs"/>
-              </a:defRPr>
-            </a:lvl1pPr>
-            <a:lvl2pPr marL="457200" algn="l" defTabSz="457200" rtl="0" eaLnBrk="1" latinLnBrk="0" hangingPunct="1">
-              <a:defRPr sz="1800" kern="1200">
-                <a:solidFill>
-                  <a:schemeClr val="lt1"/>
-                </a:solidFill>
-                <a:latin typeface="+mn-lt"/>
-                <a:ea typeface="+mn-ea"/>
-                <a:cs typeface="+mn-cs"/>
-              </a:defRPr>
-            </a:lvl2pPr>
-            <a:lvl3pPr marL="914400" algn="l" defTabSz="457200" rtl="0" eaLnBrk="1" latinLnBrk="0" hangingPunct="1">
-              <a:defRPr sz="1800" kern="1200">
-                <a:solidFill>
-                  <a:schemeClr val="lt1"/>
-                </a:solidFill>
-                <a:latin typeface="+mn-lt"/>
-                <a:ea typeface="+mn-ea"/>
-                <a:cs typeface="+mn-cs"/>
-              </a:defRPr>
-            </a:lvl3pPr>
-            <a:lvl4pPr marL="1371600" algn="l" defTabSz="457200" rtl="0" eaLnBrk="1" latinLnBrk="0" hangingPunct="1">
-              <a:defRPr sz="1800" kern="1200">
-                <a:solidFill>
-                  <a:schemeClr val="lt1"/>
-                </a:solidFill>
-                <a:latin typeface="+mn-lt"/>
-                <a:ea typeface="+mn-ea"/>
-                <a:cs typeface="+mn-cs"/>
-              </a:defRPr>
-            </a:lvl4pPr>
-            <a:lvl5pPr marL="1828800" algn="l" defTabSz="457200" rtl="0" eaLnBrk="1" latinLnBrk="0" hangingPunct="1">
-              <a:defRPr sz="1800" kern="1200">
-                <a:solidFill>
-                  <a:schemeClr val="lt1"/>
-                </a:solidFill>
-                <a:latin typeface="+mn-lt"/>
-                <a:ea typeface="+mn-ea"/>
-                <a:cs typeface="+mn-cs"/>
-              </a:defRPr>
-            </a:lvl5pPr>
-            <a:lvl6pPr marL="2286000" algn="l" defTabSz="457200" rtl="0" eaLnBrk="1" latinLnBrk="0" hangingPunct="1">
-              <a:defRPr sz="1800" kern="1200">
-                <a:solidFill>
-                  <a:schemeClr val="lt1"/>
-                </a:solidFill>
-                <a:latin typeface="+mn-lt"/>
-                <a:ea typeface="+mn-ea"/>
-                <a:cs typeface="+mn-cs"/>
-              </a:defRPr>
-            </a:lvl6pPr>
-            <a:lvl7pPr marL="2743200" algn="l" defTabSz="457200" rtl="0" eaLnBrk="1" latinLnBrk="0" hangingPunct="1">
-              <a:defRPr sz="1800" kern="1200">
-                <a:solidFill>
-                  <a:schemeClr val="lt1"/>
-                </a:solidFill>
-                <a:latin typeface="+mn-lt"/>
-                <a:ea typeface="+mn-ea"/>
-                <a:cs typeface="+mn-cs"/>
-              </a:defRPr>
-            </a:lvl7pPr>
-            <a:lvl8pPr marL="3200400" algn="l" defTabSz="457200" rtl="0" eaLnBrk="1" latinLnBrk="0" hangingPunct="1">
-              <a:defRPr sz="1800" kern="1200">
-                <a:solidFill>
-                  <a:schemeClr val="lt1"/>
-                </a:solidFill>
-                <a:latin typeface="+mn-lt"/>
-                <a:ea typeface="+mn-ea"/>
-                <a:cs typeface="+mn-cs"/>
-              </a:defRPr>
-            </a:lvl8pPr>
-            <a:lvl9pPr marL="3657600" algn="l" defTabSz="457200" rtl="0" eaLnBrk="1" latinLnBrk="0" hangingPunct="1">
-              <a:defRPr sz="1800" kern="1200">
-                <a:solidFill>
-                  <a:schemeClr val="lt1"/>
-                </a:solidFill>
-                <a:latin typeface="+mn-lt"/>
-                <a:ea typeface="+mn-ea"/>
-                <a:cs typeface="+mn-cs"/>
-              </a:defRPr>
-            </a:lvl9pPr>
-          </a:lstStyle>
+          <a:lstStyle/>
           <a:p>
             <a:pPr algn="ctr"/>
             <a:endParaRPr/>
@@ -4816,20 +5840,14 @@
       </p:sp>
       <p:sp>
         <p:nvSpPr>
-          <p:cNvPr id="97" name="テキスト ボックス 96">
-            <a:extLst>
-              <a:ext uri="{FF2B5EF4-FFF2-40B4-BE49-F238E27FC236}">
-                <a16:creationId xmlns:a16="http://schemas.microsoft.com/office/drawing/2014/main" id="{E10B4BAD-7000-C570-ABCD-E59DB42C1F2F}"/>
-              </a:ext>
-            </a:extLst>
-          </p:cNvPr>
+          <p:cNvPr id="14" name="TextBox 13"/>
           <p:cNvSpPr txBox="1"/>
           <p:nvPr/>
         </p:nvSpPr>
         <p:spPr>
           <a:xfrm>
-            <a:off x="6341128" y="1250577"/>
-            <a:ext cx="5142755" cy="584775"/>
+            <a:off x="6359236" y="1165684"/>
+            <a:ext cx="4526279" cy="523220"/>
           </a:xfrm>
           <a:prstGeom prst="rect">
             <a:avLst/>
@@ -4837,42 +5855,53 @@
           <a:noFill/>
         </p:spPr>
         <p:txBody>
-          <a:bodyPr wrap="none" rtlCol="0">
+          <a:bodyPr wrap="square" lIns="45720" rIns="45720" anchor="ctr">
             <a:spAutoFit/>
           </a:bodyPr>
           <a:lstStyle/>
           <a:p>
-            <a:r>
-              <a:rPr kumimoji="1" lang="en-US" altLang="ja-JP" sz="3200" b="1" dirty="0"/>
-              <a:t>Multi-</a:t>
-            </a:r>
-            <a:r>
-              <a:rPr kumimoji="1" lang="en-US" altLang="ja-JP" sz="3200" b="1" dirty="0" err="1"/>
-              <a:t>Compertment</a:t>
-            </a:r>
-            <a:r>
-              <a:rPr kumimoji="1" lang="ja-JP" altLang="en-US" sz="3200" b="1" dirty="0"/>
-              <a:t>モデル</a:t>
-            </a:r>
-          </a:p>
-        </p:txBody>
-      </p:sp>
-      <p:sp>
-        <p:nvSpPr>
-          <p:cNvPr id="99" name="テキスト ボックス 98">
-            <a:extLst>
-              <a:ext uri="{FF2B5EF4-FFF2-40B4-BE49-F238E27FC236}">
-                <a16:creationId xmlns:a16="http://schemas.microsoft.com/office/drawing/2014/main" id="{99566511-2D95-9E41-CBF8-F791544E5E1F}"/>
-              </a:ext>
-            </a:extLst>
-          </p:cNvPr>
+            <a:pPr algn="l">
+              <a:spcAft>
+                <a:spcPts val="600"/>
+              </a:spcAft>
+            </a:pPr>
+            <a:r>
+              <a:rPr sz="2800" b="1" dirty="0">
+                <a:latin typeface="+mn-ea"/>
+                <a:ea typeface="+mn-ea"/>
+              </a:rPr>
+              <a:t>GPU </a:t>
+            </a:r>
+            <a:r>
+              <a:rPr lang="ja-JP" altLang="en-US" sz="2800" b="1" dirty="0">
+                <a:latin typeface="+mn-ea"/>
+              </a:rPr>
+              <a:t>による</a:t>
+            </a:r>
+            <a:r>
+              <a:rPr sz="2800" b="1" dirty="0" err="1">
+                <a:latin typeface="+mn-ea"/>
+                <a:ea typeface="+mn-ea"/>
+              </a:rPr>
+              <a:t>高速化</a:t>
+            </a:r>
+            <a:endParaRPr sz="2800" b="1" dirty="0">
+              <a:latin typeface="+mn-ea"/>
+              <a:ea typeface="+mn-ea"/>
+            </a:endParaRPr>
+          </a:p>
+        </p:txBody>
+      </p:sp>
+      <p:sp>
+        <p:nvSpPr>
+          <p:cNvPr id="15" name="TextBox 14"/>
           <p:cNvSpPr txBox="1"/>
           <p:nvPr/>
         </p:nvSpPr>
         <p:spPr>
           <a:xfrm>
-            <a:off x="276520" y="1250577"/>
-            <a:ext cx="4400757" cy="584775"/>
+            <a:off x="6446520" y="1874519"/>
+            <a:ext cx="5120640" cy="2708434"/>
           </a:xfrm>
           <a:prstGeom prst="rect">
             <a:avLst/>
@@ -4880,147 +5909,172 @@
           <a:noFill/>
         </p:spPr>
         <p:txBody>
-          <a:bodyPr wrap="none" rtlCol="0">
+          <a:bodyPr wrap="square" lIns="45720" rIns="45720" anchor="t">
             <a:spAutoFit/>
           </a:bodyPr>
           <a:lstStyle/>
           <a:p>
-            <a:r>
-              <a:rPr lang="en-US" altLang="ja-JP" sz="3200" b="1" dirty="0"/>
-              <a:t>Hodgkin</a:t>
-            </a:r>
-            <a:r>
-              <a:rPr kumimoji="1" lang="en-US" altLang="ja-JP" sz="3200" b="1" dirty="0"/>
-              <a:t>-Huxley</a:t>
-            </a:r>
-            <a:r>
-              <a:rPr kumimoji="1" lang="ja-JP" altLang="en-US" sz="3200" b="1" dirty="0"/>
-              <a:t>モデル</a:t>
-            </a:r>
-          </a:p>
-        </p:txBody>
-      </p:sp>
-      <p:sp>
-        <p:nvSpPr>
-          <p:cNvPr id="100" name="楕円 99">
-            <a:extLst>
-              <a:ext uri="{FF2B5EF4-FFF2-40B4-BE49-F238E27FC236}">
-                <a16:creationId xmlns:a16="http://schemas.microsoft.com/office/drawing/2014/main" id="{F8ACCF07-A284-EA5B-6CF9-E44AF7D1C8E0}"/>
-              </a:ext>
-            </a:extLst>
-          </p:cNvPr>
-          <p:cNvSpPr/>
-          <p:nvPr/>
-        </p:nvSpPr>
-        <p:spPr>
-          <a:xfrm>
-            <a:off x="3984786" y="4770012"/>
-            <a:ext cx="2188800" cy="1280375"/>
-          </a:xfrm>
-          <a:prstGeom prst="ellipse">
-            <a:avLst/>
-          </a:prstGeom>
-        </p:spPr>
-        <p:style>
-          <a:lnRef idx="2">
-            <a:schemeClr val="accent1">
-              <a:shade val="15000"/>
-            </a:schemeClr>
-          </a:lnRef>
-          <a:fillRef idx="1">
-            <a:schemeClr val="accent1"/>
-          </a:fillRef>
-          <a:effectRef idx="0">
-            <a:schemeClr val="accent1"/>
-          </a:effectRef>
-          <a:fontRef idx="minor">
-            <a:schemeClr val="lt1"/>
-          </a:fontRef>
-        </p:style>
-        <p:txBody>
-          <a:bodyPr rtlCol="0" anchor="ctr"/>
-          <a:lstStyle/>
-          <a:p>
-            <a:pPr algn="ctr"/>
-            <a:r>
-              <a:rPr kumimoji="1" lang="ja-JP" altLang="en-US" sz="3200" b="1" dirty="0"/>
-              <a:t>進行中</a:t>
-            </a:r>
-          </a:p>
-        </p:txBody>
-      </p:sp>
-      <p:sp>
-        <p:nvSpPr>
-          <p:cNvPr id="102" name="楕円 101">
-            <a:extLst>
-              <a:ext uri="{FF2B5EF4-FFF2-40B4-BE49-F238E27FC236}">
-                <a16:creationId xmlns:a16="http://schemas.microsoft.com/office/drawing/2014/main" id="{D5309C0A-5558-56FC-F086-1F7C29DF7AB0}"/>
-              </a:ext>
-            </a:extLst>
-          </p:cNvPr>
-          <p:cNvSpPr/>
-          <p:nvPr/>
-        </p:nvSpPr>
-        <p:spPr>
-          <a:xfrm>
-            <a:off x="9974076" y="4770012"/>
-            <a:ext cx="2188800" cy="1280375"/>
-          </a:xfrm>
-          <a:prstGeom prst="ellipse">
-            <a:avLst/>
-          </a:prstGeom>
-        </p:spPr>
-        <p:style>
-          <a:lnRef idx="2">
-            <a:schemeClr val="accent1"/>
-          </a:lnRef>
-          <a:fillRef idx="1">
-            <a:schemeClr val="lt1"/>
-          </a:fillRef>
-          <a:effectRef idx="0">
-            <a:schemeClr val="accent1"/>
-          </a:effectRef>
-          <a:fontRef idx="minor">
-            <a:schemeClr val="dk1"/>
-          </a:fontRef>
-        </p:style>
-        <p:txBody>
-          <a:bodyPr rtlCol="0" anchor="ctr"/>
-          <a:lstStyle/>
-          <a:p>
-            <a:pPr algn="ctr"/>
-            <a:r>
-              <a:rPr lang="ja-JP" altLang="en-US" sz="3200" b="1" dirty="0">
-                <a:solidFill>
-                  <a:schemeClr val="tx1"/>
-                </a:solidFill>
-              </a:rPr>
-              <a:t>未着手</a:t>
-            </a:r>
-            <a:endParaRPr kumimoji="1" lang="ja-JP" altLang="en-US" sz="3200" b="1" dirty="0">
+            <a:pPr algn="l">
+              <a:spcAft>
+                <a:spcPts val="200"/>
+              </a:spcAft>
+            </a:pPr>
+            <a:r>
+              <a:rPr lang="ja-JP" altLang="en-US" sz="2000" b="1" dirty="0">
+                <a:latin typeface="+mn-ea"/>
+              </a:rPr>
+              <a:t>微分</a:t>
+            </a:r>
+            <a:r>
+              <a:rPr lang="en-US" altLang="ja-JP" sz="2000" b="1" dirty="0">
+                <a:latin typeface="+mn-ea"/>
+              </a:rPr>
+              <a:t>eq</a:t>
+            </a:r>
+            <a:endParaRPr sz="2000" b="1" dirty="0">
+              <a:latin typeface="+mn-ea"/>
+              <a:ea typeface="+mn-ea"/>
+            </a:endParaRPr>
+          </a:p>
+          <a:p>
+            <a:pPr algn="l">
+              <a:spcAft>
+                <a:spcPts val="200"/>
+              </a:spcAft>
+            </a:pPr>
+            <a:r>
+              <a:rPr sz="2400" b="1" dirty="0" err="1">
+                <a:solidFill>
+                  <a:srgbClr val="1A1A1A"/>
+                </a:solidFill>
+                <a:latin typeface="+mn-ea"/>
+                <a:ea typeface="+mn-ea"/>
+              </a:rPr>
+              <a:t>指数関数を含む微分方程式を</a:t>
+            </a:r>
+            <a:endParaRPr sz="2400" b="1" dirty="0">
               <a:solidFill>
-                <a:schemeClr val="tx1"/>
+                <a:srgbClr val="1A1A1A"/>
               </a:solidFill>
+              <a:latin typeface="+mn-ea"/>
+              <a:ea typeface="+mn-ea"/>
             </a:endParaRPr>
           </a:p>
-        </p:txBody>
-      </p:sp>
-      <p:sp>
-        <p:nvSpPr>
-          <p:cNvPr id="104" name="テキスト ボックス 103">
-            <a:extLst>
-              <a:ext uri="{FF2B5EF4-FFF2-40B4-BE49-F238E27FC236}">
-                <a16:creationId xmlns:a16="http://schemas.microsoft.com/office/drawing/2014/main" id="{9CA20C82-0B42-5C5A-31A5-1D69A069A37C}"/>
-              </a:ext>
-            </a:extLst>
-          </p:cNvPr>
+          <a:p>
+            <a:pPr algn="l">
+              <a:spcAft>
+                <a:spcPts val="200"/>
+              </a:spcAft>
+            </a:pPr>
+            <a:r>
+              <a:rPr sz="2400" b="1" dirty="0" err="1">
+                <a:solidFill>
+                  <a:srgbClr val="1A1A1A"/>
+                </a:solidFill>
+                <a:latin typeface="+mn-ea"/>
+                <a:ea typeface="+mn-ea"/>
+              </a:rPr>
+              <a:t>細胞ごとに逐次計算</a:t>
+            </a:r>
+            <a:endParaRPr lang="en-US" sz="2400" b="1" dirty="0">
+              <a:solidFill>
+                <a:srgbClr val="1A1A1A"/>
+              </a:solidFill>
+              <a:latin typeface="+mn-ea"/>
+              <a:ea typeface="+mn-ea"/>
+            </a:endParaRPr>
+          </a:p>
+          <a:p>
+            <a:pPr algn="l">
+              <a:spcAft>
+                <a:spcPts val="200"/>
+              </a:spcAft>
+            </a:pPr>
+            <a:endParaRPr sz="2400" b="1" dirty="0">
+              <a:solidFill>
+                <a:srgbClr val="1A1A1A"/>
+              </a:solidFill>
+              <a:latin typeface="+mn-ea"/>
+              <a:ea typeface="+mn-ea"/>
+            </a:endParaRPr>
+          </a:p>
+          <a:p>
+            <a:pPr algn="l">
+              <a:spcAft>
+                <a:spcPts val="200"/>
+              </a:spcAft>
+            </a:pPr>
+            <a:r>
+              <a:rPr sz="2000" b="1" dirty="0">
+                <a:latin typeface="+mn-ea"/>
+                <a:ea typeface="+mn-ea"/>
+              </a:rPr>
+              <a:t>RNN</a:t>
+            </a:r>
+          </a:p>
+          <a:p>
+            <a:pPr algn="l">
+              <a:spcAft>
+                <a:spcPts val="200"/>
+              </a:spcAft>
+            </a:pPr>
+            <a:r>
+              <a:rPr sz="2400" b="1" dirty="0" err="1">
+                <a:solidFill>
+                  <a:srgbClr val="1A1A1A"/>
+                </a:solidFill>
+                <a:latin typeface="+mn-ea"/>
+                <a:ea typeface="+mn-ea"/>
+              </a:rPr>
+              <a:t>全細胞で重みを共有し</a:t>
+            </a:r>
+            <a:r>
+              <a:rPr sz="2400" b="1" dirty="0">
+                <a:solidFill>
+                  <a:srgbClr val="1A1A1A"/>
+                </a:solidFill>
+                <a:latin typeface="+mn-ea"/>
+                <a:ea typeface="+mn-ea"/>
+              </a:rPr>
+              <a:t>，</a:t>
+            </a:r>
+          </a:p>
+          <a:p>
+            <a:pPr algn="l">
+              <a:spcAft>
+                <a:spcPts val="200"/>
+              </a:spcAft>
+            </a:pPr>
+            <a:r>
+              <a:rPr sz="2400" b="1" dirty="0" err="1">
+                <a:solidFill>
+                  <a:srgbClr val="1A1A1A"/>
+                </a:solidFill>
+                <a:latin typeface="+mn-ea"/>
+                <a:ea typeface="+mn-ea"/>
+              </a:rPr>
+              <a:t>行列積でまとめて計算</a:t>
+            </a:r>
+            <a:endParaRPr sz="2400" b="1" dirty="0">
+              <a:solidFill>
+                <a:srgbClr val="1A1A1A"/>
+              </a:solidFill>
+              <a:latin typeface="+mn-ea"/>
+              <a:ea typeface="+mn-ea"/>
+            </a:endParaRPr>
+          </a:p>
+        </p:txBody>
+      </p:sp>
+      <p:sp>
+        <p:nvSpPr>
+          <p:cNvPr id="17" name="TextBox 16"/>
           <p:cNvSpPr txBox="1"/>
           <p:nvPr/>
         </p:nvSpPr>
         <p:spPr>
           <a:xfrm>
-            <a:off x="381000" y="2035033"/>
-            <a:ext cx="5016366" cy="3108543"/>
+            <a:off x="6477000" y="4695557"/>
+            <a:ext cx="5059680" cy="1092607"/>
           </a:xfrm>
           <a:prstGeom prst="rect">
             <a:avLst/>
@@ -5028,160 +6082,68 @@
           <a:noFill/>
         </p:spPr>
         <p:txBody>
-          <a:bodyPr wrap="square" rtlCol="0">
+          <a:bodyPr wrap="square" lIns="45720" rIns="45720" anchor="ctr">
             <a:spAutoFit/>
           </a:bodyPr>
           <a:lstStyle/>
           <a:p>
-            <a:r>
-              <a:rPr kumimoji="1" lang="ja-JP" altLang="en-US" sz="2800" b="1" dirty="0"/>
-              <a:t>空間形状を考慮しない</a:t>
-            </a:r>
-            <a:endParaRPr kumimoji="1" lang="en-US" altLang="ja-JP" sz="2800" b="1" dirty="0"/>
-          </a:p>
-          <a:p>
-            <a:r>
-              <a:rPr lang="ja-JP" altLang="en-US" sz="2800" b="1" dirty="0"/>
-              <a:t>コンパートメント：１個</a:t>
-            </a:r>
-            <a:endParaRPr lang="en-US" altLang="ja-JP" sz="2800" b="1" dirty="0"/>
-          </a:p>
-          <a:p>
-            <a:endParaRPr kumimoji="1" lang="en-US" altLang="ja-JP" sz="2800" b="1" dirty="0"/>
-          </a:p>
-          <a:p>
-            <a:r>
-              <a:rPr lang="ja-JP" altLang="en-US" sz="2800" b="1" dirty="0"/>
-              <a:t>状態変数：ゲート変数</a:t>
-            </a:r>
-            <a:endParaRPr lang="en-US" altLang="ja-JP" sz="2800" b="1" dirty="0"/>
-          </a:p>
-          <a:p>
-            <a:r>
-              <a:rPr lang="ja-JP" altLang="en-US" sz="2800" b="1" dirty="0"/>
-              <a:t>　　　　　</a:t>
-            </a:r>
-            <a:r>
-              <a:rPr kumimoji="1" lang="ja-JP" altLang="en-US" sz="2800" b="1" dirty="0"/>
-              <a:t>その他変数</a:t>
-            </a:r>
-            <a:endParaRPr kumimoji="1" lang="en-US" altLang="ja-JP" sz="2800" b="1" dirty="0"/>
-          </a:p>
-          <a:p>
-            <a:endParaRPr lang="en-US" altLang="ja-JP" sz="2800" b="1" dirty="0"/>
-          </a:p>
-          <a:p>
-            <a:endParaRPr kumimoji="1" lang="ja-JP" altLang="en-US" sz="2800" b="1" dirty="0"/>
-          </a:p>
-        </p:txBody>
-      </p:sp>
-      <p:sp>
-        <p:nvSpPr>
-          <p:cNvPr id="106" name="テキスト ボックス 105">
-            <a:extLst>
-              <a:ext uri="{FF2B5EF4-FFF2-40B4-BE49-F238E27FC236}">
-                <a16:creationId xmlns:a16="http://schemas.microsoft.com/office/drawing/2014/main" id="{AD07620A-2599-BC12-CC63-54BF6DF687FB}"/>
-              </a:ext>
-            </a:extLst>
-          </p:cNvPr>
-          <p:cNvSpPr txBox="1"/>
-          <p:nvPr/>
-        </p:nvSpPr>
-        <p:spPr>
-          <a:xfrm>
-            <a:off x="6404322" y="2068504"/>
-            <a:ext cx="5016366" cy="4401205"/>
-          </a:xfrm>
-          <a:prstGeom prst="rect">
-            <a:avLst/>
-          </a:prstGeom>
-          <a:noFill/>
-        </p:spPr>
-        <p:txBody>
-          <a:bodyPr wrap="square" rtlCol="0">
-            <a:spAutoFit/>
-          </a:bodyPr>
-          <a:lstStyle/>
-          <a:p>
-            <a:r>
-              <a:rPr kumimoji="1" lang="ja-JP" altLang="en-US" sz="2800" b="1" dirty="0"/>
-              <a:t>空間形状を考慮</a:t>
-            </a:r>
-            <a:endParaRPr kumimoji="1" lang="en-US" altLang="ja-JP" sz="2800" b="1" dirty="0"/>
-          </a:p>
-          <a:p>
-            <a:r>
-              <a:rPr lang="ja-JP" altLang="en-US" sz="2800" b="1" dirty="0"/>
-              <a:t>コンパートメント：</a:t>
-            </a:r>
-            <a:r>
-              <a:rPr lang="en-US" altLang="ja-JP" sz="2800" b="1" dirty="0"/>
-              <a:t>10</a:t>
-            </a:r>
-            <a:r>
-              <a:rPr lang="ja-JP" altLang="en-US" sz="2800" b="1" dirty="0"/>
-              <a:t>～</a:t>
-            </a:r>
-            <a:r>
-              <a:rPr lang="en-US" altLang="ja-JP" sz="2800" b="1" dirty="0"/>
-              <a:t>20</a:t>
-            </a:r>
-            <a:r>
-              <a:rPr lang="ja-JP" altLang="en-US" sz="2800" b="1" dirty="0"/>
-              <a:t>個</a:t>
-            </a:r>
-            <a:endParaRPr lang="en-US" altLang="ja-JP" sz="2800" b="1" dirty="0"/>
-          </a:p>
-          <a:p>
-            <a:endParaRPr kumimoji="1" lang="en-US" altLang="ja-JP" sz="2800" b="1" dirty="0"/>
-          </a:p>
-          <a:p>
-            <a:r>
-              <a:rPr lang="ja-JP" altLang="en-US" sz="2800" b="1" dirty="0"/>
-              <a:t>状態変数：ゲート変数</a:t>
-            </a:r>
-            <a:endParaRPr lang="en-US" altLang="ja-JP" sz="2800" b="1" dirty="0"/>
-          </a:p>
-          <a:p>
-            <a:r>
-              <a:rPr lang="ja-JP" altLang="en-US" sz="2800" b="1" dirty="0"/>
-              <a:t>　　　　　</a:t>
-            </a:r>
-            <a:r>
-              <a:rPr kumimoji="1" lang="ja-JP" altLang="en-US" sz="2800" b="1" dirty="0"/>
-              <a:t>その他変数</a:t>
-            </a:r>
-            <a:endParaRPr kumimoji="1" lang="en-US" altLang="ja-JP" sz="2800" b="1" dirty="0"/>
-          </a:p>
-          <a:p>
-            <a:endParaRPr lang="en-US" altLang="ja-JP" sz="2800" b="1" dirty="0"/>
-          </a:p>
-          <a:p>
-            <a:r>
-              <a:rPr kumimoji="1" lang="ja-JP" altLang="en-US" sz="2800" b="1" dirty="0"/>
-              <a:t>より再現度の高い</a:t>
-            </a:r>
-            <a:endParaRPr kumimoji="1" lang="en-US" altLang="ja-JP" sz="2800" b="1" dirty="0"/>
-          </a:p>
-          <a:p>
-            <a:r>
-              <a:rPr kumimoji="1" lang="ja-JP" altLang="en-US" sz="2800" b="1" dirty="0"/>
-              <a:t>シミュレーション</a:t>
-            </a:r>
-            <a:endParaRPr kumimoji="1" lang="en-US" altLang="ja-JP" sz="2800" b="1" dirty="0"/>
-          </a:p>
-          <a:p>
-            <a:endParaRPr lang="en-US" altLang="ja-JP" sz="2800" b="1" dirty="0"/>
-          </a:p>
-          <a:p>
-            <a:endParaRPr kumimoji="1" lang="ja-JP" altLang="en-US" sz="2800" b="1" dirty="0"/>
+            <a:pPr algn="l">
+              <a:spcAft>
+                <a:spcPts val="600"/>
+              </a:spcAft>
+            </a:pPr>
+            <a:r>
+              <a:rPr sz="2000" b="1" dirty="0" err="1">
+                <a:latin typeface="+mn-ea"/>
+                <a:ea typeface="+mn-ea"/>
+              </a:rPr>
+              <a:t>細胞数</a:t>
+            </a:r>
+            <a:r>
+              <a:rPr lang="ja-JP" altLang="en-US" sz="2000" b="1" dirty="0">
+                <a:latin typeface="+mn-ea"/>
+                <a:ea typeface="+mn-ea"/>
+              </a:rPr>
+              <a:t>の多いシミュレーション</a:t>
+            </a:r>
+            <a:r>
+              <a:rPr lang="ja-JP" altLang="en-US" sz="2000" b="1" dirty="0">
+                <a:latin typeface="+mn-ea"/>
+              </a:rPr>
+              <a:t>においても</a:t>
+            </a:r>
+            <a:endParaRPr lang="en-US" altLang="ja-JP" sz="2000" b="1" dirty="0">
+              <a:latin typeface="+mn-ea"/>
+            </a:endParaRPr>
+          </a:p>
+          <a:p>
+            <a:pPr algn="l">
+              <a:spcAft>
+                <a:spcPts val="600"/>
+              </a:spcAft>
+            </a:pPr>
+            <a:r>
+              <a:rPr lang="en-US" altLang="ja-JP" sz="2000" b="1" dirty="0">
+                <a:latin typeface="+mn-ea"/>
+              </a:rPr>
+              <a:t>GPU</a:t>
+            </a:r>
+            <a:r>
+              <a:rPr lang="ja-JP" altLang="en-US" sz="2000" b="1" dirty="0">
+                <a:latin typeface="+mn-ea"/>
+              </a:rPr>
+              <a:t>を使って高速に計算できるのではないか</a:t>
+            </a:r>
+            <a:endParaRPr lang="en-US" altLang="ja-JP" sz="2000" b="1" dirty="0">
+              <a:latin typeface="+mn-ea"/>
+            </a:endParaRPr>
           </a:p>
         </p:txBody>
       </p:sp>
     </p:spTree>
     <p:extLst>
       <p:ext uri="{BB962C8B-B14F-4D97-AF65-F5344CB8AC3E}">
-        <p14:creationId xmlns:p14="http://schemas.microsoft.com/office/powerpoint/2010/main" val="2729717364"/>
+        <p14:creationId xmlns:p14="http://schemas.microsoft.com/office/powerpoint/2010/main" val="2523479071"/>
       </p:ext>
     </p:extLst>
   </p:cSld>
@@ -5213,7 +6175,7 @@
           <p:cNvPr id="2" name="タイトル 1">
             <a:extLst>
               <a:ext uri="{FF2B5EF4-FFF2-40B4-BE49-F238E27FC236}">
-                <a16:creationId xmlns:a16="http://schemas.microsoft.com/office/drawing/2014/main" id="{A50737B2-F508-9467-631A-304CAEFE21B3}"/>
+                <a16:creationId xmlns:a16="http://schemas.microsoft.com/office/drawing/2014/main" id="{F1D0F3C7-78AA-9462-A6F8-8B4CCCE68229}"/>
               </a:ext>
             </a:extLst>
           </p:cNvPr>
@@ -5230,45 +6192,661 @@
           <a:lstStyle/>
           <a:p>
             <a:r>
-              <a:rPr kumimoji="1" lang="en-US" altLang="ja-JP" dirty="0"/>
-              <a:t>Hodgkin-Huxley</a:t>
-            </a:r>
-            <a:r>
-              <a:rPr kumimoji="1" lang="ja-JP" altLang="en-US" dirty="0"/>
-              <a:t>モデル</a:t>
-            </a:r>
-          </a:p>
-        </p:txBody>
-      </p:sp>
-      <p:sp>
-        <p:nvSpPr>
-          <p:cNvPr id="3" name="コンテンツ プレースホルダー 2">
+              <a:rPr lang="ja-JP" altLang="en-US" dirty="0"/>
+              <a:t>基になる数理モデル</a:t>
+            </a:r>
+            <a:endParaRPr kumimoji="1" lang="ja-JP" altLang="en-US" dirty="0"/>
+          </a:p>
+        </p:txBody>
+      </p:sp>
+      <p:sp>
+        <p:nvSpPr>
+          <p:cNvPr id="75" name="Rounded Rectangle 3">
             <a:extLst>
               <a:ext uri="{FF2B5EF4-FFF2-40B4-BE49-F238E27FC236}">
-                <a16:creationId xmlns:a16="http://schemas.microsoft.com/office/drawing/2014/main" id="{F3FD7764-C7C9-7ECE-800B-44800F9B175B}"/>
+                <a16:creationId xmlns:a16="http://schemas.microsoft.com/office/drawing/2014/main" id="{2DAE8BD0-0FAD-D7AF-E0C3-EDD94975E3D3}"/>
               </a:ext>
             </a:extLst>
           </p:cNvPr>
-          <p:cNvSpPr>
-            <a:spLocks noGrp="1"/>
-          </p:cNvSpPr>
-          <p:nvPr>
-            <p:ph sz="quarter" idx="10"/>
-          </p:nvPr>
-        </p:nvSpPr>
-        <p:spPr/>
-        <p:txBody>
-          <a:bodyPr/>
+          <p:cNvSpPr/>
+          <p:nvPr/>
+        </p:nvSpPr>
+        <p:spPr>
+          <a:xfrm>
+            <a:off x="6173586" y="1080247"/>
+            <a:ext cx="5741894" cy="5181600"/>
+          </a:xfrm>
+          <a:prstGeom prst="roundRect">
+            <a:avLst>
+              <a:gd name="adj" fmla="val 2205"/>
+            </a:avLst>
+          </a:prstGeom>
+          <a:solidFill>
+            <a:srgbClr val="F0F9FF"/>
+          </a:solidFill>
+          <a:ln w="19050">
+            <a:solidFill>
+              <a:schemeClr val="accent1"/>
+            </a:solidFill>
+          </a:ln>
+          <a:effectLst/>
+        </p:spPr>
+        <p:style>
+          <a:lnRef idx="1">
+            <a:schemeClr val="accent1"/>
+          </a:lnRef>
+          <a:fillRef idx="3">
+            <a:schemeClr val="accent1"/>
+          </a:fillRef>
+          <a:effectRef idx="2">
+            <a:schemeClr val="accent1"/>
+          </a:effectRef>
+          <a:fontRef idx="minor">
+            <a:schemeClr val="lt1"/>
+          </a:fontRef>
+        </p:style>
+        <p:txBody>
+          <a:bodyPr rtlCol="0" anchor="ctr"/>
+          <a:lstStyle>
+            <a:defPPr>
+              <a:defRPr lang="en-US"/>
+            </a:defPPr>
+            <a:lvl1pPr marL="0" algn="l" defTabSz="457200" rtl="0" eaLnBrk="1" latinLnBrk="0" hangingPunct="1">
+              <a:defRPr sz="1800" kern="1200">
+                <a:solidFill>
+                  <a:schemeClr val="lt1"/>
+                </a:solidFill>
+                <a:latin typeface="+mn-lt"/>
+                <a:ea typeface="+mn-ea"/>
+                <a:cs typeface="+mn-cs"/>
+              </a:defRPr>
+            </a:lvl1pPr>
+            <a:lvl2pPr marL="457200" algn="l" defTabSz="457200" rtl="0" eaLnBrk="1" latinLnBrk="0" hangingPunct="1">
+              <a:defRPr sz="1800" kern="1200">
+                <a:solidFill>
+                  <a:schemeClr val="lt1"/>
+                </a:solidFill>
+                <a:latin typeface="+mn-lt"/>
+                <a:ea typeface="+mn-ea"/>
+                <a:cs typeface="+mn-cs"/>
+              </a:defRPr>
+            </a:lvl2pPr>
+            <a:lvl3pPr marL="914400" algn="l" defTabSz="457200" rtl="0" eaLnBrk="1" latinLnBrk="0" hangingPunct="1">
+              <a:defRPr sz="1800" kern="1200">
+                <a:solidFill>
+                  <a:schemeClr val="lt1"/>
+                </a:solidFill>
+                <a:latin typeface="+mn-lt"/>
+                <a:ea typeface="+mn-ea"/>
+                <a:cs typeface="+mn-cs"/>
+              </a:defRPr>
+            </a:lvl3pPr>
+            <a:lvl4pPr marL="1371600" algn="l" defTabSz="457200" rtl="0" eaLnBrk="1" latinLnBrk="0" hangingPunct="1">
+              <a:defRPr sz="1800" kern="1200">
+                <a:solidFill>
+                  <a:schemeClr val="lt1"/>
+                </a:solidFill>
+                <a:latin typeface="+mn-lt"/>
+                <a:ea typeface="+mn-ea"/>
+                <a:cs typeface="+mn-cs"/>
+              </a:defRPr>
+            </a:lvl4pPr>
+            <a:lvl5pPr marL="1828800" algn="l" defTabSz="457200" rtl="0" eaLnBrk="1" latinLnBrk="0" hangingPunct="1">
+              <a:defRPr sz="1800" kern="1200">
+                <a:solidFill>
+                  <a:schemeClr val="lt1"/>
+                </a:solidFill>
+                <a:latin typeface="+mn-lt"/>
+                <a:ea typeface="+mn-ea"/>
+                <a:cs typeface="+mn-cs"/>
+              </a:defRPr>
+            </a:lvl5pPr>
+            <a:lvl6pPr marL="2286000" algn="l" defTabSz="457200" rtl="0" eaLnBrk="1" latinLnBrk="0" hangingPunct="1">
+              <a:defRPr sz="1800" kern="1200">
+                <a:solidFill>
+                  <a:schemeClr val="lt1"/>
+                </a:solidFill>
+                <a:latin typeface="+mn-lt"/>
+                <a:ea typeface="+mn-ea"/>
+                <a:cs typeface="+mn-cs"/>
+              </a:defRPr>
+            </a:lvl6pPr>
+            <a:lvl7pPr marL="2743200" algn="l" defTabSz="457200" rtl="0" eaLnBrk="1" latinLnBrk="0" hangingPunct="1">
+              <a:defRPr sz="1800" kern="1200">
+                <a:solidFill>
+                  <a:schemeClr val="lt1"/>
+                </a:solidFill>
+                <a:latin typeface="+mn-lt"/>
+                <a:ea typeface="+mn-ea"/>
+                <a:cs typeface="+mn-cs"/>
+              </a:defRPr>
+            </a:lvl7pPr>
+            <a:lvl8pPr marL="3200400" algn="l" defTabSz="457200" rtl="0" eaLnBrk="1" latinLnBrk="0" hangingPunct="1">
+              <a:defRPr sz="1800" kern="1200">
+                <a:solidFill>
+                  <a:schemeClr val="lt1"/>
+                </a:solidFill>
+                <a:latin typeface="+mn-lt"/>
+                <a:ea typeface="+mn-ea"/>
+                <a:cs typeface="+mn-cs"/>
+              </a:defRPr>
+            </a:lvl8pPr>
+            <a:lvl9pPr marL="3657600" algn="l" defTabSz="457200" rtl="0" eaLnBrk="1" latinLnBrk="0" hangingPunct="1">
+              <a:defRPr sz="1800" kern="1200">
+                <a:solidFill>
+                  <a:schemeClr val="lt1"/>
+                </a:solidFill>
+                <a:latin typeface="+mn-lt"/>
+                <a:ea typeface="+mn-ea"/>
+                <a:cs typeface="+mn-cs"/>
+              </a:defRPr>
+            </a:lvl9pPr>
+          </a:lstStyle>
+          <a:p>
+            <a:pPr algn="ctr"/>
+            <a:endParaRPr dirty="0"/>
+          </a:p>
+        </p:txBody>
+      </p:sp>
+      <p:sp>
+        <p:nvSpPr>
+          <p:cNvPr id="77" name="Rounded Rectangle 3">
+            <a:extLst>
+              <a:ext uri="{FF2B5EF4-FFF2-40B4-BE49-F238E27FC236}">
+                <a16:creationId xmlns:a16="http://schemas.microsoft.com/office/drawing/2014/main" id="{4916DD34-FC39-3F73-8607-B7C380D38404}"/>
+              </a:ext>
+            </a:extLst>
+          </p:cNvPr>
+          <p:cNvSpPr/>
+          <p:nvPr/>
+        </p:nvSpPr>
+        <p:spPr>
+          <a:xfrm>
+            <a:off x="218806" y="1080247"/>
+            <a:ext cx="5741894" cy="5181600"/>
+          </a:xfrm>
+          <a:prstGeom prst="roundRect">
+            <a:avLst>
+              <a:gd name="adj" fmla="val 2205"/>
+            </a:avLst>
+          </a:prstGeom>
+          <a:noFill/>
+          <a:ln w="19050">
+            <a:solidFill>
+              <a:schemeClr val="accent1"/>
+            </a:solidFill>
+          </a:ln>
+          <a:effectLst/>
+        </p:spPr>
+        <p:style>
+          <a:lnRef idx="1">
+            <a:schemeClr val="accent1"/>
+          </a:lnRef>
+          <a:fillRef idx="3">
+            <a:schemeClr val="accent1"/>
+          </a:fillRef>
+          <a:effectRef idx="2">
+            <a:schemeClr val="accent1"/>
+          </a:effectRef>
+          <a:fontRef idx="minor">
+            <a:schemeClr val="lt1"/>
+          </a:fontRef>
+        </p:style>
+        <p:txBody>
+          <a:bodyPr rtlCol="0" anchor="ctr"/>
+          <a:lstStyle>
+            <a:defPPr>
+              <a:defRPr lang="en-US"/>
+            </a:defPPr>
+            <a:lvl1pPr marL="0" algn="l" defTabSz="457200" rtl="0" eaLnBrk="1" latinLnBrk="0" hangingPunct="1">
+              <a:defRPr sz="1800" kern="1200">
+                <a:solidFill>
+                  <a:schemeClr val="lt1"/>
+                </a:solidFill>
+                <a:latin typeface="+mn-lt"/>
+                <a:ea typeface="+mn-ea"/>
+                <a:cs typeface="+mn-cs"/>
+              </a:defRPr>
+            </a:lvl1pPr>
+            <a:lvl2pPr marL="457200" algn="l" defTabSz="457200" rtl="0" eaLnBrk="1" latinLnBrk="0" hangingPunct="1">
+              <a:defRPr sz="1800" kern="1200">
+                <a:solidFill>
+                  <a:schemeClr val="lt1"/>
+                </a:solidFill>
+                <a:latin typeface="+mn-lt"/>
+                <a:ea typeface="+mn-ea"/>
+                <a:cs typeface="+mn-cs"/>
+              </a:defRPr>
+            </a:lvl2pPr>
+            <a:lvl3pPr marL="914400" algn="l" defTabSz="457200" rtl="0" eaLnBrk="1" latinLnBrk="0" hangingPunct="1">
+              <a:defRPr sz="1800" kern="1200">
+                <a:solidFill>
+                  <a:schemeClr val="lt1"/>
+                </a:solidFill>
+                <a:latin typeface="+mn-lt"/>
+                <a:ea typeface="+mn-ea"/>
+                <a:cs typeface="+mn-cs"/>
+              </a:defRPr>
+            </a:lvl3pPr>
+            <a:lvl4pPr marL="1371600" algn="l" defTabSz="457200" rtl="0" eaLnBrk="1" latinLnBrk="0" hangingPunct="1">
+              <a:defRPr sz="1800" kern="1200">
+                <a:solidFill>
+                  <a:schemeClr val="lt1"/>
+                </a:solidFill>
+                <a:latin typeface="+mn-lt"/>
+                <a:ea typeface="+mn-ea"/>
+                <a:cs typeface="+mn-cs"/>
+              </a:defRPr>
+            </a:lvl4pPr>
+            <a:lvl5pPr marL="1828800" algn="l" defTabSz="457200" rtl="0" eaLnBrk="1" latinLnBrk="0" hangingPunct="1">
+              <a:defRPr sz="1800" kern="1200">
+                <a:solidFill>
+                  <a:schemeClr val="lt1"/>
+                </a:solidFill>
+                <a:latin typeface="+mn-lt"/>
+                <a:ea typeface="+mn-ea"/>
+                <a:cs typeface="+mn-cs"/>
+              </a:defRPr>
+            </a:lvl5pPr>
+            <a:lvl6pPr marL="2286000" algn="l" defTabSz="457200" rtl="0" eaLnBrk="1" latinLnBrk="0" hangingPunct="1">
+              <a:defRPr sz="1800" kern="1200">
+                <a:solidFill>
+                  <a:schemeClr val="lt1"/>
+                </a:solidFill>
+                <a:latin typeface="+mn-lt"/>
+                <a:ea typeface="+mn-ea"/>
+                <a:cs typeface="+mn-cs"/>
+              </a:defRPr>
+            </a:lvl6pPr>
+            <a:lvl7pPr marL="2743200" algn="l" defTabSz="457200" rtl="0" eaLnBrk="1" latinLnBrk="0" hangingPunct="1">
+              <a:defRPr sz="1800" kern="1200">
+                <a:solidFill>
+                  <a:schemeClr val="lt1"/>
+                </a:solidFill>
+                <a:latin typeface="+mn-lt"/>
+                <a:ea typeface="+mn-ea"/>
+                <a:cs typeface="+mn-cs"/>
+              </a:defRPr>
+            </a:lvl7pPr>
+            <a:lvl8pPr marL="3200400" algn="l" defTabSz="457200" rtl="0" eaLnBrk="1" latinLnBrk="0" hangingPunct="1">
+              <a:defRPr sz="1800" kern="1200">
+                <a:solidFill>
+                  <a:schemeClr val="lt1"/>
+                </a:solidFill>
+                <a:latin typeface="+mn-lt"/>
+                <a:ea typeface="+mn-ea"/>
+                <a:cs typeface="+mn-cs"/>
+              </a:defRPr>
+            </a:lvl8pPr>
+            <a:lvl9pPr marL="3657600" algn="l" defTabSz="457200" rtl="0" eaLnBrk="1" latinLnBrk="0" hangingPunct="1">
+              <a:defRPr sz="1800" kern="1200">
+                <a:solidFill>
+                  <a:schemeClr val="lt1"/>
+                </a:solidFill>
+                <a:latin typeface="+mn-lt"/>
+                <a:ea typeface="+mn-ea"/>
+                <a:cs typeface="+mn-cs"/>
+              </a:defRPr>
+            </a:lvl9pPr>
+          </a:lstStyle>
+          <a:p>
+            <a:pPr algn="ctr"/>
+            <a:endParaRPr/>
+          </a:p>
+        </p:txBody>
+      </p:sp>
+      <p:sp>
+        <p:nvSpPr>
+          <p:cNvPr id="97" name="テキスト ボックス 96">
+            <a:extLst>
+              <a:ext uri="{FF2B5EF4-FFF2-40B4-BE49-F238E27FC236}">
+                <a16:creationId xmlns:a16="http://schemas.microsoft.com/office/drawing/2014/main" id="{E10B4BAD-7000-C570-ABCD-E59DB42C1F2F}"/>
+              </a:ext>
+            </a:extLst>
+          </p:cNvPr>
+          <p:cNvSpPr txBox="1"/>
+          <p:nvPr/>
+        </p:nvSpPr>
+        <p:spPr>
+          <a:xfrm>
+            <a:off x="6341128" y="1250577"/>
+            <a:ext cx="5142755" cy="584775"/>
+          </a:xfrm>
+          <a:prstGeom prst="rect">
+            <a:avLst/>
+          </a:prstGeom>
+          <a:noFill/>
+        </p:spPr>
+        <p:txBody>
+          <a:bodyPr wrap="none" rtlCol="0">
+            <a:spAutoFit/>
+          </a:bodyPr>
           <a:lstStyle/>
           <a:p>
-            <a:endParaRPr kumimoji="1" lang="ja-JP" altLang="en-US" dirty="0"/>
+            <a:r>
+              <a:rPr kumimoji="1" lang="en-US" altLang="ja-JP" sz="3200" b="1" dirty="0"/>
+              <a:t>Multi-</a:t>
+            </a:r>
+            <a:r>
+              <a:rPr kumimoji="1" lang="en-US" altLang="ja-JP" sz="3200" b="1" dirty="0" err="1"/>
+              <a:t>Compertment</a:t>
+            </a:r>
+            <a:r>
+              <a:rPr kumimoji="1" lang="ja-JP" altLang="en-US" sz="3200" b="1" dirty="0"/>
+              <a:t>モデル</a:t>
+            </a:r>
+          </a:p>
+        </p:txBody>
+      </p:sp>
+      <p:sp>
+        <p:nvSpPr>
+          <p:cNvPr id="99" name="テキスト ボックス 98">
+            <a:extLst>
+              <a:ext uri="{FF2B5EF4-FFF2-40B4-BE49-F238E27FC236}">
+                <a16:creationId xmlns:a16="http://schemas.microsoft.com/office/drawing/2014/main" id="{99566511-2D95-9E41-CBF8-F791544E5E1F}"/>
+              </a:ext>
+            </a:extLst>
+          </p:cNvPr>
+          <p:cNvSpPr txBox="1"/>
+          <p:nvPr/>
+        </p:nvSpPr>
+        <p:spPr>
+          <a:xfrm>
+            <a:off x="276520" y="1250577"/>
+            <a:ext cx="4400757" cy="584775"/>
+          </a:xfrm>
+          <a:prstGeom prst="rect">
+            <a:avLst/>
+          </a:prstGeom>
+          <a:noFill/>
+        </p:spPr>
+        <p:txBody>
+          <a:bodyPr wrap="none" rtlCol="0">
+            <a:spAutoFit/>
+          </a:bodyPr>
+          <a:lstStyle/>
+          <a:p>
+            <a:r>
+              <a:rPr lang="en-US" altLang="ja-JP" sz="3200" b="1" dirty="0"/>
+              <a:t>Hodgkin</a:t>
+            </a:r>
+            <a:r>
+              <a:rPr kumimoji="1" lang="en-US" altLang="ja-JP" sz="3200" b="1" dirty="0"/>
+              <a:t>-Huxley</a:t>
+            </a:r>
+            <a:r>
+              <a:rPr kumimoji="1" lang="ja-JP" altLang="en-US" sz="3200" b="1" dirty="0"/>
+              <a:t>モデル</a:t>
+            </a:r>
+          </a:p>
+        </p:txBody>
+      </p:sp>
+      <p:sp>
+        <p:nvSpPr>
+          <p:cNvPr id="100" name="楕円 99">
+            <a:extLst>
+              <a:ext uri="{FF2B5EF4-FFF2-40B4-BE49-F238E27FC236}">
+                <a16:creationId xmlns:a16="http://schemas.microsoft.com/office/drawing/2014/main" id="{F8ACCF07-A284-EA5B-6CF9-E44AF7D1C8E0}"/>
+              </a:ext>
+            </a:extLst>
+          </p:cNvPr>
+          <p:cNvSpPr/>
+          <p:nvPr/>
+        </p:nvSpPr>
+        <p:spPr>
+          <a:xfrm>
+            <a:off x="3984786" y="4770012"/>
+            <a:ext cx="2188800" cy="1280375"/>
+          </a:xfrm>
+          <a:prstGeom prst="ellipse">
+            <a:avLst/>
+          </a:prstGeom>
+        </p:spPr>
+        <p:style>
+          <a:lnRef idx="2">
+            <a:schemeClr val="accent1">
+              <a:shade val="15000"/>
+            </a:schemeClr>
+          </a:lnRef>
+          <a:fillRef idx="1">
+            <a:schemeClr val="accent1"/>
+          </a:fillRef>
+          <a:effectRef idx="0">
+            <a:schemeClr val="accent1"/>
+          </a:effectRef>
+          <a:fontRef idx="minor">
+            <a:schemeClr val="lt1"/>
+          </a:fontRef>
+        </p:style>
+        <p:txBody>
+          <a:bodyPr rtlCol="0" anchor="ctr"/>
+          <a:lstStyle/>
+          <a:p>
+            <a:pPr algn="ctr"/>
+            <a:r>
+              <a:rPr kumimoji="1" lang="ja-JP" altLang="en-US" sz="3200" b="1" dirty="0"/>
+              <a:t>進行中</a:t>
+            </a:r>
+          </a:p>
+        </p:txBody>
+      </p:sp>
+      <p:sp>
+        <p:nvSpPr>
+          <p:cNvPr id="102" name="楕円 101">
+            <a:extLst>
+              <a:ext uri="{FF2B5EF4-FFF2-40B4-BE49-F238E27FC236}">
+                <a16:creationId xmlns:a16="http://schemas.microsoft.com/office/drawing/2014/main" id="{D5309C0A-5558-56FC-F086-1F7C29DF7AB0}"/>
+              </a:ext>
+            </a:extLst>
+          </p:cNvPr>
+          <p:cNvSpPr/>
+          <p:nvPr/>
+        </p:nvSpPr>
+        <p:spPr>
+          <a:xfrm>
+            <a:off x="9974076" y="4770012"/>
+            <a:ext cx="2188800" cy="1280375"/>
+          </a:xfrm>
+          <a:prstGeom prst="ellipse">
+            <a:avLst/>
+          </a:prstGeom>
+        </p:spPr>
+        <p:style>
+          <a:lnRef idx="2">
+            <a:schemeClr val="accent1"/>
+          </a:lnRef>
+          <a:fillRef idx="1">
+            <a:schemeClr val="lt1"/>
+          </a:fillRef>
+          <a:effectRef idx="0">
+            <a:schemeClr val="accent1"/>
+          </a:effectRef>
+          <a:fontRef idx="minor">
+            <a:schemeClr val="dk1"/>
+          </a:fontRef>
+        </p:style>
+        <p:txBody>
+          <a:bodyPr rtlCol="0" anchor="ctr"/>
+          <a:lstStyle/>
+          <a:p>
+            <a:pPr algn="ctr"/>
+            <a:r>
+              <a:rPr lang="ja-JP" altLang="en-US" sz="3200" b="1" dirty="0">
+                <a:solidFill>
+                  <a:schemeClr val="tx1"/>
+                </a:solidFill>
+              </a:rPr>
+              <a:t>未着手</a:t>
+            </a:r>
+            <a:endParaRPr kumimoji="1" lang="ja-JP" altLang="en-US" sz="3200" b="1" dirty="0">
+              <a:solidFill>
+                <a:schemeClr val="tx1"/>
+              </a:solidFill>
+            </a:endParaRPr>
+          </a:p>
+        </p:txBody>
+      </p:sp>
+      <p:sp>
+        <p:nvSpPr>
+          <p:cNvPr id="104" name="テキスト ボックス 103">
+            <a:extLst>
+              <a:ext uri="{FF2B5EF4-FFF2-40B4-BE49-F238E27FC236}">
+                <a16:creationId xmlns:a16="http://schemas.microsoft.com/office/drawing/2014/main" id="{9CA20C82-0B42-5C5A-31A5-1D69A069A37C}"/>
+              </a:ext>
+            </a:extLst>
+          </p:cNvPr>
+          <p:cNvSpPr txBox="1"/>
+          <p:nvPr/>
+        </p:nvSpPr>
+        <p:spPr>
+          <a:xfrm>
+            <a:off x="381000" y="2035033"/>
+            <a:ext cx="5016366" cy="3108543"/>
+          </a:xfrm>
+          <a:prstGeom prst="rect">
+            <a:avLst/>
+          </a:prstGeom>
+          <a:noFill/>
+        </p:spPr>
+        <p:txBody>
+          <a:bodyPr wrap="square" rtlCol="0">
+            <a:spAutoFit/>
+          </a:bodyPr>
+          <a:lstStyle/>
+          <a:p>
+            <a:r>
+              <a:rPr kumimoji="1" lang="ja-JP" altLang="en-US" sz="2800" b="1" dirty="0"/>
+              <a:t>空間形状を考慮しない</a:t>
+            </a:r>
+            <a:endParaRPr kumimoji="1" lang="en-US" altLang="ja-JP" sz="2800" b="1" dirty="0"/>
+          </a:p>
+          <a:p>
+            <a:r>
+              <a:rPr lang="ja-JP" altLang="en-US" sz="2800" b="1" dirty="0"/>
+              <a:t>コンパートメント：１個</a:t>
+            </a:r>
+            <a:endParaRPr lang="en-US" altLang="ja-JP" sz="2800" b="1" dirty="0"/>
+          </a:p>
+          <a:p>
+            <a:endParaRPr kumimoji="1" lang="en-US" altLang="ja-JP" sz="2800" b="1" dirty="0"/>
+          </a:p>
+          <a:p>
+            <a:r>
+              <a:rPr lang="ja-JP" altLang="en-US" sz="2800" b="1" dirty="0"/>
+              <a:t>状態変数：ゲート変数</a:t>
+            </a:r>
+            <a:endParaRPr lang="en-US" altLang="ja-JP" sz="2800" b="1" dirty="0"/>
+          </a:p>
+          <a:p>
+            <a:r>
+              <a:rPr lang="ja-JP" altLang="en-US" sz="2800" b="1" dirty="0"/>
+              <a:t>　　　　　</a:t>
+            </a:r>
+            <a:r>
+              <a:rPr kumimoji="1" lang="ja-JP" altLang="en-US" sz="2800" b="1" dirty="0"/>
+              <a:t>その他変数</a:t>
+            </a:r>
+            <a:endParaRPr kumimoji="1" lang="en-US" altLang="ja-JP" sz="2800" b="1" dirty="0"/>
+          </a:p>
+          <a:p>
+            <a:endParaRPr lang="en-US" altLang="ja-JP" sz="2800" b="1" dirty="0"/>
+          </a:p>
+          <a:p>
+            <a:endParaRPr kumimoji="1" lang="ja-JP" altLang="en-US" sz="2800" b="1" dirty="0"/>
+          </a:p>
+        </p:txBody>
+      </p:sp>
+      <p:sp>
+        <p:nvSpPr>
+          <p:cNvPr id="106" name="テキスト ボックス 105">
+            <a:extLst>
+              <a:ext uri="{FF2B5EF4-FFF2-40B4-BE49-F238E27FC236}">
+                <a16:creationId xmlns:a16="http://schemas.microsoft.com/office/drawing/2014/main" id="{AD07620A-2599-BC12-CC63-54BF6DF687FB}"/>
+              </a:ext>
+            </a:extLst>
+          </p:cNvPr>
+          <p:cNvSpPr txBox="1"/>
+          <p:nvPr/>
+        </p:nvSpPr>
+        <p:spPr>
+          <a:xfrm>
+            <a:off x="6404322" y="2068504"/>
+            <a:ext cx="5016366" cy="4401205"/>
+          </a:xfrm>
+          <a:prstGeom prst="rect">
+            <a:avLst/>
+          </a:prstGeom>
+          <a:noFill/>
+        </p:spPr>
+        <p:txBody>
+          <a:bodyPr wrap="square" rtlCol="0">
+            <a:spAutoFit/>
+          </a:bodyPr>
+          <a:lstStyle/>
+          <a:p>
+            <a:r>
+              <a:rPr kumimoji="1" lang="ja-JP" altLang="en-US" sz="2800" b="1" dirty="0"/>
+              <a:t>空間形状を考慮</a:t>
+            </a:r>
+            <a:endParaRPr kumimoji="1" lang="en-US" altLang="ja-JP" sz="2800" b="1" dirty="0"/>
+          </a:p>
+          <a:p>
+            <a:r>
+              <a:rPr lang="ja-JP" altLang="en-US" sz="2800" b="1" dirty="0"/>
+              <a:t>コンパートメント：複数個</a:t>
+            </a:r>
+            <a:endParaRPr lang="en-US" altLang="ja-JP" sz="2800" b="1" dirty="0"/>
+          </a:p>
+          <a:p>
+            <a:endParaRPr kumimoji="1" lang="en-US" altLang="ja-JP" sz="2800" b="1" dirty="0"/>
+          </a:p>
+          <a:p>
+            <a:r>
+              <a:rPr lang="ja-JP" altLang="en-US" sz="2800" b="1" dirty="0"/>
+              <a:t>状態変数：ゲート変数</a:t>
+            </a:r>
+            <a:endParaRPr lang="en-US" altLang="ja-JP" sz="2800" b="1" dirty="0"/>
+          </a:p>
+          <a:p>
+            <a:r>
+              <a:rPr lang="ja-JP" altLang="en-US" sz="2800" b="1" dirty="0"/>
+              <a:t>　　　　　</a:t>
+            </a:r>
+            <a:r>
+              <a:rPr kumimoji="1" lang="ja-JP" altLang="en-US" sz="2800" b="1" dirty="0"/>
+              <a:t>その他変数</a:t>
+            </a:r>
+            <a:endParaRPr kumimoji="1" lang="en-US" altLang="ja-JP" sz="2800" b="1" dirty="0"/>
+          </a:p>
+          <a:p>
+            <a:endParaRPr lang="en-US" altLang="ja-JP" sz="2800" b="1" dirty="0"/>
+          </a:p>
+          <a:p>
+            <a:r>
+              <a:rPr kumimoji="1" lang="ja-JP" altLang="en-US" sz="2800" b="1" dirty="0"/>
+              <a:t>より再現度の高い</a:t>
+            </a:r>
+            <a:endParaRPr kumimoji="1" lang="en-US" altLang="ja-JP" sz="2800" b="1" dirty="0"/>
+          </a:p>
+          <a:p>
+            <a:r>
+              <a:rPr kumimoji="1" lang="ja-JP" altLang="en-US" sz="2800" b="1" dirty="0"/>
+              <a:t>シミュレーション</a:t>
+            </a:r>
+            <a:endParaRPr kumimoji="1" lang="en-US" altLang="ja-JP" sz="2800" b="1" dirty="0"/>
+          </a:p>
+          <a:p>
+            <a:endParaRPr lang="en-US" altLang="ja-JP" sz="2800" b="1" dirty="0"/>
+          </a:p>
+          <a:p>
+            <a:endParaRPr kumimoji="1" lang="ja-JP" altLang="en-US" sz="2800" b="1" dirty="0"/>
           </a:p>
         </p:txBody>
       </p:sp>
     </p:spTree>
     <p:extLst>
       <p:ext uri="{BB962C8B-B14F-4D97-AF65-F5344CB8AC3E}">
-        <p14:creationId xmlns:p14="http://schemas.microsoft.com/office/powerpoint/2010/main" val="1584462294"/>
+        <p14:creationId xmlns:p14="http://schemas.microsoft.com/office/powerpoint/2010/main" val="2729717364"/>
       </p:ext>
     </p:extLst>
   </p:cSld>
@@ -5300,7 +6878,7 @@
           <p:cNvPr id="2" name="タイトル 1">
             <a:extLst>
               <a:ext uri="{FF2B5EF4-FFF2-40B4-BE49-F238E27FC236}">
-                <a16:creationId xmlns:a16="http://schemas.microsoft.com/office/drawing/2014/main" id="{635D2822-35FE-8001-99E5-BF7BCCBA7664}"/>
+                <a16:creationId xmlns:a16="http://schemas.microsoft.com/office/drawing/2014/main" id="{CF1F40E3-CCD1-C15C-62EB-0D81B96B5468}"/>
               </a:ext>
             </a:extLst>
           </p:cNvPr>
@@ -5316,7 +6894,10 @@
           <a:bodyPr/>
           <a:lstStyle/>
           <a:p>
-            <a:endParaRPr kumimoji="1" lang="ja-JP" altLang="en-US"/>
+            <a:r>
+              <a:rPr kumimoji="1" lang="ja-JP" altLang="en-US" dirty="0"/>
+              <a:t>これまでやったこと</a:t>
+            </a:r>
           </a:p>
         </p:txBody>
       </p:sp>
@@ -5325,7 +6906,7 @@
           <p:cNvPr id="3" name="コンテンツ プレースホルダー 2">
             <a:extLst>
               <a:ext uri="{FF2B5EF4-FFF2-40B4-BE49-F238E27FC236}">
-                <a16:creationId xmlns:a16="http://schemas.microsoft.com/office/drawing/2014/main" id="{C6ABDD3A-DC5B-2444-EABC-C39BAB28BC9A}"/>
+                <a16:creationId xmlns:a16="http://schemas.microsoft.com/office/drawing/2014/main" id="{EE055942-5A14-9AF6-26A8-4EA6D39F59C7}"/>
               </a:ext>
             </a:extLst>
           </p:cNvPr>
@@ -5341,14 +6922,104 @@
           <a:bodyPr/>
           <a:lstStyle/>
           <a:p>
-            <a:endParaRPr kumimoji="1" lang="ja-JP" altLang="en-US"/>
+            <a:r>
+              <a:rPr lang="ja-JP" altLang="en-US" dirty="0"/>
+              <a:t>・先行研究調査</a:t>
+            </a:r>
+            <a:endParaRPr lang="en-US" altLang="ja-JP" dirty="0"/>
+          </a:p>
+          <a:p>
+            <a:r>
+              <a:rPr lang="ja-JP" altLang="en-US" dirty="0"/>
+              <a:t>　・</a:t>
+            </a:r>
+            <a:r>
+              <a:rPr lang="en-US" altLang="ja-JP" dirty="0"/>
+              <a:t>HH</a:t>
+            </a:r>
+            <a:r>
+              <a:rPr lang="ja-JP" altLang="en-US" dirty="0"/>
+              <a:t>モデルなどの論文から既存の微分方程式モデルの勉強</a:t>
+            </a:r>
+            <a:endParaRPr lang="en-US" altLang="ja-JP" dirty="0"/>
+          </a:p>
+          <a:p>
+            <a:r>
+              <a:rPr lang="ja-JP" altLang="en-US" dirty="0"/>
+              <a:t>　・イオンチャネル等の初歩的な生理学の勉強</a:t>
+            </a:r>
+            <a:endParaRPr lang="en-US" altLang="ja-JP" dirty="0"/>
+          </a:p>
+          <a:p>
+            <a:r>
+              <a:rPr lang="ja-JP" altLang="en-US" dirty="0"/>
+              <a:t>・</a:t>
+            </a:r>
+            <a:r>
+              <a:rPr lang="en-US" altLang="ja-JP" dirty="0"/>
+              <a:t>RNN</a:t>
+            </a:r>
+            <a:r>
+              <a:rPr lang="ja-JP" altLang="en-US" dirty="0"/>
+              <a:t>の勉強と簡単な実装と学習（</a:t>
+            </a:r>
+            <a:r>
+              <a:rPr lang="en-US" altLang="ja-JP" dirty="0"/>
+              <a:t>sin</a:t>
+            </a:r>
+            <a:r>
+              <a:rPr lang="ja-JP" altLang="en-US" dirty="0"/>
+              <a:t>カーブ）</a:t>
+            </a:r>
+            <a:endParaRPr lang="en-US" altLang="ja-JP" dirty="0"/>
+          </a:p>
+          <a:p>
+            <a:r>
+              <a:rPr lang="ja-JP" altLang="en-US" dirty="0"/>
+              <a:t>・環境構築（学内</a:t>
+            </a:r>
+            <a:r>
+              <a:rPr lang="en-US" altLang="ja-JP" dirty="0"/>
+              <a:t>GPU</a:t>
+            </a:r>
+            <a:r>
+              <a:rPr lang="ja-JP" altLang="en-US" dirty="0"/>
+              <a:t>サーバに仮想環境</a:t>
+            </a:r>
+            <a:r>
+              <a:rPr lang="en-US" altLang="ja-JP" dirty="0"/>
+              <a:t>UV</a:t>
+            </a:r>
+            <a:r>
+              <a:rPr lang="ja-JP" altLang="en-US" dirty="0"/>
+              <a:t>を導入）</a:t>
+            </a:r>
+            <a:endParaRPr lang="en-US" altLang="ja-JP" dirty="0"/>
+          </a:p>
+          <a:p>
+            <a:endParaRPr lang="en-US" altLang="ja-JP" dirty="0"/>
+          </a:p>
+          <a:p>
+            <a:r>
+              <a:rPr lang="ja-JP" altLang="en-US" dirty="0"/>
+              <a:t>・</a:t>
+            </a:r>
+            <a:r>
+              <a:rPr lang="en-US" altLang="ja-JP" dirty="0"/>
+              <a:t>HH</a:t>
+            </a:r>
+            <a:r>
+              <a:rPr lang="ja-JP" altLang="en-US" dirty="0"/>
+              <a:t>モデルにパルス電流を入力し、入出力の組を作る（教師データを作る）（途中）</a:t>
+            </a:r>
+            <a:endParaRPr lang="en-US" altLang="ja-JP" dirty="0"/>
           </a:p>
         </p:txBody>
       </p:sp>
     </p:spTree>
     <p:extLst>
       <p:ext uri="{BB962C8B-B14F-4D97-AF65-F5344CB8AC3E}">
-        <p14:creationId xmlns:p14="http://schemas.microsoft.com/office/powerpoint/2010/main" val="389572266"/>
+        <p14:creationId xmlns:p14="http://schemas.microsoft.com/office/powerpoint/2010/main" val="1208527100"/>
       </p:ext>
     </p:extLst>
   </p:cSld>
